--- a/presentation/Urban_Climate_Insights_API_Presentation.pptx
+++ b/presentation/Urban_Climate_Insights_API_Presentation.pptx
@@ -3249,7 +3249,7 @@
               </a:defRPr>
             </a:pPr>
             <a:r>
-              <a:t>Student Name: [Fill Before Submission]</a:t>
+              <a:t>Student Name: Yuan Rui</a:t>
             </a:r>
           </a:p>
         </p:txBody>
@@ -3284,7 +3284,7 @@
               </a:defRPr>
             </a:pPr>
             <a:r>
-              <a:t>Student ID: [Fill Before Submission]</a:t>
+              <a:t>Student ID: 2022115981</a:t>
             </a:r>
           </a:p>
         </p:txBody>
@@ -3319,7 +3319,7 @@
               </a:defRPr>
             </a:pPr>
             <a:r>
-              <a:t>GitHub: [Public Repository URL]</a:t>
+              <a:t>GitHub: https://github.com/gapmaker1/urban-climate-insights-api</a:t>
             </a:r>
           </a:p>
         </p:txBody>
@@ -4630,6 +4630,21 @@
             </a:pPr>
             <a:r>
               <a:t>Pytest covers authentication, CRUD, and analytics behaviour.</a:t>
+            </a:r>
+          </a:p>
+          <a:p>
+            <a:pPr>
+              <a:spcAft>
+                <a:spcPts val="1000"/>
+              </a:spcAft>
+              <a:defRPr sz="1900">
+                <a:solidFill>
+                  <a:srgbClr val="0F172A"/>
+                </a:solidFill>
+              </a:defRPr>
+            </a:pPr>
+            <a:r>
+              <a:t>Technical report highlights stack choice, testing, limitations, and declared GenAI usage.</a:t>
             </a:r>
           </a:p>
           <a:p>

--- a/presentation/Urban_Climate_Insights_API_Presentation.pptx
+++ b/presentation/Urban_Climate_Insights_API_Presentation.pptx
@@ -1,20 +1,20 @@
 
 <file path=ppt/presentation.xml><?xml version="1.0" encoding="utf-8"?>
-<p:presentation xmlns:a="http://schemas.openxmlformats.org/drawingml/2006/main" xmlns:r="http://schemas.openxmlformats.org/officeDocument/2006/relationships" xmlns:p="http://schemas.openxmlformats.org/presentationml/2006/main" saveSubsetFonts="1" autoCompressPictures="0">
+<p:presentation xmlns:a="http://schemas.openxmlformats.org/drawingml/2006/main" xmlns:r="http://schemas.openxmlformats.org/officeDocument/2006/relationships" xmlns:p="http://schemas.openxmlformats.org/presentationml/2006/main" autoCompressPictures="0">
   <p:sldMasterIdLst>
     <p:sldMasterId id="2147483648" r:id="rId1"/>
   </p:sldMasterIdLst>
   <p:sldIdLst>
-    <p:sldId id="256" r:id="rId7"/>
-    <p:sldId id="257" r:id="rId8"/>
-    <p:sldId id="258" r:id="rId9"/>
-    <p:sldId id="259" r:id="rId10"/>
-    <p:sldId id="260" r:id="rId11"/>
-    <p:sldId id="261" r:id="rId12"/>
-    <p:sldId id="262" r:id="rId13"/>
-    <p:sldId id="263" r:id="rId14"/>
+    <p:sldId id="256" r:id="rId3"/>
+    <p:sldId id="257" r:id="rId4"/>
+    <p:sldId id="258" r:id="rId5"/>
+    <p:sldId id="259" r:id="rId6"/>
+    <p:sldId id="260" r:id="rId7"/>
+    <p:sldId id="261" r:id="rId8"/>
+    <p:sldId id="262" r:id="rId9"/>
+    <p:sldId id="264" r:id="rId10"/>
   </p:sldIdLst>
-  <p:sldSz cx="9144000" cy="6858000" type="screen4x3"/>
+  <p:sldSz cx="12191365" cy="6858000" type="screen4x3"/>
   <p:notesSz cx="6858000" cy="9144000"/>
   <p:defaultTextStyle>
     <a:defPPr>
@@ -111,6 +111,22 @@
       </a:defRPr>
     </a:lvl9pPr>
   </p:defaultTextStyle>
+  <p:extLst>
+    <p:ext uri="{EFAFB233-063F-42B5-8137-9DF3F51BA10A}">
+      <p15:sldGuideLst xmlns:p15="http://schemas.microsoft.com/office/powerpoint/2012/main">
+        <p15:guide id="1" orient="horz" pos="2172" userDrawn="1">
+          <p15:clr>
+            <a:srgbClr val="A4A3A4"/>
+          </p15:clr>
+        </p15:guide>
+        <p15:guide id="2" pos="2880" userDrawn="1">
+          <p15:clr>
+            <a:srgbClr val="A4A3A4"/>
+          </p15:clr>
+        </p15:guide>
+      </p15:sldGuideLst>
+    </p:ext>
+  </p:extLst>
 </p:presentation>
 </file>
 
@@ -295,7 +311,6 @@
           <a:p>
             <a:fld id="{5BCAD085-E8A6-8845-BD4E-CB4CCA059FC4}" type="datetimeFigureOut">
               <a:rPr lang="en-US" smtClean="0"/>
-              <a:t>1/27/13</a:t>
             </a:fld>
             <a:endParaRPr lang="en-US"/>
           </a:p>
@@ -337,18 +352,12 @@
           <a:p>
             <a:fld id="{C1FF6DA9-008F-8B48-92A6-B652298478BF}" type="slidenum">
               <a:rPr lang="en-US" smtClean="0"/>
-              <a:t>‹#›</a:t>
             </a:fld>
             <a:endParaRPr lang="en-US"/>
           </a:p>
         </p:txBody>
       </p:sp>
     </p:spTree>
-    <p:extLst>
-      <p:ext uri="{BB962C8B-B14F-4D97-AF65-F5344CB8AC3E}">
-        <p14:creationId xmlns:p14="http://schemas.microsoft.com/office/powerpoint/2010/main" val="3168075583"/>
-      </p:ext>
-    </p:extLst>
   </p:cSld>
   <p:clrMapOvr>
     <a:masterClrMapping/>
@@ -416,6 +425,7 @@
               <a:rPr lang="en-US" smtClean="0"/>
               <a:t>Click to edit Master text styles</a:t>
             </a:r>
+            <a:endParaRPr lang="en-US" smtClean="0"/>
           </a:p>
           <a:p>
             <a:pPr lvl="1"/>
@@ -423,6 +433,7 @@
               <a:rPr lang="en-US" smtClean="0"/>
               <a:t>Second level</a:t>
             </a:r>
+            <a:endParaRPr lang="en-US" smtClean="0"/>
           </a:p>
           <a:p>
             <a:pPr lvl="2"/>
@@ -430,6 +441,7 @@
               <a:rPr lang="en-US" smtClean="0"/>
               <a:t>Third level</a:t>
             </a:r>
+            <a:endParaRPr lang="en-US" smtClean="0"/>
           </a:p>
           <a:p>
             <a:pPr lvl="3"/>
@@ -437,6 +449,7 @@
               <a:rPr lang="en-US" smtClean="0"/>
               <a:t>Fourth level</a:t>
             </a:r>
+            <a:endParaRPr lang="en-US" smtClean="0"/>
           </a:p>
           <a:p>
             <a:pPr lvl="4"/>
@@ -465,7 +478,6 @@
           <a:p>
             <a:fld id="{5BCAD085-E8A6-8845-BD4E-CB4CCA059FC4}" type="datetimeFigureOut">
               <a:rPr lang="en-US" smtClean="0"/>
-              <a:t>1/27/13</a:t>
             </a:fld>
             <a:endParaRPr lang="en-US"/>
           </a:p>
@@ -507,18 +519,12 @@
           <a:p>
             <a:fld id="{C1FF6DA9-008F-8B48-92A6-B652298478BF}" type="slidenum">
               <a:rPr lang="en-US" smtClean="0"/>
-              <a:t>‹#›</a:t>
             </a:fld>
             <a:endParaRPr lang="en-US"/>
           </a:p>
         </p:txBody>
       </p:sp>
     </p:spTree>
-    <p:extLst>
-      <p:ext uri="{BB962C8B-B14F-4D97-AF65-F5344CB8AC3E}">
-        <p14:creationId xmlns:p14="http://schemas.microsoft.com/office/powerpoint/2010/main" val="2910927964"/>
-      </p:ext>
-    </p:extLst>
   </p:cSld>
   <p:clrMapOvr>
     <a:masterClrMapping/>
@@ -596,6 +602,7 @@
               <a:rPr lang="en-US" smtClean="0"/>
               <a:t>Click to edit Master text styles</a:t>
             </a:r>
+            <a:endParaRPr lang="en-US" smtClean="0"/>
           </a:p>
           <a:p>
             <a:pPr lvl="1"/>
@@ -603,6 +610,7 @@
               <a:rPr lang="en-US" smtClean="0"/>
               <a:t>Second level</a:t>
             </a:r>
+            <a:endParaRPr lang="en-US" smtClean="0"/>
           </a:p>
           <a:p>
             <a:pPr lvl="2"/>
@@ -610,6 +618,7 @@
               <a:rPr lang="en-US" smtClean="0"/>
               <a:t>Third level</a:t>
             </a:r>
+            <a:endParaRPr lang="en-US" smtClean="0"/>
           </a:p>
           <a:p>
             <a:pPr lvl="3"/>
@@ -617,6 +626,7 @@
               <a:rPr lang="en-US" smtClean="0"/>
               <a:t>Fourth level</a:t>
             </a:r>
+            <a:endParaRPr lang="en-US" smtClean="0"/>
           </a:p>
           <a:p>
             <a:pPr lvl="4"/>
@@ -645,7 +655,6 @@
           <a:p>
             <a:fld id="{5BCAD085-E8A6-8845-BD4E-CB4CCA059FC4}" type="datetimeFigureOut">
               <a:rPr lang="en-US" smtClean="0"/>
-              <a:t>1/27/13</a:t>
             </a:fld>
             <a:endParaRPr lang="en-US"/>
           </a:p>
@@ -687,18 +696,12 @@
           <a:p>
             <a:fld id="{C1FF6DA9-008F-8B48-92A6-B652298478BF}" type="slidenum">
               <a:rPr lang="en-US" smtClean="0"/>
-              <a:t>‹#›</a:t>
             </a:fld>
             <a:endParaRPr lang="en-US"/>
           </a:p>
         </p:txBody>
       </p:sp>
     </p:spTree>
-    <p:extLst>
-      <p:ext uri="{BB962C8B-B14F-4D97-AF65-F5344CB8AC3E}">
-        <p14:creationId xmlns:p14="http://schemas.microsoft.com/office/powerpoint/2010/main" val="3612223792"/>
-      </p:ext>
-    </p:extLst>
   </p:cSld>
   <p:clrMapOvr>
     <a:masterClrMapping/>
@@ -766,6 +769,7 @@
               <a:rPr lang="en-US" smtClean="0"/>
               <a:t>Click to edit Master text styles</a:t>
             </a:r>
+            <a:endParaRPr lang="en-US" smtClean="0"/>
           </a:p>
           <a:p>
             <a:pPr lvl="1"/>
@@ -773,6 +777,7 @@
               <a:rPr lang="en-US" smtClean="0"/>
               <a:t>Second level</a:t>
             </a:r>
+            <a:endParaRPr lang="en-US" smtClean="0"/>
           </a:p>
           <a:p>
             <a:pPr lvl="2"/>
@@ -780,6 +785,7 @@
               <a:rPr lang="en-US" smtClean="0"/>
               <a:t>Third level</a:t>
             </a:r>
+            <a:endParaRPr lang="en-US" smtClean="0"/>
           </a:p>
           <a:p>
             <a:pPr lvl="3"/>
@@ -787,6 +793,7 @@
               <a:rPr lang="en-US" smtClean="0"/>
               <a:t>Fourth level</a:t>
             </a:r>
+            <a:endParaRPr lang="en-US" smtClean="0"/>
           </a:p>
           <a:p>
             <a:pPr lvl="4"/>
@@ -815,7 +822,6 @@
           <a:p>
             <a:fld id="{5BCAD085-E8A6-8845-BD4E-CB4CCA059FC4}" type="datetimeFigureOut">
               <a:rPr lang="en-US" smtClean="0"/>
-              <a:t>1/27/13</a:t>
             </a:fld>
             <a:endParaRPr lang="en-US"/>
           </a:p>
@@ -857,18 +863,12 @@
           <a:p>
             <a:fld id="{C1FF6DA9-008F-8B48-92A6-B652298478BF}" type="slidenum">
               <a:rPr lang="en-US" smtClean="0"/>
-              <a:t>‹#›</a:t>
             </a:fld>
             <a:endParaRPr lang="en-US"/>
           </a:p>
         </p:txBody>
       </p:sp>
     </p:spTree>
-    <p:extLst>
-      <p:ext uri="{BB962C8B-B14F-4D97-AF65-F5344CB8AC3E}">
-        <p14:creationId xmlns:p14="http://schemas.microsoft.com/office/powerpoint/2010/main" val="2614314258"/>
-      </p:ext>
-    </p:extLst>
   </p:cSld>
   <p:clrMapOvr>
     <a:masterClrMapping/>
@@ -1041,6 +1041,7 @@
               <a:rPr lang="en-US" smtClean="0"/>
               <a:t>Click to edit Master text styles</a:t>
             </a:r>
+            <a:endParaRPr lang="en-US" smtClean="0"/>
           </a:p>
         </p:txBody>
       </p:sp>
@@ -1061,7 +1062,6 @@
           <a:p>
             <a:fld id="{5BCAD085-E8A6-8845-BD4E-CB4CCA059FC4}" type="datetimeFigureOut">
               <a:rPr lang="en-US" smtClean="0"/>
-              <a:t>1/27/13</a:t>
             </a:fld>
             <a:endParaRPr lang="en-US"/>
           </a:p>
@@ -1103,18 +1103,12 @@
           <a:p>
             <a:fld id="{C1FF6DA9-008F-8B48-92A6-B652298478BF}" type="slidenum">
               <a:rPr lang="en-US" smtClean="0"/>
-              <a:t>‹#›</a:t>
             </a:fld>
             <a:endParaRPr lang="en-US"/>
           </a:p>
         </p:txBody>
       </p:sp>
     </p:spTree>
-    <p:extLst>
-      <p:ext uri="{BB962C8B-B14F-4D97-AF65-F5344CB8AC3E}">
-        <p14:creationId xmlns:p14="http://schemas.microsoft.com/office/powerpoint/2010/main" val="960648375"/>
-      </p:ext>
-    </p:extLst>
   </p:cSld>
   <p:clrMapOvr>
     <a:masterClrMapping/>
@@ -1215,6 +1209,7 @@
               <a:rPr lang="en-US" smtClean="0"/>
               <a:t>Click to edit Master text styles</a:t>
             </a:r>
+            <a:endParaRPr lang="en-US" smtClean="0"/>
           </a:p>
           <a:p>
             <a:pPr lvl="1"/>
@@ -1222,6 +1217,7 @@
               <a:rPr lang="en-US" smtClean="0"/>
               <a:t>Second level</a:t>
             </a:r>
+            <a:endParaRPr lang="en-US" smtClean="0"/>
           </a:p>
           <a:p>
             <a:pPr lvl="2"/>
@@ -1229,6 +1225,7 @@
               <a:rPr lang="en-US" smtClean="0"/>
               <a:t>Third level</a:t>
             </a:r>
+            <a:endParaRPr lang="en-US" smtClean="0"/>
           </a:p>
           <a:p>
             <a:pPr lvl="3"/>
@@ -1236,6 +1233,7 @@
               <a:rPr lang="en-US" smtClean="0"/>
               <a:t>Fourth level</a:t>
             </a:r>
+            <a:endParaRPr lang="en-US" smtClean="0"/>
           </a:p>
           <a:p>
             <a:pPr lvl="4"/>
@@ -1300,6 +1298,7 @@
               <a:rPr lang="en-US" smtClean="0"/>
               <a:t>Click to edit Master text styles</a:t>
             </a:r>
+            <a:endParaRPr lang="en-US" smtClean="0"/>
           </a:p>
           <a:p>
             <a:pPr lvl="1"/>
@@ -1307,6 +1306,7 @@
               <a:rPr lang="en-US" smtClean="0"/>
               <a:t>Second level</a:t>
             </a:r>
+            <a:endParaRPr lang="en-US" smtClean="0"/>
           </a:p>
           <a:p>
             <a:pPr lvl="2"/>
@@ -1314,6 +1314,7 @@
               <a:rPr lang="en-US" smtClean="0"/>
               <a:t>Third level</a:t>
             </a:r>
+            <a:endParaRPr lang="en-US" smtClean="0"/>
           </a:p>
           <a:p>
             <a:pPr lvl="3"/>
@@ -1321,6 +1322,7 @@
               <a:rPr lang="en-US" smtClean="0"/>
               <a:t>Fourth level</a:t>
             </a:r>
+            <a:endParaRPr lang="en-US" smtClean="0"/>
           </a:p>
           <a:p>
             <a:pPr lvl="4"/>
@@ -1349,7 +1351,6 @@
           <a:p>
             <a:fld id="{5BCAD085-E8A6-8845-BD4E-CB4CCA059FC4}" type="datetimeFigureOut">
               <a:rPr lang="en-US" smtClean="0"/>
-              <a:t>1/27/13</a:t>
             </a:fld>
             <a:endParaRPr lang="en-US"/>
           </a:p>
@@ -1391,18 +1392,12 @@
           <a:p>
             <a:fld id="{C1FF6DA9-008F-8B48-92A6-B652298478BF}" type="slidenum">
               <a:rPr lang="en-US" smtClean="0"/>
-              <a:t>‹#›</a:t>
             </a:fld>
             <a:endParaRPr lang="en-US"/>
           </a:p>
         </p:txBody>
       </p:sp>
     </p:spTree>
-    <p:extLst>
-      <p:ext uri="{BB962C8B-B14F-4D97-AF65-F5344CB8AC3E}">
-        <p14:creationId xmlns:p14="http://schemas.microsoft.com/office/powerpoint/2010/main" val="2782244947"/>
-      </p:ext>
-    </p:extLst>
   </p:cSld>
   <p:clrMapOvr>
     <a:masterClrMapping/>
@@ -1516,6 +1511,7 @@
               <a:rPr lang="en-US" smtClean="0"/>
               <a:t>Click to edit Master text styles</a:t>
             </a:r>
+            <a:endParaRPr lang="en-US" smtClean="0"/>
           </a:p>
         </p:txBody>
       </p:sp>
@@ -1572,6 +1568,7 @@
               <a:rPr lang="en-US" smtClean="0"/>
               <a:t>Click to edit Master text styles</a:t>
             </a:r>
+            <a:endParaRPr lang="en-US" smtClean="0"/>
           </a:p>
           <a:p>
             <a:pPr lvl="1"/>
@@ -1579,6 +1576,7 @@
               <a:rPr lang="en-US" smtClean="0"/>
               <a:t>Second level</a:t>
             </a:r>
+            <a:endParaRPr lang="en-US" smtClean="0"/>
           </a:p>
           <a:p>
             <a:pPr lvl="2"/>
@@ -1586,6 +1584,7 @@
               <a:rPr lang="en-US" smtClean="0"/>
               <a:t>Third level</a:t>
             </a:r>
+            <a:endParaRPr lang="en-US" smtClean="0"/>
           </a:p>
           <a:p>
             <a:pPr lvl="3"/>
@@ -1593,6 +1592,7 @@
               <a:rPr lang="en-US" smtClean="0"/>
               <a:t>Fourth level</a:t>
             </a:r>
+            <a:endParaRPr lang="en-US" smtClean="0"/>
           </a:p>
           <a:p>
             <a:pPr lvl="4"/>
@@ -1666,6 +1666,7 @@
               <a:rPr lang="en-US" smtClean="0"/>
               <a:t>Click to edit Master text styles</a:t>
             </a:r>
+            <a:endParaRPr lang="en-US" smtClean="0"/>
           </a:p>
         </p:txBody>
       </p:sp>
@@ -1722,6 +1723,7 @@
               <a:rPr lang="en-US" smtClean="0"/>
               <a:t>Click to edit Master text styles</a:t>
             </a:r>
+            <a:endParaRPr lang="en-US" smtClean="0"/>
           </a:p>
           <a:p>
             <a:pPr lvl="1"/>
@@ -1729,6 +1731,7 @@
               <a:rPr lang="en-US" smtClean="0"/>
               <a:t>Second level</a:t>
             </a:r>
+            <a:endParaRPr lang="en-US" smtClean="0"/>
           </a:p>
           <a:p>
             <a:pPr lvl="2"/>
@@ -1736,6 +1739,7 @@
               <a:rPr lang="en-US" smtClean="0"/>
               <a:t>Third level</a:t>
             </a:r>
+            <a:endParaRPr lang="en-US" smtClean="0"/>
           </a:p>
           <a:p>
             <a:pPr lvl="3"/>
@@ -1743,6 +1747,7 @@
               <a:rPr lang="en-US" smtClean="0"/>
               <a:t>Fourth level</a:t>
             </a:r>
+            <a:endParaRPr lang="en-US" smtClean="0"/>
           </a:p>
           <a:p>
             <a:pPr lvl="4"/>
@@ -1771,7 +1776,6 @@
           <a:p>
             <a:fld id="{5BCAD085-E8A6-8845-BD4E-CB4CCA059FC4}" type="datetimeFigureOut">
               <a:rPr lang="en-US" smtClean="0"/>
-              <a:t>1/27/13</a:t>
             </a:fld>
             <a:endParaRPr lang="en-US"/>
           </a:p>
@@ -1813,18 +1817,12 @@
           <a:p>
             <a:fld id="{C1FF6DA9-008F-8B48-92A6-B652298478BF}" type="slidenum">
               <a:rPr lang="en-US" smtClean="0"/>
-              <a:t>‹#›</a:t>
             </a:fld>
             <a:endParaRPr lang="en-US"/>
           </a:p>
         </p:txBody>
       </p:sp>
     </p:spTree>
-    <p:extLst>
-      <p:ext uri="{BB962C8B-B14F-4D97-AF65-F5344CB8AC3E}">
-        <p14:creationId xmlns:p14="http://schemas.microsoft.com/office/powerpoint/2010/main" val="990158736"/>
-      </p:ext>
-    </p:extLst>
   </p:cSld>
   <p:clrMapOvr>
     <a:masterClrMapping/>
@@ -1889,7 +1887,6 @@
           <a:p>
             <a:fld id="{5BCAD085-E8A6-8845-BD4E-CB4CCA059FC4}" type="datetimeFigureOut">
               <a:rPr lang="en-US" smtClean="0"/>
-              <a:t>1/27/13</a:t>
             </a:fld>
             <a:endParaRPr lang="en-US"/>
           </a:p>
@@ -1931,18 +1928,12 @@
           <a:p>
             <a:fld id="{C1FF6DA9-008F-8B48-92A6-B652298478BF}" type="slidenum">
               <a:rPr lang="en-US" smtClean="0"/>
-              <a:t>‹#›</a:t>
             </a:fld>
             <a:endParaRPr lang="en-US"/>
           </a:p>
         </p:txBody>
       </p:sp>
     </p:spTree>
-    <p:extLst>
-      <p:ext uri="{BB962C8B-B14F-4D97-AF65-F5344CB8AC3E}">
-        <p14:creationId xmlns:p14="http://schemas.microsoft.com/office/powerpoint/2010/main" val="727027711"/>
-      </p:ext>
-    </p:extLst>
   </p:cSld>
   <p:clrMapOvr>
     <a:masterClrMapping/>
@@ -1984,7 +1975,6 @@
           <a:p>
             <a:fld id="{5BCAD085-E8A6-8845-BD4E-CB4CCA059FC4}" type="datetimeFigureOut">
               <a:rPr lang="en-US" smtClean="0"/>
-              <a:t>1/27/13</a:t>
             </a:fld>
             <a:endParaRPr lang="en-US"/>
           </a:p>
@@ -2026,18 +2016,12 @@
           <a:p>
             <a:fld id="{C1FF6DA9-008F-8B48-92A6-B652298478BF}" type="slidenum">
               <a:rPr lang="en-US" smtClean="0"/>
-              <a:t>‹#›</a:t>
             </a:fld>
             <a:endParaRPr lang="en-US"/>
           </a:p>
         </p:txBody>
       </p:sp>
     </p:spTree>
-    <p:extLst>
-      <p:ext uri="{BB962C8B-B14F-4D97-AF65-F5344CB8AC3E}">
-        <p14:creationId xmlns:p14="http://schemas.microsoft.com/office/powerpoint/2010/main" val="1212999818"/>
-      </p:ext>
-    </p:extLst>
   </p:cSld>
   <p:clrMapOvr>
     <a:masterClrMapping/>
@@ -2147,6 +2131,7 @@
               <a:rPr lang="en-US" smtClean="0"/>
               <a:t>Click to edit Master text styles</a:t>
             </a:r>
+            <a:endParaRPr lang="en-US" smtClean="0"/>
           </a:p>
           <a:p>
             <a:pPr lvl="1"/>
@@ -2154,6 +2139,7 @@
               <a:rPr lang="en-US" smtClean="0"/>
               <a:t>Second level</a:t>
             </a:r>
+            <a:endParaRPr lang="en-US" smtClean="0"/>
           </a:p>
           <a:p>
             <a:pPr lvl="2"/>
@@ -2161,6 +2147,7 @@
               <a:rPr lang="en-US" smtClean="0"/>
               <a:t>Third level</a:t>
             </a:r>
+            <a:endParaRPr lang="en-US" smtClean="0"/>
           </a:p>
           <a:p>
             <a:pPr lvl="3"/>
@@ -2168,6 +2155,7 @@
               <a:rPr lang="en-US" smtClean="0"/>
               <a:t>Fourth level</a:t>
             </a:r>
+            <a:endParaRPr lang="en-US" smtClean="0"/>
           </a:p>
           <a:p>
             <a:pPr lvl="4"/>
@@ -2241,6 +2229,7 @@
               <a:rPr lang="en-US" smtClean="0"/>
               <a:t>Click to edit Master text styles</a:t>
             </a:r>
+            <a:endParaRPr lang="en-US" smtClean="0"/>
           </a:p>
         </p:txBody>
       </p:sp>
@@ -2261,7 +2250,6 @@
           <a:p>
             <a:fld id="{5BCAD085-E8A6-8845-BD4E-CB4CCA059FC4}" type="datetimeFigureOut">
               <a:rPr lang="en-US" smtClean="0"/>
-              <a:t>1/27/13</a:t>
             </a:fld>
             <a:endParaRPr lang="en-US"/>
           </a:p>
@@ -2303,18 +2291,12 @@
           <a:p>
             <a:fld id="{C1FF6DA9-008F-8B48-92A6-B652298478BF}" type="slidenum">
               <a:rPr lang="en-US" smtClean="0"/>
-              <a:t>‹#›</a:t>
             </a:fld>
             <a:endParaRPr lang="en-US"/>
           </a:p>
         </p:txBody>
       </p:sp>
     </p:spTree>
-    <p:extLst>
-      <p:ext uri="{BB962C8B-B14F-4D97-AF65-F5344CB8AC3E}">
-        <p14:creationId xmlns:p14="http://schemas.microsoft.com/office/powerpoint/2010/main" val="1840726560"/>
-      </p:ext>
-    </p:extLst>
   </p:cSld>
   <p:clrMapOvr>
     <a:masterClrMapping/>
@@ -2494,6 +2476,7 @@
               <a:rPr lang="en-US" smtClean="0"/>
               <a:t>Click to edit Master text styles</a:t>
             </a:r>
+            <a:endParaRPr lang="en-US" smtClean="0"/>
           </a:p>
         </p:txBody>
       </p:sp>
@@ -2514,7 +2497,6 @@
           <a:p>
             <a:fld id="{5BCAD085-E8A6-8845-BD4E-CB4CCA059FC4}" type="datetimeFigureOut">
               <a:rPr lang="en-US" smtClean="0"/>
-              <a:t>1/27/13</a:t>
             </a:fld>
             <a:endParaRPr lang="en-US"/>
           </a:p>
@@ -2556,18 +2538,12 @@
           <a:p>
             <a:fld id="{C1FF6DA9-008F-8B48-92A6-B652298478BF}" type="slidenum">
               <a:rPr lang="en-US" smtClean="0"/>
-              <a:t>‹#›</a:t>
             </a:fld>
             <a:endParaRPr lang="en-US"/>
           </a:p>
         </p:txBody>
       </p:sp>
     </p:spTree>
-    <p:extLst>
-      <p:ext uri="{BB962C8B-B14F-4D97-AF65-F5344CB8AC3E}">
-        <p14:creationId xmlns:p14="http://schemas.microsoft.com/office/powerpoint/2010/main" val="3889236939"/>
-      </p:ext>
-    </p:extLst>
   </p:cSld>
   <p:clrMapOvr>
     <a:masterClrMapping/>
@@ -2660,6 +2636,7 @@
               <a:rPr lang="en-US" smtClean="0"/>
               <a:t>Click to edit Master text styles</a:t>
             </a:r>
+            <a:endParaRPr lang="en-US" smtClean="0"/>
           </a:p>
           <a:p>
             <a:pPr lvl="1"/>
@@ -2667,6 +2644,7 @@
               <a:rPr lang="en-US" smtClean="0"/>
               <a:t>Second level</a:t>
             </a:r>
+            <a:endParaRPr lang="en-US" smtClean="0"/>
           </a:p>
           <a:p>
             <a:pPr lvl="2"/>
@@ -2674,6 +2652,7 @@
               <a:rPr lang="en-US" smtClean="0"/>
               <a:t>Third level</a:t>
             </a:r>
+            <a:endParaRPr lang="en-US" smtClean="0"/>
           </a:p>
           <a:p>
             <a:pPr lvl="3"/>
@@ -2681,6 +2660,7 @@
               <a:rPr lang="en-US" smtClean="0"/>
               <a:t>Fourth level</a:t>
             </a:r>
+            <a:endParaRPr lang="en-US" smtClean="0"/>
           </a:p>
           <a:p>
             <a:pPr lvl="4"/>
@@ -2727,7 +2707,6 @@
           <a:p>
             <a:fld id="{5BCAD085-E8A6-8845-BD4E-CB4CCA059FC4}" type="datetimeFigureOut">
               <a:rPr lang="en-US" smtClean="0"/>
-              <a:t>1/27/13</a:t>
             </a:fld>
             <a:endParaRPr lang="en-US"/>
           </a:p>
@@ -2805,18 +2784,12 @@
           <a:p>
             <a:fld id="{C1FF6DA9-008F-8B48-92A6-B652298478BF}" type="slidenum">
               <a:rPr lang="en-US" smtClean="0"/>
-              <a:t>‹#›</a:t>
             </a:fld>
             <a:endParaRPr lang="en-US"/>
           </a:p>
         </p:txBody>
       </p:sp>
     </p:spTree>
-    <p:extLst>
-      <p:ext uri="{BB962C8B-B14F-4D97-AF65-F5344CB8AC3E}">
-        <p14:creationId xmlns:p14="http://schemas.microsoft.com/office/powerpoint/2010/main" val="2209977519"/>
-      </p:ext>
-    </p:extLst>
   </p:cSld>
   <p:clrMap bg1="lt1" tx1="dk1" bg2="lt2" tx2="dk2" accent1="accent1" accent2="accent2" accent3="accent3" accent4="accent4" accent5="accent5" accent6="accent6" hlink="hlink" folHlink="folHlink"/>
   <p:sldLayoutIdLst>
@@ -2854,7 +2827,7 @@
         <a:spcBef>
           <a:spcPct val="20000"/>
         </a:spcBef>
-        <a:buFont typeface="Arial"/>
+        <a:buFont typeface="Arial" panose="020B0604020202020204"/>
         <a:buChar char="•"/>
         <a:defRPr sz="3200" kern="1200">
           <a:solidFill>
@@ -2869,7 +2842,7 @@
         <a:spcBef>
           <a:spcPct val="20000"/>
         </a:spcBef>
-        <a:buFont typeface="Arial"/>
+        <a:buFont typeface="Arial" panose="020B0604020202020204"/>
         <a:buChar char="–"/>
         <a:defRPr sz="2800" kern="1200">
           <a:solidFill>
@@ -2884,7 +2857,7 @@
         <a:spcBef>
           <a:spcPct val="20000"/>
         </a:spcBef>
-        <a:buFont typeface="Arial"/>
+        <a:buFont typeface="Arial" panose="020B0604020202020204"/>
         <a:buChar char="•"/>
         <a:defRPr sz="2400" kern="1200">
           <a:solidFill>
@@ -2899,7 +2872,7 @@
         <a:spcBef>
           <a:spcPct val="20000"/>
         </a:spcBef>
-        <a:buFont typeface="Arial"/>
+        <a:buFont typeface="Arial" panose="020B0604020202020204"/>
         <a:buChar char="–"/>
         <a:defRPr sz="2000" kern="1200">
           <a:solidFill>
@@ -2914,7 +2887,7 @@
         <a:spcBef>
           <a:spcPct val="20000"/>
         </a:spcBef>
-        <a:buFont typeface="Arial"/>
+        <a:buFont typeface="Arial" panose="020B0604020202020204"/>
         <a:buChar char="»"/>
         <a:defRPr sz="2000" kern="1200">
           <a:solidFill>
@@ -2929,7 +2902,7 @@
         <a:spcBef>
           <a:spcPct val="20000"/>
         </a:spcBef>
-        <a:buFont typeface="Arial"/>
+        <a:buFont typeface="Arial" panose="020B0604020202020204"/>
         <a:buChar char="•"/>
         <a:defRPr sz="2000" kern="1200">
           <a:solidFill>
@@ -2944,7 +2917,7 @@
         <a:spcBef>
           <a:spcPct val="20000"/>
         </a:spcBef>
-        <a:buFont typeface="Arial"/>
+        <a:buFont typeface="Arial" panose="020B0604020202020204"/>
         <a:buChar char="•"/>
         <a:defRPr sz="2000" kern="1200">
           <a:solidFill>
@@ -2959,7 +2932,7 @@
         <a:spcBef>
           <a:spcPct val="20000"/>
         </a:spcBef>
-        <a:buFont typeface="Arial"/>
+        <a:buFont typeface="Arial" panose="020B0604020202020204"/>
         <a:buChar char="•"/>
         <a:defRPr sz="2000" kern="1200">
           <a:solidFill>
@@ -2974,7 +2947,7 @@
         <a:spcBef>
           <a:spcPct val="20000"/>
         </a:spcBef>
-        <a:buFont typeface="Arial"/>
+        <a:buFont typeface="Arial" panose="020B0604020202020204"/>
         <a:buChar char="•"/>
         <a:defRPr sz="2000" kern="1200">
           <a:solidFill>
@@ -3086,7 +3059,7 @@
 </file>
 
 <file path=ppt/slides/slide1.xml><?xml version="1.0" encoding="utf-8"?>
-<p:sld xmlns:a="http://schemas.openxmlformats.org/drawingml/2006/main" xmlns:p="http://schemas.openxmlformats.org/presentationml/2006/main" xmlns:r="http://schemas.openxmlformats.org/officeDocument/2006/relationships">
+<p:sld xmlns:a="http://schemas.openxmlformats.org/drawingml/2006/main" xmlns:r="http://schemas.openxmlformats.org/officeDocument/2006/relationships" xmlns:p="http://schemas.openxmlformats.org/presentationml/2006/main">
   <p:cSld>
     <p:spTree>
       <p:nvGrpSpPr>
@@ -3097,95 +3070,23 @@
       <p:grpSpPr/>
       <p:sp>
         <p:nvSpPr>
-          <p:cNvPr id="2" name="TextBox 1"/>
-          <p:cNvSpPr txBox="1"/>
-          <p:nvPr/>
-        </p:nvSpPr>
-        <p:spPr>
-          <a:xfrm>
-            <a:off x="640080" y="548640"/>
-            <a:ext cx="7772400" cy="1005840"/>
+          <p:cNvPr id="2" name="Rectangle 1"/>
+          <p:cNvSpPr/>
+          <p:nvPr/>
+        </p:nvSpPr>
+        <p:spPr>
+          <a:xfrm>
+            <a:off x="0" y="0"/>
+            <a:ext cx="12191695" cy="6858000"/>
           </a:xfrm>
           <a:prstGeom prst="rect">
             <a:avLst/>
           </a:prstGeom>
-          <a:noFill/>
-        </p:spPr>
-        <p:txBody>
-          <a:bodyPr wrap="none">
-            <a:spAutoFit/>
-          </a:bodyPr>
-          <a:lstStyle/>
-          <a:p>
-            <a:pPr>
-              <a:defRPr sz="2800" b="1">
-                <a:solidFill>
-                  <a:srgbClr val="0F172A"/>
-                </a:solidFill>
-              </a:defRPr>
-            </a:pPr>
-            <a:r>
-              <a:t>Urban Climate Insights API</a:t>
-            </a:r>
-          </a:p>
-        </p:txBody>
-      </p:sp>
-      <p:sp>
-        <p:nvSpPr>
-          <p:cNvPr id="3" name="TextBox 2"/>
-          <p:cNvSpPr txBox="1"/>
-          <p:nvPr/>
-        </p:nvSpPr>
-        <p:spPr>
-          <a:xfrm>
-            <a:off x="685800" y="1417320"/>
-            <a:ext cx="7315200" cy="731520"/>
-          </a:xfrm>
-          <a:prstGeom prst="rect">
-            <a:avLst/>
-          </a:prstGeom>
-          <a:noFill/>
-        </p:spPr>
-        <p:txBody>
-          <a:bodyPr wrap="none">
-            <a:spAutoFit/>
-          </a:bodyPr>
-          <a:lstStyle/>
-          <a:p>
-            <a:pPr>
-              <a:defRPr sz="1300">
-                <a:solidFill>
-                  <a:srgbClr val="334155"/>
-                </a:solidFill>
-              </a:defRPr>
-            </a:pPr>
-            <a:r>
-              <a:t>Web Services and Web Data coursework presentation</a:t>
-            </a:r>
-          </a:p>
-        </p:txBody>
-      </p:sp>
-      <p:sp>
-        <p:nvSpPr>
-          <p:cNvPr id="4" name="Rounded Rectangle 3"/>
-          <p:cNvSpPr/>
-          <p:nvPr/>
-        </p:nvSpPr>
-        <p:spPr>
-          <a:xfrm>
-            <a:off x="640080" y="1920240"/>
-            <a:ext cx="7955279" cy="1920240"/>
-          </a:xfrm>
-          <a:prstGeom prst="roundRect">
-            <a:avLst/>
-          </a:prstGeom>
           <a:solidFill>
-            <a:srgbClr val="F1F5F9"/>
+            <a:srgbClr val="0F172A"/>
           </a:solidFill>
           <a:ln>
-            <a:solidFill>
-              <a:srgbClr val="0D9488"/>
-            </a:solidFill>
+            <a:noFill/>
           </a:ln>
         </p:spPr>
         <p:style>
@@ -3206,29 +3107,209 @@
           <a:bodyPr rtlCol="0" anchor="ctr"/>
           <a:lstStyle/>
           <a:p>
-            <a:pPr>
-              <a:defRPr sz="2600" b="1">
-                <a:solidFill>
-                  <a:srgbClr val="0F172A"/>
-                </a:solidFill>
-              </a:defRPr>
-            </a:pPr>
-            <a:r>
-              <a:t>FastAPI + SQLAlchemy + JWT + Open-Meteo integration</a:t>
-            </a:r>
-          </a:p>
-        </p:txBody>
-      </p:sp>
-      <p:sp>
-        <p:nvSpPr>
-          <p:cNvPr id="5" name="TextBox 4"/>
+            <a:pPr algn="ctr"/>
+          </a:p>
+        </p:txBody>
+      </p:sp>
+      <p:sp>
+        <p:nvSpPr>
+          <p:cNvPr id="3" name="Oval 2"/>
+          <p:cNvSpPr/>
+          <p:nvPr/>
+        </p:nvSpPr>
+        <p:spPr>
+          <a:xfrm>
+            <a:off x="7955279" y="-731520"/>
+            <a:ext cx="3840480" cy="3840480"/>
+          </a:xfrm>
+          <a:prstGeom prst="ellipse">
+            <a:avLst/>
+          </a:prstGeom>
+          <a:solidFill>
+            <a:srgbClr val="0D9488"/>
+          </a:solidFill>
+          <a:ln>
+            <a:noFill/>
+          </a:ln>
+        </p:spPr>
+        <p:style>
+          <a:lnRef idx="1">
+            <a:schemeClr val="accent1"/>
+          </a:lnRef>
+          <a:fillRef idx="3">
+            <a:schemeClr val="accent1"/>
+          </a:fillRef>
+          <a:effectRef idx="2">
+            <a:schemeClr val="accent1"/>
+          </a:effectRef>
+          <a:fontRef idx="minor">
+            <a:schemeClr val="lt1"/>
+          </a:fontRef>
+        </p:style>
+        <p:txBody>
+          <a:bodyPr rtlCol="0" anchor="ctr"/>
+          <a:lstStyle/>
+          <a:p>
+            <a:pPr algn="ctr"/>
+          </a:p>
+        </p:txBody>
+      </p:sp>
+      <p:sp>
+        <p:nvSpPr>
+          <p:cNvPr id="4" name="Oval 3"/>
+          <p:cNvSpPr/>
+          <p:nvPr/>
+        </p:nvSpPr>
+        <p:spPr>
+          <a:xfrm>
+            <a:off x="9418320" y="4389120"/>
+            <a:ext cx="2560320" cy="2560320"/>
+          </a:xfrm>
+          <a:prstGeom prst="ellipse">
+            <a:avLst/>
+          </a:prstGeom>
+          <a:solidFill>
+            <a:srgbClr val="F97316"/>
+          </a:solidFill>
+          <a:ln>
+            <a:noFill/>
+          </a:ln>
+        </p:spPr>
+        <p:style>
+          <a:lnRef idx="1">
+            <a:schemeClr val="accent1"/>
+          </a:lnRef>
+          <a:fillRef idx="3">
+            <a:schemeClr val="accent1"/>
+          </a:fillRef>
+          <a:effectRef idx="2">
+            <a:schemeClr val="accent1"/>
+          </a:effectRef>
+          <a:fontRef idx="minor">
+            <a:schemeClr val="lt1"/>
+          </a:fontRef>
+        </p:style>
+        <p:txBody>
+          <a:bodyPr rtlCol="0" anchor="ctr"/>
+          <a:lstStyle/>
+          <a:p>
+            <a:pPr algn="ctr"/>
+          </a:p>
+        </p:txBody>
+      </p:sp>
+      <p:sp>
+        <p:nvSpPr>
+          <p:cNvPr id="5" name="Oval 4"/>
+          <p:cNvSpPr/>
+          <p:nvPr/>
+        </p:nvSpPr>
+        <p:spPr>
+          <a:xfrm>
+            <a:off x="-457200" y="5212080"/>
+            <a:ext cx="2194560" cy="2194560"/>
+          </a:xfrm>
+          <a:prstGeom prst="ellipse">
+            <a:avLst/>
+          </a:prstGeom>
+          <a:solidFill>
+            <a:srgbClr val="F59E0B"/>
+          </a:solidFill>
+          <a:ln>
+            <a:noFill/>
+          </a:ln>
+        </p:spPr>
+        <p:style>
+          <a:lnRef idx="1">
+            <a:schemeClr val="accent1"/>
+          </a:lnRef>
+          <a:fillRef idx="3">
+            <a:schemeClr val="accent1"/>
+          </a:fillRef>
+          <a:effectRef idx="2">
+            <a:schemeClr val="accent1"/>
+          </a:effectRef>
+          <a:fontRef idx="minor">
+            <a:schemeClr val="lt1"/>
+          </a:fontRef>
+        </p:style>
+        <p:txBody>
+          <a:bodyPr rtlCol="0" anchor="ctr"/>
+          <a:lstStyle/>
+          <a:p>
+            <a:pPr algn="ctr"/>
+          </a:p>
+        </p:txBody>
+      </p:sp>
+      <p:sp>
+        <p:nvSpPr>
+          <p:cNvPr id="6" name="Rounded Rectangle 5"/>
+          <p:cNvSpPr/>
+          <p:nvPr/>
+        </p:nvSpPr>
+        <p:spPr>
+          <a:xfrm>
+            <a:off x="749808" y="566928"/>
+            <a:ext cx="2240280" cy="384048"/>
+          </a:xfrm>
+          <a:prstGeom prst="roundRect">
+            <a:avLst/>
+          </a:prstGeom>
+          <a:solidFill>
+            <a:srgbClr val="0D9488"/>
+          </a:solidFill>
+          <a:ln w="19050">
+            <a:solidFill>
+              <a:srgbClr val="0D9488"/>
+            </a:solidFill>
+          </a:ln>
+        </p:spPr>
+        <p:style>
+          <a:lnRef idx="1">
+            <a:schemeClr val="accent1"/>
+          </a:lnRef>
+          <a:fillRef idx="3">
+            <a:schemeClr val="accent1"/>
+          </a:fillRef>
+          <a:effectRef idx="2">
+            <a:schemeClr val="accent1"/>
+          </a:effectRef>
+          <a:fontRef idx="minor">
+            <a:schemeClr val="lt1"/>
+          </a:fontRef>
+        </p:style>
+        <p:txBody>
+          <a:bodyPr rtlCol="0" anchor="ctr"/>
+          <a:lstStyle/>
+          <a:p>
+            <a:pPr algn="ctr"/>
+            <a:r>
+              <a:rPr sz="1500" b="1">
+                <a:solidFill>
+                  <a:srgbClr val="FFFFFF"/>
+                </a:solidFill>
+                <a:latin typeface="Aptos"/>
+              </a:rPr>
+              <a:t>Coursework Project</a:t>
+            </a:r>
+            <a:endParaRPr sz="1500" b="1">
+              <a:solidFill>
+                <a:srgbClr val="FFFFFF"/>
+              </a:solidFill>
+              <a:latin typeface="Aptos"/>
+            </a:endParaRPr>
+          </a:p>
+        </p:txBody>
+      </p:sp>
+      <p:sp>
+        <p:nvSpPr>
+          <p:cNvPr id="7" name="TextBox 6"/>
           <p:cNvSpPr txBox="1"/>
           <p:nvPr/>
         </p:nvSpPr>
         <p:spPr>
           <a:xfrm>
-            <a:off x="777240" y="4297680"/>
-            <a:ext cx="6858000" cy="320040"/>
+            <a:off x="749808" y="1097280"/>
+            <a:ext cx="6400800" cy="1234440"/>
           </a:xfrm>
           <a:prstGeom prst="rect">
             <a:avLst/>
@@ -3236,34 +3317,41 @@
           <a:noFill/>
         </p:spPr>
         <p:txBody>
-          <a:bodyPr wrap="none">
+          <a:bodyPr wrap="square" anchor="t">
             <a:spAutoFit/>
           </a:bodyPr>
           <a:lstStyle/>
           <a:p>
-            <a:pPr>
-              <a:defRPr sz="1600">
-                <a:solidFill>
-                  <a:srgbClr val="334155"/>
-                </a:solidFill>
-              </a:defRPr>
-            </a:pPr>
-            <a:r>
-              <a:t>Student Name: Yuan Rui</a:t>
-            </a:r>
-          </a:p>
-        </p:txBody>
-      </p:sp>
-      <p:sp>
-        <p:nvSpPr>
-          <p:cNvPr id="6" name="TextBox 5"/>
+            <a:pPr algn="l"/>
+            <a:r>
+              <a:rPr sz="3100" b="1">
+                <a:solidFill>
+                  <a:srgbClr val="FFFFFF"/>
+                </a:solidFill>
+                <a:latin typeface="Aptos Display"/>
+              </a:rPr>
+              <a:t>Urban Climate
+Insights API</a:t>
+            </a:r>
+            <a:endParaRPr sz="3100" b="1">
+              <a:solidFill>
+                <a:srgbClr val="FFFFFF"/>
+              </a:solidFill>
+              <a:latin typeface="Aptos Display"/>
+            </a:endParaRPr>
+          </a:p>
+        </p:txBody>
+      </p:sp>
+      <p:sp>
+        <p:nvSpPr>
+          <p:cNvPr id="8" name="TextBox 7"/>
           <p:cNvSpPr txBox="1"/>
           <p:nvPr/>
         </p:nvSpPr>
         <p:spPr>
           <a:xfrm>
-            <a:off x="777240" y="4709160"/>
-            <a:ext cx="6858000" cy="320040"/>
+            <a:off x="786384" y="2395728"/>
+            <a:ext cx="5760720" cy="822960"/>
           </a:xfrm>
           <a:prstGeom prst="rect">
             <a:avLst/>
@@ -3271,34 +3359,145 @@
           <a:noFill/>
         </p:spPr>
         <p:txBody>
-          <a:bodyPr wrap="none">
+          <a:bodyPr wrap="square" anchor="t">
             <a:spAutoFit/>
           </a:bodyPr>
           <a:lstStyle/>
           <a:p>
-            <a:pPr>
-              <a:defRPr sz="1600">
-                <a:solidFill>
-                  <a:srgbClr val="334155"/>
-                </a:solidFill>
-              </a:defRPr>
-            </a:pPr>
-            <a:r>
-              <a:t>Student ID: 2022115981</a:t>
-            </a:r>
-          </a:p>
-        </p:txBody>
-      </p:sp>
-      <p:sp>
-        <p:nvSpPr>
-          <p:cNvPr id="7" name="TextBox 6"/>
+            <a:pPr algn="l"/>
+            <a:r>
+              <a:rPr sz="1700" b="0">
+                <a:solidFill>
+                  <a:srgbClr val="FFFFFF"/>
+                </a:solidFill>
+                <a:latin typeface="Aptos"/>
+              </a:rPr>
+              <a:t>A RESTful backend for UK city weather and air-quality data, combining authenticated CRUD, external data import, and analytics.</a:t>
+            </a:r>
+            <a:endParaRPr sz="1700" b="0">
+              <a:solidFill>
+                <a:srgbClr val="FFFFFF"/>
+              </a:solidFill>
+              <a:latin typeface="Aptos"/>
+            </a:endParaRPr>
+          </a:p>
+        </p:txBody>
+      </p:sp>
+      <p:sp>
+        <p:nvSpPr>
+          <p:cNvPr id="9" name="Rounded Rectangle 8"/>
+          <p:cNvSpPr/>
+          <p:nvPr/>
+        </p:nvSpPr>
+        <p:spPr>
+          <a:xfrm>
+            <a:off x="786384" y="3246120"/>
+            <a:ext cx="4069080" cy="438912"/>
+          </a:xfrm>
+          <a:prstGeom prst="roundRect">
+            <a:avLst/>
+          </a:prstGeom>
+          <a:solidFill>
+            <a:srgbClr val="F97316"/>
+          </a:solidFill>
+          <a:ln w="19050">
+            <a:solidFill>
+              <a:srgbClr val="F97316"/>
+            </a:solidFill>
+          </a:ln>
+        </p:spPr>
+        <p:style>
+          <a:lnRef idx="1">
+            <a:schemeClr val="accent1"/>
+          </a:lnRef>
+          <a:fillRef idx="3">
+            <a:schemeClr val="accent1"/>
+          </a:fillRef>
+          <a:effectRef idx="2">
+            <a:schemeClr val="accent1"/>
+          </a:effectRef>
+          <a:fontRef idx="minor">
+            <a:schemeClr val="lt1"/>
+          </a:fontRef>
+        </p:style>
+        <p:txBody>
+          <a:bodyPr rtlCol="0" anchor="ctr"/>
+          <a:lstStyle/>
+          <a:p>
+            <a:pPr algn="ctr"/>
+            <a:r>
+              <a:rPr sz="1500" b="1">
+                <a:solidFill>
+                  <a:srgbClr val="FFFFFF"/>
+                </a:solidFill>
+                <a:latin typeface="Aptos"/>
+              </a:rPr>
+              <a:t>FastAPI + SQLAlchemy + JWT + Open-Meteo</a:t>
+            </a:r>
+            <a:endParaRPr sz="1500" b="1">
+              <a:solidFill>
+                <a:srgbClr val="FFFFFF"/>
+              </a:solidFill>
+              <a:latin typeface="Aptos"/>
+            </a:endParaRPr>
+          </a:p>
+        </p:txBody>
+      </p:sp>
+      <p:sp>
+        <p:nvSpPr>
+          <p:cNvPr id="10" name="Rounded Rectangle 9"/>
+          <p:cNvSpPr/>
+          <p:nvPr/>
+        </p:nvSpPr>
+        <p:spPr>
+          <a:xfrm>
+            <a:off x="7406640" y="1097280"/>
+            <a:ext cx="1417320" cy="1188720"/>
+          </a:xfrm>
+          <a:prstGeom prst="roundRect">
+            <a:avLst/>
+          </a:prstGeom>
+          <a:solidFill>
+            <a:srgbClr val="FFFFFF"/>
+          </a:solidFill>
+          <a:ln w="19050">
+            <a:solidFill>
+              <a:srgbClr val="0D9488"/>
+            </a:solidFill>
+          </a:ln>
+        </p:spPr>
+        <p:style>
+          <a:lnRef idx="1">
+            <a:schemeClr val="accent1"/>
+          </a:lnRef>
+          <a:fillRef idx="3">
+            <a:schemeClr val="accent1"/>
+          </a:fillRef>
+          <a:effectRef idx="2">
+            <a:schemeClr val="accent1"/>
+          </a:effectRef>
+          <a:fontRef idx="minor">
+            <a:schemeClr val="lt1"/>
+          </a:fontRef>
+        </p:style>
+        <p:txBody>
+          <a:bodyPr rtlCol="0" anchor="ctr"/>
+          <a:lstStyle/>
+          <a:p>
+            <a:pPr algn="ctr"/>
+          </a:p>
+        </p:txBody>
+      </p:sp>
+      <p:sp>
+        <p:nvSpPr>
+          <p:cNvPr id="11" name="TextBox 10"/>
           <p:cNvSpPr txBox="1"/>
           <p:nvPr/>
         </p:nvSpPr>
         <p:spPr>
           <a:xfrm>
-            <a:off x="777240" y="5120640"/>
-            <a:ext cx="6858000" cy="320040"/>
+            <a:off x="7571232" y="1261872"/>
+            <a:ext cx="1088136" cy="411480"/>
           </a:xfrm>
           <a:prstGeom prst="rect">
             <a:avLst/>
@@ -3306,21 +3505,490 @@
           <a:noFill/>
         </p:spPr>
         <p:txBody>
-          <a:bodyPr wrap="none">
+          <a:bodyPr wrap="square" anchor="t">
             <a:spAutoFit/>
           </a:bodyPr>
           <a:lstStyle/>
           <a:p>
-            <a:pPr>
-              <a:defRPr sz="1600">
+            <a:pPr algn="l"/>
+            <a:r>
+              <a:rPr sz="2600" b="1">
+                <a:solidFill>
+                  <a:srgbClr val="0D9488"/>
+                </a:solidFill>
+                <a:latin typeface="Aptos Display"/>
+              </a:rPr>
+              <a:t>6</a:t>
+            </a:r>
+            <a:endParaRPr sz="2600" b="1">
+              <a:solidFill>
+                <a:srgbClr val="0D9488"/>
+              </a:solidFill>
+              <a:latin typeface="Aptos Display"/>
+            </a:endParaRPr>
+          </a:p>
+        </p:txBody>
+      </p:sp>
+      <p:sp>
+        <p:nvSpPr>
+          <p:cNvPr id="12" name="TextBox 11"/>
+          <p:cNvSpPr txBox="1"/>
+          <p:nvPr/>
+        </p:nvSpPr>
+        <p:spPr>
+          <a:xfrm>
+            <a:off x="7571232" y="1755648"/>
+            <a:ext cx="1088136" cy="548640"/>
+          </a:xfrm>
+          <a:prstGeom prst="rect">
+            <a:avLst/>
+          </a:prstGeom>
+          <a:noFill/>
+        </p:spPr>
+        <p:txBody>
+          <a:bodyPr wrap="square" anchor="t">
+            <a:spAutoFit/>
+          </a:bodyPr>
+          <a:lstStyle/>
+          <a:p>
+            <a:pPr algn="l"/>
+            <a:r>
+              <a:rPr sz="1300" b="0">
+                <a:solidFill>
+                  <a:srgbClr val="64748B"/>
+                </a:solidFill>
+                <a:latin typeface="Aptos"/>
+              </a:rPr>
+              <a:t>seeded UK cities</a:t>
+            </a:r>
+            <a:endParaRPr sz="1300" b="0">
+              <a:solidFill>
+                <a:srgbClr val="64748B"/>
+              </a:solidFill>
+              <a:latin typeface="Aptos"/>
+            </a:endParaRPr>
+          </a:p>
+        </p:txBody>
+      </p:sp>
+      <p:sp>
+        <p:nvSpPr>
+          <p:cNvPr id="13" name="Rounded Rectangle 12"/>
+          <p:cNvSpPr/>
+          <p:nvPr/>
+        </p:nvSpPr>
+        <p:spPr>
+          <a:xfrm>
+            <a:off x="9098280" y="1097280"/>
+            <a:ext cx="1417320" cy="1188720"/>
+          </a:xfrm>
+          <a:prstGeom prst="roundRect">
+            <a:avLst/>
+          </a:prstGeom>
+          <a:solidFill>
+            <a:srgbClr val="FFFFFF"/>
+          </a:solidFill>
+          <a:ln w="19050">
+            <a:solidFill>
+              <a:srgbClr val="F97316"/>
+            </a:solidFill>
+          </a:ln>
+        </p:spPr>
+        <p:style>
+          <a:lnRef idx="1">
+            <a:schemeClr val="accent1"/>
+          </a:lnRef>
+          <a:fillRef idx="3">
+            <a:schemeClr val="accent1"/>
+          </a:fillRef>
+          <a:effectRef idx="2">
+            <a:schemeClr val="accent1"/>
+          </a:effectRef>
+          <a:fontRef idx="minor">
+            <a:schemeClr val="lt1"/>
+          </a:fontRef>
+        </p:style>
+        <p:txBody>
+          <a:bodyPr rtlCol="0" anchor="ctr"/>
+          <a:lstStyle/>
+          <a:p>
+            <a:pPr algn="ctr"/>
+          </a:p>
+        </p:txBody>
+      </p:sp>
+      <p:sp>
+        <p:nvSpPr>
+          <p:cNvPr id="14" name="TextBox 13"/>
+          <p:cNvSpPr txBox="1"/>
+          <p:nvPr/>
+        </p:nvSpPr>
+        <p:spPr>
+          <a:xfrm>
+            <a:off x="9262872" y="1261872"/>
+            <a:ext cx="1088136" cy="411480"/>
+          </a:xfrm>
+          <a:prstGeom prst="rect">
+            <a:avLst/>
+          </a:prstGeom>
+          <a:noFill/>
+        </p:spPr>
+        <p:txBody>
+          <a:bodyPr wrap="square" anchor="t">
+            <a:spAutoFit/>
+          </a:bodyPr>
+          <a:lstStyle/>
+          <a:p>
+            <a:pPr algn="l"/>
+            <a:r>
+              <a:rPr sz="2600" b="1">
+                <a:solidFill>
+                  <a:srgbClr val="F97316"/>
+                </a:solidFill>
+                <a:latin typeface="Aptos Display"/>
+              </a:rPr>
+              <a:t>180</a:t>
+            </a:r>
+            <a:endParaRPr sz="2600" b="1">
+              <a:solidFill>
+                <a:srgbClr val="F97316"/>
+              </a:solidFill>
+              <a:latin typeface="Aptos Display"/>
+            </a:endParaRPr>
+          </a:p>
+        </p:txBody>
+      </p:sp>
+      <p:sp>
+        <p:nvSpPr>
+          <p:cNvPr id="15" name="TextBox 14"/>
+          <p:cNvSpPr txBox="1"/>
+          <p:nvPr/>
+        </p:nvSpPr>
+        <p:spPr>
+          <a:xfrm>
+            <a:off x="9262872" y="1755648"/>
+            <a:ext cx="1088136" cy="548640"/>
+          </a:xfrm>
+          <a:prstGeom prst="rect">
+            <a:avLst/>
+          </a:prstGeom>
+          <a:noFill/>
+        </p:spPr>
+        <p:txBody>
+          <a:bodyPr wrap="square" anchor="t">
+            <a:spAutoFit/>
+          </a:bodyPr>
+          <a:lstStyle/>
+          <a:p>
+            <a:pPr algn="l"/>
+            <a:r>
+              <a:rPr sz="1300" b="0">
+                <a:solidFill>
+                  <a:srgbClr val="64748B"/>
+                </a:solidFill>
+                <a:latin typeface="Aptos"/>
+              </a:rPr>
+              <a:t>seeded records</a:t>
+            </a:r>
+            <a:endParaRPr sz="1300" b="0">
+              <a:solidFill>
+                <a:srgbClr val="64748B"/>
+              </a:solidFill>
+              <a:latin typeface="Aptos"/>
+            </a:endParaRPr>
+          </a:p>
+        </p:txBody>
+      </p:sp>
+      <p:sp>
+        <p:nvSpPr>
+          <p:cNvPr id="16" name="Rounded Rectangle 15"/>
+          <p:cNvSpPr/>
+          <p:nvPr/>
+        </p:nvSpPr>
+        <p:spPr>
+          <a:xfrm>
+            <a:off x="7406640" y="2560320"/>
+            <a:ext cx="3108960" cy="1170432"/>
+          </a:xfrm>
+          <a:prstGeom prst="roundRect">
+            <a:avLst/>
+          </a:prstGeom>
+          <a:solidFill>
+            <a:srgbClr val="FFFFFF"/>
+          </a:solidFill>
+          <a:ln w="19050">
+            <a:solidFill>
+              <a:srgbClr val="FFFFFF"/>
+            </a:solidFill>
+          </a:ln>
+        </p:spPr>
+        <p:style>
+          <a:lnRef idx="1">
+            <a:schemeClr val="accent1"/>
+          </a:lnRef>
+          <a:fillRef idx="3">
+            <a:schemeClr val="accent1"/>
+          </a:fillRef>
+          <a:effectRef idx="2">
+            <a:schemeClr val="accent1"/>
+          </a:effectRef>
+          <a:fontRef idx="minor">
+            <a:schemeClr val="lt1"/>
+          </a:fontRef>
+        </p:style>
+        <p:txBody>
+          <a:bodyPr rtlCol="0" anchor="ctr"/>
+          <a:lstStyle/>
+          <a:p>
+            <a:pPr algn="ctr"/>
+          </a:p>
+        </p:txBody>
+      </p:sp>
+      <p:sp>
+        <p:nvSpPr>
+          <p:cNvPr id="17" name="TextBox 16"/>
+          <p:cNvSpPr txBox="1"/>
+          <p:nvPr/>
+        </p:nvSpPr>
+        <p:spPr>
+          <a:xfrm>
+            <a:off x="7571232" y="2724912"/>
+            <a:ext cx="2779776" cy="411480"/>
+          </a:xfrm>
+          <a:prstGeom prst="rect">
+            <a:avLst/>
+          </a:prstGeom>
+          <a:noFill/>
+        </p:spPr>
+        <p:txBody>
+          <a:bodyPr wrap="square" anchor="t">
+            <a:spAutoFit/>
+          </a:bodyPr>
+          <a:lstStyle/>
+          <a:p>
+            <a:pPr algn="l"/>
+            <a:r>
+              <a:rPr sz="2600" b="1">
+                <a:solidFill>
+                  <a:srgbClr val="FFFFFF"/>
+                </a:solidFill>
+                <a:latin typeface="Aptos Display"/>
+              </a:rPr>
+              <a:t>JWT</a:t>
+            </a:r>
+            <a:endParaRPr sz="2600" b="1">
+              <a:solidFill>
+                <a:srgbClr val="FFFFFF"/>
+              </a:solidFill>
+              <a:latin typeface="Aptos Display"/>
+            </a:endParaRPr>
+          </a:p>
+        </p:txBody>
+      </p:sp>
+      <p:sp>
+        <p:nvSpPr>
+          <p:cNvPr id="18" name="TextBox 17"/>
+          <p:cNvSpPr txBox="1"/>
+          <p:nvPr/>
+        </p:nvSpPr>
+        <p:spPr>
+          <a:xfrm>
+            <a:off x="7571232" y="3218688"/>
+            <a:ext cx="2779776" cy="548640"/>
+          </a:xfrm>
+          <a:prstGeom prst="rect">
+            <a:avLst/>
+          </a:prstGeom>
+          <a:noFill/>
+        </p:spPr>
+        <p:txBody>
+          <a:bodyPr wrap="square" anchor="t">
+            <a:spAutoFit/>
+          </a:bodyPr>
+          <a:lstStyle/>
+          <a:p>
+            <a:pPr algn="l"/>
+            <a:r>
+              <a:rPr sz="1300" b="0">
+                <a:solidFill>
+                  <a:srgbClr val="64748B"/>
+                </a:solidFill>
+                <a:latin typeface="Aptos"/>
+              </a:rPr>
+              <a:t>protected write operations</a:t>
+            </a:r>
+            <a:endParaRPr sz="1300" b="0">
+              <a:solidFill>
+                <a:srgbClr val="64748B"/>
+              </a:solidFill>
+              <a:latin typeface="Aptos"/>
+            </a:endParaRPr>
+          </a:p>
+        </p:txBody>
+      </p:sp>
+      <p:sp>
+        <p:nvSpPr>
+          <p:cNvPr id="19" name="Rounded Rectangle 18"/>
+          <p:cNvSpPr/>
+          <p:nvPr/>
+        </p:nvSpPr>
+        <p:spPr>
+          <a:xfrm>
+            <a:off x="749808" y="5303520"/>
+            <a:ext cx="9784080" cy="932688"/>
+          </a:xfrm>
+          <a:prstGeom prst="roundRect">
+            <a:avLst/>
+          </a:prstGeom>
+          <a:solidFill>
+            <a:srgbClr val="FFFFFF"/>
+          </a:solidFill>
+          <a:ln w="19050">
+            <a:solidFill>
+              <a:srgbClr val="FFFFFF"/>
+            </a:solidFill>
+          </a:ln>
+        </p:spPr>
+        <p:style>
+          <a:lnRef idx="1">
+            <a:schemeClr val="accent1"/>
+          </a:lnRef>
+          <a:fillRef idx="3">
+            <a:schemeClr val="accent1"/>
+          </a:fillRef>
+          <a:effectRef idx="2">
+            <a:schemeClr val="accent1"/>
+          </a:effectRef>
+          <a:fontRef idx="minor">
+            <a:schemeClr val="lt1"/>
+          </a:fontRef>
+        </p:style>
+        <p:txBody>
+          <a:bodyPr rtlCol="0" anchor="ctr"/>
+          <a:lstStyle/>
+          <a:p>
+            <a:pPr algn="ctr"/>
+          </a:p>
+        </p:txBody>
+      </p:sp>
+      <p:sp>
+        <p:nvSpPr>
+          <p:cNvPr id="20" name="TextBox 19"/>
+          <p:cNvSpPr txBox="1"/>
+          <p:nvPr/>
+        </p:nvSpPr>
+        <p:spPr>
+          <a:xfrm>
+            <a:off x="960120" y="5532120"/>
+            <a:ext cx="2743200" cy="256032"/>
+          </a:xfrm>
+          <a:prstGeom prst="rect">
+            <a:avLst/>
+          </a:prstGeom>
+          <a:noFill/>
+        </p:spPr>
+        <p:txBody>
+          <a:bodyPr wrap="square" anchor="t">
+            <a:spAutoFit/>
+          </a:bodyPr>
+          <a:lstStyle/>
+          <a:p>
+            <a:pPr algn="l"/>
+            <a:r>
+              <a:rPr sz="1400" b="1">
+                <a:solidFill>
+                  <a:srgbClr val="0F172A"/>
+                </a:solidFill>
+                <a:latin typeface="Aptos"/>
+              </a:rPr>
+              <a:t>Student: Yuan Rui</a:t>
+            </a:r>
+            <a:endParaRPr sz="1400" b="1">
+              <a:solidFill>
+                <a:srgbClr val="0F172A"/>
+              </a:solidFill>
+              <a:latin typeface="Aptos"/>
+            </a:endParaRPr>
+          </a:p>
+        </p:txBody>
+      </p:sp>
+      <p:sp>
+        <p:nvSpPr>
+          <p:cNvPr id="21" name="TextBox 20"/>
+          <p:cNvSpPr txBox="1"/>
+          <p:nvPr/>
+        </p:nvSpPr>
+        <p:spPr>
+          <a:xfrm>
+            <a:off x="3657600" y="5532120"/>
+            <a:ext cx="1828800" cy="256032"/>
+          </a:xfrm>
+          <a:prstGeom prst="rect">
+            <a:avLst/>
+          </a:prstGeom>
+          <a:noFill/>
+        </p:spPr>
+        <p:txBody>
+          <a:bodyPr wrap="square" anchor="t">
+            <a:spAutoFit/>
+          </a:bodyPr>
+          <a:lstStyle/>
+          <a:p>
+            <a:pPr algn="l"/>
+            <a:r>
+              <a:rPr sz="1400" b="1">
+                <a:solidFill>
+                  <a:srgbClr val="0F172A"/>
+                </a:solidFill>
+                <a:latin typeface="Aptos"/>
+              </a:rPr>
+              <a:t>ID: 2022115981</a:t>
+            </a:r>
+            <a:endParaRPr sz="1400" b="1">
+              <a:solidFill>
+                <a:srgbClr val="0F172A"/>
+              </a:solidFill>
+              <a:latin typeface="Aptos"/>
+            </a:endParaRPr>
+          </a:p>
+        </p:txBody>
+      </p:sp>
+      <p:sp>
+        <p:nvSpPr>
+          <p:cNvPr id="22" name="TextBox 21"/>
+          <p:cNvSpPr txBox="1"/>
+          <p:nvPr/>
+        </p:nvSpPr>
+        <p:spPr>
+          <a:xfrm>
+            <a:off x="5669280" y="5532120"/>
+            <a:ext cx="4389120" cy="256032"/>
+          </a:xfrm>
+          <a:prstGeom prst="rect">
+            <a:avLst/>
+          </a:prstGeom>
+          <a:noFill/>
+        </p:spPr>
+        <p:txBody>
+          <a:bodyPr wrap="square" anchor="t">
+            <a:spAutoFit/>
+          </a:bodyPr>
+          <a:lstStyle/>
+          <a:p>
+            <a:pPr algn="l"/>
+            <a:r>
+              <a:rPr sz="1300" b="0">
                 <a:solidFill>
                   <a:srgbClr val="334155"/>
                 </a:solidFill>
-              </a:defRPr>
-            </a:pPr>
-            <a:r>
-              <a:t>GitHub: https://github.com/gapmaker1/urban-climate-insights-api</a:t>
-            </a:r>
+                <a:latin typeface="Aptos"/>
+              </a:rPr>
+              <a:t>https://github.com/gapmaker1/urban-climate-insights-api</a:t>
+            </a:r>
+            <a:endParaRPr sz="1300" b="0">
+              <a:solidFill>
+                <a:srgbClr val="334155"/>
+              </a:solidFill>
+              <a:latin typeface="Aptos"/>
+            </a:endParaRPr>
           </a:p>
         </p:txBody>
       </p:sp>
@@ -3333,7 +4001,7 @@
 </file>
 
 <file path=ppt/slides/slide2.xml><?xml version="1.0" encoding="utf-8"?>
-<p:sld xmlns:a="http://schemas.openxmlformats.org/drawingml/2006/main" xmlns:p="http://schemas.openxmlformats.org/presentationml/2006/main" xmlns:r="http://schemas.openxmlformats.org/officeDocument/2006/relationships">
+<p:sld xmlns:a="http://schemas.openxmlformats.org/drawingml/2006/main" xmlns:r="http://schemas.openxmlformats.org/officeDocument/2006/relationships" xmlns:p="http://schemas.openxmlformats.org/presentationml/2006/main">
   <p:cSld>
     <p:spTree>
       <p:nvGrpSpPr>
@@ -3344,92 +4012,23 @@
       <p:grpSpPr/>
       <p:sp>
         <p:nvSpPr>
-          <p:cNvPr id="2" name="TextBox 1"/>
-          <p:cNvSpPr txBox="1"/>
-          <p:nvPr/>
-        </p:nvSpPr>
-        <p:spPr>
-          <a:xfrm>
-            <a:off x="640080" y="548640"/>
-            <a:ext cx="7772400" cy="1005840"/>
+          <p:cNvPr id="2" name="Rectangle 1"/>
+          <p:cNvSpPr/>
+          <p:nvPr/>
+        </p:nvSpPr>
+        <p:spPr>
+          <a:xfrm>
+            <a:off x="0" y="0"/>
+            <a:ext cx="12191695" cy="6858000"/>
           </a:xfrm>
           <a:prstGeom prst="rect">
             <a:avLst/>
           </a:prstGeom>
-          <a:noFill/>
-        </p:spPr>
-        <p:txBody>
-          <a:bodyPr wrap="none">
-            <a:spAutoFit/>
-          </a:bodyPr>
-          <a:lstStyle/>
-          <a:p>
-            <a:pPr>
-              <a:defRPr sz="2800" b="1">
-                <a:solidFill>
-                  <a:srgbClr val="0F172A"/>
-                </a:solidFill>
-              </a:defRPr>
-            </a:pPr>
-            <a:r>
-              <a:t>Problem and Aim</a:t>
-            </a:r>
-          </a:p>
-        </p:txBody>
-      </p:sp>
-      <p:sp>
-        <p:nvSpPr>
-          <p:cNvPr id="3" name="TextBox 2"/>
-          <p:cNvSpPr txBox="1"/>
-          <p:nvPr/>
-        </p:nvSpPr>
-        <p:spPr>
-          <a:xfrm>
-            <a:off x="685800" y="1417320"/>
-            <a:ext cx="7315200" cy="731520"/>
-          </a:xfrm>
-          <a:prstGeom prst="rect">
-            <a:avLst/>
-          </a:prstGeom>
-          <a:noFill/>
-        </p:spPr>
-        <p:txBody>
-          <a:bodyPr wrap="none">
-            <a:spAutoFit/>
-          </a:bodyPr>
-          <a:lstStyle/>
-          <a:p>
-            <a:pPr>
-              <a:defRPr sz="1300">
-                <a:solidFill>
-                  <a:srgbClr val="334155"/>
-                </a:solidFill>
-              </a:defRPr>
-            </a:pPr>
-          </a:p>
-        </p:txBody>
-      </p:sp>
-      <p:sp>
-        <p:nvSpPr>
-          <p:cNvPr id="4" name="Rounded Rectangle 3"/>
-          <p:cNvSpPr/>
-          <p:nvPr/>
-        </p:nvSpPr>
-        <p:spPr>
-          <a:xfrm>
-            <a:off x="640080" y="1463040"/>
-            <a:ext cx="7863840" cy="4754880"/>
-          </a:xfrm>
-          <a:prstGeom prst="roundRect">
-            <a:avLst/>
-          </a:prstGeom>
           <a:solidFill>
-            <a:srgbClr val="F1F5F9"/>
+            <a:srgbClr val="F8FAFC"/>
           </a:solidFill>
           <a:ln>
-            <a:solidFill>
-              <a:srgbClr val="0D9488"/>
-            </a:solidFill>
+            <a:noFill/>
           </a:ln>
         </p:spPr>
         <p:style>
@@ -3456,14 +4055,266 @@
       </p:sp>
       <p:sp>
         <p:nvSpPr>
+          <p:cNvPr id="3" name="Oval 2"/>
+          <p:cNvSpPr/>
+          <p:nvPr/>
+        </p:nvSpPr>
+        <p:spPr>
+          <a:xfrm>
+            <a:off x="8778240" y="-457200"/>
+            <a:ext cx="2377440" cy="2377440"/>
+          </a:xfrm>
+          <a:prstGeom prst="ellipse">
+            <a:avLst/>
+          </a:prstGeom>
+          <a:solidFill>
+            <a:srgbClr val="DBEAFE"/>
+          </a:solidFill>
+          <a:ln>
+            <a:noFill/>
+          </a:ln>
+        </p:spPr>
+        <p:style>
+          <a:lnRef idx="1">
+            <a:schemeClr val="accent1"/>
+          </a:lnRef>
+          <a:fillRef idx="3">
+            <a:schemeClr val="accent1"/>
+          </a:fillRef>
+          <a:effectRef idx="2">
+            <a:schemeClr val="accent1"/>
+          </a:effectRef>
+          <a:fontRef idx="minor">
+            <a:schemeClr val="lt1"/>
+          </a:fontRef>
+        </p:style>
+        <p:txBody>
+          <a:bodyPr rtlCol="0" anchor="ctr"/>
+          <a:lstStyle/>
+          <a:p>
+            <a:pPr algn="ctr"/>
+          </a:p>
+        </p:txBody>
+      </p:sp>
+      <p:sp>
+        <p:nvSpPr>
+          <p:cNvPr id="4" name="TextBox 3"/>
+          <p:cNvSpPr txBox="1"/>
+          <p:nvPr/>
+        </p:nvSpPr>
+        <p:spPr>
+          <a:xfrm>
+            <a:off x="731520" y="411480"/>
+            <a:ext cx="2926080" cy="365760"/>
+          </a:xfrm>
+          <a:prstGeom prst="rect">
+            <a:avLst/>
+          </a:prstGeom>
+          <a:noFill/>
+        </p:spPr>
+        <p:txBody>
+          <a:bodyPr wrap="square" anchor="t">
+            <a:spAutoFit/>
+          </a:bodyPr>
+          <a:lstStyle/>
+          <a:p>
+            <a:pPr algn="l"/>
+            <a:r>
+              <a:rPr sz="1300" b="1">
+                <a:solidFill>
+                  <a:srgbClr val="0D9488"/>
+                </a:solidFill>
+                <a:latin typeface="Aptos"/>
+              </a:rPr>
+              <a:t>PROJECT FOCUS</a:t>
+            </a:r>
+            <a:endParaRPr sz="1300" b="1">
+              <a:solidFill>
+                <a:srgbClr val="0D9488"/>
+              </a:solidFill>
+              <a:latin typeface="Aptos"/>
+            </a:endParaRPr>
+          </a:p>
+        </p:txBody>
+      </p:sp>
+      <p:sp>
+        <p:nvSpPr>
           <p:cNvPr id="5" name="TextBox 4"/>
           <p:cNvSpPr txBox="1"/>
           <p:nvPr/>
         </p:nvSpPr>
         <p:spPr>
           <a:xfrm>
-            <a:off x="914400" y="1783080"/>
-            <a:ext cx="7315200" cy="4206240"/>
+            <a:off x="731520" y="713232"/>
+            <a:ext cx="8046720" cy="731520"/>
+          </a:xfrm>
+          <a:prstGeom prst="rect">
+            <a:avLst/>
+          </a:prstGeom>
+          <a:noFill/>
+        </p:spPr>
+        <p:txBody>
+          <a:bodyPr wrap="square" anchor="t">
+            <a:spAutoFit/>
+          </a:bodyPr>
+          <a:lstStyle/>
+          <a:p>
+            <a:pPr algn="l"/>
+            <a:r>
+              <a:rPr sz="2800" b="1">
+                <a:solidFill>
+                  <a:srgbClr val="0F172A"/>
+                </a:solidFill>
+                <a:latin typeface="Aptos Display"/>
+              </a:rPr>
+              <a:t>From basic CRUD to a small analytical platform</a:t>
+            </a:r>
+            <a:endParaRPr sz="2800" b="1">
+              <a:solidFill>
+                <a:srgbClr val="0F172A"/>
+              </a:solidFill>
+              <a:latin typeface="Aptos Display"/>
+            </a:endParaRPr>
+          </a:p>
+        </p:txBody>
+      </p:sp>
+      <p:sp>
+        <p:nvSpPr>
+          <p:cNvPr id="6" name="TextBox 5"/>
+          <p:cNvSpPr txBox="1"/>
+          <p:nvPr/>
+        </p:nvSpPr>
+        <p:spPr>
+          <a:xfrm>
+            <a:off x="749808" y="1353312"/>
+            <a:ext cx="7863840" cy="502920"/>
+          </a:xfrm>
+          <a:prstGeom prst="rect">
+            <a:avLst/>
+          </a:prstGeom>
+          <a:noFill/>
+        </p:spPr>
+        <p:txBody>
+          <a:bodyPr wrap="square" anchor="t">
+            <a:spAutoFit/>
+          </a:bodyPr>
+          <a:lstStyle/>
+          <a:p>
+            <a:pPr algn="l"/>
+            <a:r>
+              <a:rPr sz="1400" b="0">
+                <a:solidFill>
+                  <a:srgbClr val="64748B"/>
+                </a:solidFill>
+                <a:latin typeface="Aptos"/>
+              </a:rPr>
+              <a:t>The project was designed to meet the minimum requirements and then extend them with real web data and analysis.</a:t>
+            </a:r>
+            <a:endParaRPr sz="1400" b="0">
+              <a:solidFill>
+                <a:srgbClr val="64748B"/>
+              </a:solidFill>
+              <a:latin typeface="Aptos"/>
+            </a:endParaRPr>
+          </a:p>
+        </p:txBody>
+      </p:sp>
+      <p:sp>
+        <p:nvSpPr>
+          <p:cNvPr id="7" name="Rounded Rectangle 6"/>
+          <p:cNvSpPr/>
+          <p:nvPr/>
+        </p:nvSpPr>
+        <p:spPr>
+          <a:xfrm>
+            <a:off x="731520" y="1874519"/>
+            <a:ext cx="3474720" cy="1600200"/>
+          </a:xfrm>
+          <a:prstGeom prst="roundRect">
+            <a:avLst/>
+          </a:prstGeom>
+          <a:solidFill>
+            <a:srgbClr val="FFFFFF"/>
+          </a:solidFill>
+          <a:ln w="19050">
+            <a:solidFill>
+              <a:srgbClr val="0D9488"/>
+            </a:solidFill>
+          </a:ln>
+        </p:spPr>
+        <p:style>
+          <a:lnRef idx="1">
+            <a:schemeClr val="accent1"/>
+          </a:lnRef>
+          <a:fillRef idx="3">
+            <a:schemeClr val="accent1"/>
+          </a:fillRef>
+          <a:effectRef idx="2">
+            <a:schemeClr val="accent1"/>
+          </a:effectRef>
+          <a:fontRef idx="minor">
+            <a:schemeClr val="lt1"/>
+          </a:fontRef>
+        </p:style>
+        <p:txBody>
+          <a:bodyPr rtlCol="0" anchor="ctr"/>
+          <a:lstStyle/>
+          <a:p>
+            <a:pPr algn="ctr"/>
+          </a:p>
+        </p:txBody>
+      </p:sp>
+      <p:sp>
+        <p:nvSpPr>
+          <p:cNvPr id="8" name="TextBox 7"/>
+          <p:cNvSpPr txBox="1"/>
+          <p:nvPr/>
+        </p:nvSpPr>
+        <p:spPr>
+          <a:xfrm>
+            <a:off x="960120" y="2084831"/>
+            <a:ext cx="2971800" cy="320040"/>
+          </a:xfrm>
+          <a:prstGeom prst="rect">
+            <a:avLst/>
+          </a:prstGeom>
+          <a:noFill/>
+        </p:spPr>
+        <p:txBody>
+          <a:bodyPr wrap="square" anchor="t">
+            <a:spAutoFit/>
+          </a:bodyPr>
+          <a:lstStyle/>
+          <a:p>
+            <a:pPr algn="l"/>
+            <a:r>
+              <a:rPr sz="2000" b="1">
+                <a:solidFill>
+                  <a:srgbClr val="0F172A"/>
+                </a:solidFill>
+                <a:latin typeface="Aptos Display"/>
+              </a:rPr>
+              <a:t>1. Core backend service</a:t>
+            </a:r>
+            <a:endParaRPr sz="2000" b="1">
+              <a:solidFill>
+                <a:srgbClr val="0F172A"/>
+              </a:solidFill>
+              <a:latin typeface="Aptos Display"/>
+            </a:endParaRPr>
+          </a:p>
+        </p:txBody>
+      </p:sp>
+      <p:sp>
+        <p:nvSpPr>
+          <p:cNvPr id="9" name="TextBox 8"/>
+          <p:cNvSpPr txBox="1"/>
+          <p:nvPr/>
+        </p:nvSpPr>
+        <p:spPr>
+          <a:xfrm>
+            <a:off x="987552" y="2468880"/>
+            <a:ext cx="2926080" cy="822960"/>
           </a:xfrm>
           <a:prstGeom prst="rect">
             <a:avLst/>
@@ -3478,46 +4329,456 @@
           <a:p>
             <a:pPr>
               <a:spcAft>
-                <a:spcPts val="1000"/>
+                <a:spcPts val="800"/>
               </a:spcAft>
-              <a:defRPr sz="2100">
+              <a:defRPr sz="1400">
                 <a:solidFill>
                   <a:srgbClr val="0F172A"/>
                 </a:solidFill>
+                <a:latin typeface="Aptos"/>
               </a:defRPr>
             </a:pPr>
             <a:r>
-              <a:t>Goal: turn open UK city climate data into a reusable web API with full CRUD support.</a:t>
+              <a:t>Database-backed CRUD for cities and daily records</a:t>
             </a:r>
           </a:p>
           <a:p>
             <a:pPr>
               <a:spcAft>
-                <a:spcPts val="1000"/>
+                <a:spcPts val="800"/>
               </a:spcAft>
-              <a:defRPr sz="1900">
+              <a:defRPr sz="1400">
                 <a:solidFill>
                   <a:srgbClr val="0F172A"/>
                 </a:solidFill>
+                <a:latin typeface="Aptos"/>
               </a:defRPr>
             </a:pPr>
             <a:r>
-              <a:t>Users can manage cities and records, import external observations, and run comparative analytics.</a:t>
-            </a:r>
-          </a:p>
+              <a:t>Clear JSON responses and standard status codes</a:t>
+            </a:r>
+          </a:p>
+        </p:txBody>
+      </p:sp>
+      <p:sp>
+        <p:nvSpPr>
+          <p:cNvPr id="10" name="Rounded Rectangle 9"/>
+          <p:cNvSpPr/>
+          <p:nvPr/>
+        </p:nvSpPr>
+        <p:spPr>
+          <a:xfrm>
+            <a:off x="4361688" y="1874519"/>
+            <a:ext cx="3474720" cy="1600200"/>
+          </a:xfrm>
+          <a:prstGeom prst="roundRect">
+            <a:avLst/>
+          </a:prstGeom>
+          <a:solidFill>
+            <a:srgbClr val="FFFFFF"/>
+          </a:solidFill>
+          <a:ln w="19050">
+            <a:solidFill>
+              <a:srgbClr val="F97316"/>
+            </a:solidFill>
+          </a:ln>
+        </p:spPr>
+        <p:style>
+          <a:lnRef idx="1">
+            <a:schemeClr val="accent1"/>
+          </a:lnRef>
+          <a:fillRef idx="3">
+            <a:schemeClr val="accent1"/>
+          </a:fillRef>
+          <a:effectRef idx="2">
+            <a:schemeClr val="accent1"/>
+          </a:effectRef>
+          <a:fontRef idx="minor">
+            <a:schemeClr val="lt1"/>
+          </a:fontRef>
+        </p:style>
+        <p:txBody>
+          <a:bodyPr rtlCol="0" anchor="ctr"/>
+          <a:lstStyle/>
+          <a:p>
+            <a:pPr algn="ctr"/>
+          </a:p>
+        </p:txBody>
+      </p:sp>
+      <p:sp>
+        <p:nvSpPr>
+          <p:cNvPr id="11" name="TextBox 10"/>
+          <p:cNvSpPr txBox="1"/>
+          <p:nvPr/>
+        </p:nvSpPr>
+        <p:spPr>
+          <a:xfrm>
+            <a:off x="4590288" y="2084831"/>
+            <a:ext cx="2971800" cy="320040"/>
+          </a:xfrm>
+          <a:prstGeom prst="rect">
+            <a:avLst/>
+          </a:prstGeom>
+          <a:noFill/>
+        </p:spPr>
+        <p:txBody>
+          <a:bodyPr wrap="square" anchor="t">
+            <a:spAutoFit/>
+          </a:bodyPr>
+          <a:lstStyle/>
+          <a:p>
+            <a:pPr algn="l"/>
+            <a:r>
+              <a:rPr sz="2000" b="1">
+                <a:solidFill>
+                  <a:srgbClr val="0F172A"/>
+                </a:solidFill>
+                <a:latin typeface="Aptos Display"/>
+              </a:rPr>
+              <a:t>2. External web data</a:t>
+            </a:r>
+            <a:endParaRPr sz="2000" b="1">
+              <a:solidFill>
+                <a:srgbClr val="0F172A"/>
+              </a:solidFill>
+              <a:latin typeface="Aptos Display"/>
+            </a:endParaRPr>
+          </a:p>
+        </p:txBody>
+      </p:sp>
+      <p:sp>
+        <p:nvSpPr>
+          <p:cNvPr id="12" name="TextBox 11"/>
+          <p:cNvSpPr txBox="1"/>
+          <p:nvPr/>
+        </p:nvSpPr>
+        <p:spPr>
+          <a:xfrm>
+            <a:off x="4617720" y="2468880"/>
+            <a:ext cx="2926080" cy="822960"/>
+          </a:xfrm>
+          <a:prstGeom prst="rect">
+            <a:avLst/>
+          </a:prstGeom>
+          <a:noFill/>
+        </p:spPr>
+        <p:txBody>
+          <a:bodyPr wrap="square">
+            <a:spAutoFit/>
+          </a:bodyPr>
+          <a:lstStyle/>
           <a:p>
             <a:pPr>
               <a:spcAft>
-                <a:spcPts val="1000"/>
+                <a:spcPts val="800"/>
               </a:spcAft>
-              <a:defRPr sz="1900">
+              <a:defRPr sz="1400">
                 <a:solidFill>
                   <a:srgbClr val="0F172A"/>
                 </a:solidFill>
+                <a:latin typeface="Aptos"/>
               </a:defRPr>
             </a:pPr>
             <a:r>
-              <a:t>The design targets oral demonstration quality as well as technical report depth.</a:t>
+              <a:t>Imports historical weather and air-quality data</a:t>
+            </a:r>
+          </a:p>
+          <a:p>
+            <a:pPr>
+              <a:spcAft>
+                <a:spcPts val="800"/>
+              </a:spcAft>
+              <a:defRPr sz="1400">
+                <a:solidFill>
+                  <a:srgbClr val="0F172A"/>
+                </a:solidFill>
+                <a:latin typeface="Aptos"/>
+              </a:defRPr>
+            </a:pPr>
+            <a:r>
+              <a:t>Uses Open-Meteo geocoding, archive, and AQ APIs</a:t>
+            </a:r>
+          </a:p>
+        </p:txBody>
+      </p:sp>
+      <p:sp>
+        <p:nvSpPr>
+          <p:cNvPr id="13" name="Rounded Rectangle 12"/>
+          <p:cNvSpPr/>
+          <p:nvPr/>
+        </p:nvSpPr>
+        <p:spPr>
+          <a:xfrm>
+            <a:off x="7991856" y="1874519"/>
+            <a:ext cx="3474720" cy="1600200"/>
+          </a:xfrm>
+          <a:prstGeom prst="roundRect">
+            <a:avLst/>
+          </a:prstGeom>
+          <a:solidFill>
+            <a:srgbClr val="FFFFFF"/>
+          </a:solidFill>
+          <a:ln w="19050">
+            <a:solidFill>
+              <a:srgbClr val="F59E0B"/>
+            </a:solidFill>
+          </a:ln>
+        </p:spPr>
+        <p:style>
+          <a:lnRef idx="1">
+            <a:schemeClr val="accent1"/>
+          </a:lnRef>
+          <a:fillRef idx="3">
+            <a:schemeClr val="accent1"/>
+          </a:fillRef>
+          <a:effectRef idx="2">
+            <a:schemeClr val="accent1"/>
+          </a:effectRef>
+          <a:fontRef idx="minor">
+            <a:schemeClr val="lt1"/>
+          </a:fontRef>
+        </p:style>
+        <p:txBody>
+          <a:bodyPr rtlCol="0" anchor="ctr"/>
+          <a:lstStyle/>
+          <a:p>
+            <a:pPr algn="ctr"/>
+          </a:p>
+        </p:txBody>
+      </p:sp>
+      <p:sp>
+        <p:nvSpPr>
+          <p:cNvPr id="14" name="TextBox 13"/>
+          <p:cNvSpPr txBox="1"/>
+          <p:nvPr/>
+        </p:nvSpPr>
+        <p:spPr>
+          <a:xfrm>
+            <a:off x="8220456" y="2084831"/>
+            <a:ext cx="2971800" cy="320040"/>
+          </a:xfrm>
+          <a:prstGeom prst="rect">
+            <a:avLst/>
+          </a:prstGeom>
+          <a:noFill/>
+        </p:spPr>
+        <p:txBody>
+          <a:bodyPr wrap="square" anchor="t">
+            <a:spAutoFit/>
+          </a:bodyPr>
+          <a:lstStyle/>
+          <a:p>
+            <a:pPr algn="l"/>
+            <a:r>
+              <a:rPr sz="2000" b="1">
+                <a:solidFill>
+                  <a:srgbClr val="0F172A"/>
+                </a:solidFill>
+                <a:latin typeface="Aptos Display"/>
+              </a:rPr>
+              <a:t>3. Analytics layer</a:t>
+            </a:r>
+            <a:endParaRPr sz="2000" b="1">
+              <a:solidFill>
+                <a:srgbClr val="0F172A"/>
+              </a:solidFill>
+              <a:latin typeface="Aptos Display"/>
+            </a:endParaRPr>
+          </a:p>
+        </p:txBody>
+      </p:sp>
+      <p:sp>
+        <p:nvSpPr>
+          <p:cNvPr id="15" name="TextBox 14"/>
+          <p:cNvSpPr txBox="1"/>
+          <p:nvPr/>
+        </p:nvSpPr>
+        <p:spPr>
+          <a:xfrm>
+            <a:off x="8247888" y="2468880"/>
+            <a:ext cx="2926080" cy="822960"/>
+          </a:xfrm>
+          <a:prstGeom prst="rect">
+            <a:avLst/>
+          </a:prstGeom>
+          <a:noFill/>
+        </p:spPr>
+        <p:txBody>
+          <a:bodyPr wrap="square">
+            <a:spAutoFit/>
+          </a:bodyPr>
+          <a:lstStyle/>
+          <a:p>
+            <a:pPr>
+              <a:spcAft>
+                <a:spcPts val="800"/>
+              </a:spcAft>
+              <a:defRPr sz="1400">
+                <a:solidFill>
+                  <a:srgbClr val="0F172A"/>
+                </a:solidFill>
+                <a:latin typeface="Aptos"/>
+              </a:defRPr>
+            </a:pPr>
+            <a:r>
+              <a:t>Summary, trend, compare, and anomaly endpoints</a:t>
+            </a:r>
+          </a:p>
+          <a:p>
+            <a:pPr>
+              <a:spcAft>
+                <a:spcPts val="800"/>
+              </a:spcAft>
+              <a:defRPr sz="1400">
+                <a:solidFill>
+                  <a:srgbClr val="0F172A"/>
+                </a:solidFill>
+                <a:latin typeface="Aptos"/>
+              </a:defRPr>
+            </a:pPr>
+            <a:r>
+              <a:t>Designed to support meaningful oral demonstration</a:t>
+            </a:r>
+          </a:p>
+        </p:txBody>
+      </p:sp>
+      <p:sp>
+        <p:nvSpPr>
+          <p:cNvPr id="16" name="Rounded Rectangle 15"/>
+          <p:cNvSpPr/>
+          <p:nvPr/>
+        </p:nvSpPr>
+        <p:spPr>
+          <a:xfrm>
+            <a:off x="749808" y="3886200"/>
+            <a:ext cx="10716768" cy="2011680"/>
+          </a:xfrm>
+          <a:prstGeom prst="roundRect">
+            <a:avLst/>
+          </a:prstGeom>
+          <a:solidFill>
+            <a:srgbClr val="E2E8F0"/>
+          </a:solidFill>
+          <a:ln w="19050">
+            <a:solidFill>
+              <a:srgbClr val="E2E8F0"/>
+            </a:solidFill>
+          </a:ln>
+        </p:spPr>
+        <p:style>
+          <a:lnRef idx="1">
+            <a:schemeClr val="accent1"/>
+          </a:lnRef>
+          <a:fillRef idx="3">
+            <a:schemeClr val="accent1"/>
+          </a:fillRef>
+          <a:effectRef idx="2">
+            <a:schemeClr val="accent1"/>
+          </a:effectRef>
+          <a:fontRef idx="minor">
+            <a:schemeClr val="lt1"/>
+          </a:fontRef>
+        </p:style>
+        <p:txBody>
+          <a:bodyPr rtlCol="0" anchor="ctr"/>
+          <a:lstStyle/>
+          <a:p>
+            <a:pPr algn="ctr"/>
+          </a:p>
+        </p:txBody>
+      </p:sp>
+      <p:sp>
+        <p:nvSpPr>
+          <p:cNvPr id="17" name="TextBox 16"/>
+          <p:cNvSpPr txBox="1"/>
+          <p:nvPr/>
+        </p:nvSpPr>
+        <p:spPr>
+          <a:xfrm>
+            <a:off x="960120" y="4187952"/>
+            <a:ext cx="2011680" cy="274320"/>
+          </a:xfrm>
+          <a:prstGeom prst="rect">
+            <a:avLst/>
+          </a:prstGeom>
+          <a:noFill/>
+        </p:spPr>
+        <p:txBody>
+          <a:bodyPr wrap="square" anchor="t">
+            <a:spAutoFit/>
+          </a:bodyPr>
+          <a:lstStyle/>
+          <a:p>
+            <a:pPr algn="l"/>
+            <a:r>
+              <a:rPr sz="2000" b="1">
+                <a:solidFill>
+                  <a:srgbClr val="0F172A"/>
+                </a:solidFill>
+                <a:latin typeface="Aptos Display"/>
+              </a:rPr>
+              <a:t>Why this topic?</a:t>
+            </a:r>
+            <a:endParaRPr sz="2000" b="1">
+              <a:solidFill>
+                <a:srgbClr val="0F172A"/>
+              </a:solidFill>
+              <a:latin typeface="Aptos Display"/>
+            </a:endParaRPr>
+          </a:p>
+        </p:txBody>
+      </p:sp>
+      <p:sp>
+        <p:nvSpPr>
+          <p:cNvPr id="18" name="TextBox 17"/>
+          <p:cNvSpPr txBox="1"/>
+          <p:nvPr/>
+        </p:nvSpPr>
+        <p:spPr>
+          <a:xfrm>
+            <a:off x="987552" y="4590288"/>
+            <a:ext cx="10058400" cy="1005840"/>
+          </a:xfrm>
+          <a:prstGeom prst="rect">
+            <a:avLst/>
+          </a:prstGeom>
+          <a:noFill/>
+        </p:spPr>
+        <p:txBody>
+          <a:bodyPr wrap="square">
+            <a:spAutoFit/>
+          </a:bodyPr>
+          <a:lstStyle/>
+          <a:p>
+            <a:pPr>
+              <a:spcAft>
+                <a:spcPts val="800"/>
+              </a:spcAft>
+              <a:defRPr sz="1600">
+                <a:solidFill>
+                  <a:srgbClr val="0F172A"/>
+                </a:solidFill>
+                <a:latin typeface="Aptos"/>
+              </a:defRPr>
+            </a:pPr>
+            <a:r>
+              <a:t>It fits the module well because it combines web services, SQL persistence, open data integration, and measurable analytics.</a:t>
+            </a:r>
+          </a:p>
+          <a:p>
+            <a:pPr>
+              <a:spcAft>
+                <a:spcPts val="800"/>
+              </a:spcAft>
+              <a:defRPr sz="1600">
+                <a:solidFill>
+                  <a:srgbClr val="0F172A"/>
+                </a:solidFill>
+                <a:latin typeface="Aptos"/>
+              </a:defRPr>
+            </a:pPr>
+            <a:r>
+              <a:t>The outputs are easy to explain visually: real cities, real dates, real environmental indicators, and clear comparisons.</a:t>
             </a:r>
           </a:p>
         </p:txBody>
@@ -3531,7 +4792,7 @@
 </file>
 
 <file path=ppt/slides/slide3.xml><?xml version="1.0" encoding="utf-8"?>
-<p:sld xmlns:a="http://schemas.openxmlformats.org/drawingml/2006/main" xmlns:p="http://schemas.openxmlformats.org/presentationml/2006/main" xmlns:r="http://schemas.openxmlformats.org/officeDocument/2006/relationships">
+<p:sld xmlns:a="http://schemas.openxmlformats.org/drawingml/2006/main" xmlns:r="http://schemas.openxmlformats.org/officeDocument/2006/relationships" xmlns:p="http://schemas.openxmlformats.org/presentationml/2006/main">
   <p:cSld>
     <p:spTree>
       <p:nvGrpSpPr>
@@ -3542,95 +4803,23 @@
       <p:grpSpPr/>
       <p:sp>
         <p:nvSpPr>
-          <p:cNvPr id="2" name="TextBox 1"/>
-          <p:cNvSpPr txBox="1"/>
-          <p:nvPr/>
-        </p:nvSpPr>
-        <p:spPr>
-          <a:xfrm>
-            <a:off x="640080" y="548640"/>
-            <a:ext cx="7772400" cy="1005840"/>
+          <p:cNvPr id="2" name="Rectangle 1"/>
+          <p:cNvSpPr/>
+          <p:nvPr/>
+        </p:nvSpPr>
+        <p:spPr>
+          <a:xfrm>
+            <a:off x="106680" y="-125730"/>
+            <a:ext cx="12191695" cy="6858000"/>
           </a:xfrm>
           <a:prstGeom prst="rect">
             <a:avLst/>
           </a:prstGeom>
-          <a:noFill/>
-        </p:spPr>
-        <p:txBody>
-          <a:bodyPr wrap="none">
-            <a:spAutoFit/>
-          </a:bodyPr>
-          <a:lstStyle/>
-          <a:p>
-            <a:pPr>
-              <a:defRPr sz="2800" b="1">
-                <a:solidFill>
-                  <a:srgbClr val="0F172A"/>
-                </a:solidFill>
-              </a:defRPr>
-            </a:pPr>
-            <a:r>
-              <a:t>Architecture Overview</a:t>
-            </a:r>
-          </a:p>
-        </p:txBody>
-      </p:sp>
-      <p:sp>
-        <p:nvSpPr>
-          <p:cNvPr id="3" name="TextBox 2"/>
-          <p:cNvSpPr txBox="1"/>
-          <p:nvPr/>
-        </p:nvSpPr>
-        <p:spPr>
-          <a:xfrm>
-            <a:off x="685800" y="1417320"/>
-            <a:ext cx="7315200" cy="731520"/>
-          </a:xfrm>
-          <a:prstGeom prst="rect">
-            <a:avLst/>
-          </a:prstGeom>
-          <a:noFill/>
-        </p:spPr>
-        <p:txBody>
-          <a:bodyPr wrap="none">
-            <a:spAutoFit/>
-          </a:bodyPr>
-          <a:lstStyle/>
-          <a:p>
-            <a:pPr>
-              <a:defRPr sz="1300">
-                <a:solidFill>
-                  <a:srgbClr val="334155"/>
-                </a:solidFill>
-              </a:defRPr>
-            </a:pPr>
-            <a:r>
-              <a:t>Layered FastAPI design for coursework demonstration and maintenance.</a:t>
-            </a:r>
-          </a:p>
-        </p:txBody>
-      </p:sp>
-      <p:sp>
-        <p:nvSpPr>
-          <p:cNvPr id="4" name="Rounded Rectangle 3"/>
-          <p:cNvSpPr/>
-          <p:nvPr/>
-        </p:nvSpPr>
-        <p:spPr>
-          <a:xfrm>
-            <a:off x="731520" y="1828800"/>
-            <a:ext cx="1828800" cy="822960"/>
-          </a:xfrm>
-          <a:prstGeom prst="roundRect">
-            <a:avLst/>
-          </a:prstGeom>
           <a:solidFill>
-            <a:srgbClr val="F1F5F9"/>
+            <a:srgbClr val="FFFFFF"/>
           </a:solidFill>
           <a:ln>
-            <a:solidFill>
-              <a:srgbClr val="0D9488"/>
-            </a:solidFill>
+            <a:noFill/>
           </a:ln>
         </p:spPr>
         <p:style>
@@ -3651,40 +4840,29 @@
           <a:bodyPr rtlCol="0" anchor="ctr"/>
           <a:lstStyle/>
           <a:p>
-            <a:pPr algn="ctr">
-              <a:defRPr sz="1600" b="1">
-                <a:solidFill>
-                  <a:srgbClr val="0F172A"/>
-                </a:solidFill>
-              </a:defRPr>
-            </a:pPr>
-            <a:r>
-              <a:t>Client / Swagger UI</a:t>
-            </a:r>
-          </a:p>
-        </p:txBody>
-      </p:sp>
-      <p:sp>
-        <p:nvSpPr>
-          <p:cNvPr id="5" name="Rounded Rectangle 4"/>
+            <a:pPr algn="ctr"/>
+          </a:p>
+        </p:txBody>
+      </p:sp>
+      <p:sp>
+        <p:nvSpPr>
+          <p:cNvPr id="3" name="Oval 2"/>
           <p:cNvSpPr/>
           <p:nvPr/>
         </p:nvSpPr>
         <p:spPr>
           <a:xfrm>
-            <a:off x="2834640" y="1828800"/>
-            <a:ext cx="1828800" cy="822960"/>
-          </a:xfrm>
-          <a:prstGeom prst="roundRect">
+            <a:off x="9326880" y="-365760"/>
+            <a:ext cx="2011680" cy="2011680"/>
+          </a:xfrm>
+          <a:prstGeom prst="ellipse">
             <a:avLst/>
           </a:prstGeom>
           <a:solidFill>
-            <a:srgbClr val="F1F5F9"/>
+            <a:srgbClr val="CCFBF1"/>
           </a:solidFill>
           <a:ln>
-            <a:solidFill>
-              <a:srgbClr val="F97316"/>
-            </a:solidFill>
+            <a:noFill/>
           </a:ln>
         </p:spPr>
         <p:style>
@@ -3705,37 +4883,151 @@
           <a:bodyPr rtlCol="0" anchor="ctr"/>
           <a:lstStyle/>
           <a:p>
-            <a:pPr algn="ctr">
-              <a:defRPr sz="1600" b="1">
+            <a:pPr algn="ctr"/>
+          </a:p>
+        </p:txBody>
+      </p:sp>
+      <p:sp>
+        <p:nvSpPr>
+          <p:cNvPr id="4" name="TextBox 3"/>
+          <p:cNvSpPr txBox="1"/>
+          <p:nvPr/>
+        </p:nvSpPr>
+        <p:spPr>
+          <a:xfrm>
+            <a:off x="731520" y="411480"/>
+            <a:ext cx="2926080" cy="365760"/>
+          </a:xfrm>
+          <a:prstGeom prst="rect">
+            <a:avLst/>
+          </a:prstGeom>
+          <a:noFill/>
+        </p:spPr>
+        <p:txBody>
+          <a:bodyPr wrap="square" anchor="t">
+            <a:spAutoFit/>
+          </a:bodyPr>
+          <a:lstStyle/>
+          <a:p>
+            <a:pPr algn="l"/>
+            <a:r>
+              <a:rPr sz="1300" b="1">
+                <a:solidFill>
+                  <a:srgbClr val="0D9488"/>
+                </a:solidFill>
+                <a:latin typeface="Aptos"/>
+              </a:rPr>
+              <a:t>ARCHITECTURE</a:t>
+            </a:r>
+            <a:endParaRPr sz="1300" b="1">
+              <a:solidFill>
+                <a:srgbClr val="0D9488"/>
+              </a:solidFill>
+              <a:latin typeface="Aptos"/>
+            </a:endParaRPr>
+          </a:p>
+        </p:txBody>
+      </p:sp>
+      <p:sp>
+        <p:nvSpPr>
+          <p:cNvPr id="5" name="TextBox 4"/>
+          <p:cNvSpPr txBox="1"/>
+          <p:nvPr/>
+        </p:nvSpPr>
+        <p:spPr>
+          <a:xfrm>
+            <a:off x="731520" y="713232"/>
+            <a:ext cx="8046720" cy="731520"/>
+          </a:xfrm>
+          <a:prstGeom prst="rect">
+            <a:avLst/>
+          </a:prstGeom>
+          <a:noFill/>
+        </p:spPr>
+        <p:txBody>
+          <a:bodyPr wrap="square" anchor="t">
+            <a:spAutoFit/>
+          </a:bodyPr>
+          <a:lstStyle/>
+          <a:p>
+            <a:pPr algn="l"/>
+            <a:r>
+              <a:rPr sz="2800" b="1">
                 <a:solidFill>
                   <a:srgbClr val="0F172A"/>
                 </a:solidFill>
-              </a:defRPr>
-            </a:pPr>
-            <a:r>
-              <a:t>FastAPI Routers</a:t>
-            </a:r>
-          </a:p>
-        </p:txBody>
-      </p:sp>
-      <p:sp>
-        <p:nvSpPr>
-          <p:cNvPr id="6" name="Rounded Rectangle 5"/>
+                <a:latin typeface="Aptos Display"/>
+              </a:rPr>
+              <a:t>Layered design keeps HTTP, validation, storage, and integration concerns separate</a:t>
+            </a:r>
+            <a:endParaRPr sz="2800" b="1">
+              <a:solidFill>
+                <a:srgbClr val="0F172A"/>
+              </a:solidFill>
+              <a:latin typeface="Aptos Display"/>
+            </a:endParaRPr>
+          </a:p>
+        </p:txBody>
+      </p:sp>
+      <p:sp>
+        <p:nvSpPr>
+          <p:cNvPr id="6" name="TextBox 5"/>
+          <p:cNvSpPr txBox="1"/>
+          <p:nvPr/>
+        </p:nvSpPr>
+        <p:spPr>
+          <a:xfrm>
+            <a:off x="731393" y="1549527"/>
+            <a:ext cx="7863840" cy="502920"/>
+          </a:xfrm>
+          <a:prstGeom prst="rect">
+            <a:avLst/>
+          </a:prstGeom>
+          <a:noFill/>
+        </p:spPr>
+        <p:txBody>
+          <a:bodyPr wrap="square" anchor="t">
+            <a:spAutoFit/>
+          </a:bodyPr>
+          <a:lstStyle/>
+          <a:p>
+            <a:pPr algn="l"/>
+            <a:r>
+              <a:rPr sz="1400" b="0">
+                <a:solidFill>
+                  <a:srgbClr val="64748B"/>
+                </a:solidFill>
+                <a:latin typeface="Aptos"/>
+              </a:rPr>
+              <a:t>This structure made the API easier to maintain, test, and explain during the oral examination.</a:t>
+            </a:r>
+            <a:endParaRPr sz="1400" b="0">
+              <a:solidFill>
+                <a:srgbClr val="64748B"/>
+              </a:solidFill>
+              <a:latin typeface="Aptos"/>
+            </a:endParaRPr>
+          </a:p>
+        </p:txBody>
+      </p:sp>
+      <p:sp>
+        <p:nvSpPr>
+          <p:cNvPr id="7" name="Rounded Rectangle 6"/>
           <p:cNvSpPr/>
           <p:nvPr/>
         </p:nvSpPr>
         <p:spPr>
           <a:xfrm>
-            <a:off x="4937760" y="1828800"/>
-            <a:ext cx="1828800" cy="822960"/>
+            <a:off x="822960" y="2011680"/>
+            <a:ext cx="1893570" cy="1824355"/>
           </a:xfrm>
           <a:prstGeom prst="roundRect">
             <a:avLst/>
           </a:prstGeom>
           <a:solidFill>
-            <a:srgbClr val="F1F5F9"/>
+            <a:srgbClr val="DBEAFE"/>
           </a:solidFill>
-          <a:ln>
+          <a:ln w="19050">
             <a:solidFill>
               <a:srgbClr val="0D9488"/>
             </a:solidFill>
@@ -3759,39 +5051,112 @@
           <a:bodyPr rtlCol="0" anchor="ctr"/>
           <a:lstStyle/>
           <a:p>
-            <a:pPr algn="ctr">
-              <a:defRPr sz="1600" b="1">
+            <a:pPr algn="ctr"/>
+          </a:p>
+        </p:txBody>
+      </p:sp>
+      <p:sp>
+        <p:nvSpPr>
+          <p:cNvPr id="8" name="TextBox 7"/>
+          <p:cNvSpPr txBox="1"/>
+          <p:nvPr/>
+        </p:nvSpPr>
+        <p:spPr>
+          <a:xfrm>
+            <a:off x="941959" y="2011934"/>
+            <a:ext cx="1627632" cy="320040"/>
+          </a:xfrm>
+          <a:prstGeom prst="rect">
+            <a:avLst/>
+          </a:prstGeom>
+          <a:noFill/>
+        </p:spPr>
+        <p:txBody>
+          <a:bodyPr wrap="square" anchor="t">
+            <a:spAutoFit/>
+          </a:bodyPr>
+          <a:lstStyle/>
+          <a:p>
+            <a:pPr algn="l"/>
+            <a:r>
+              <a:rPr sz="1800" b="1">
                 <a:solidFill>
                   <a:srgbClr val="0F172A"/>
                 </a:solidFill>
-              </a:defRPr>
-            </a:pPr>
-            <a:r>
-              <a:t>Services + Validation</a:t>
-            </a:r>
-          </a:p>
-        </p:txBody>
-      </p:sp>
-      <p:sp>
-        <p:nvSpPr>
-          <p:cNvPr id="7" name="Rounded Rectangle 6"/>
+                <a:latin typeface="Aptos Display"/>
+              </a:rPr>
+              <a:t>Client / Swagger UI</a:t>
+            </a:r>
+            <a:endParaRPr sz="1800" b="1">
+              <a:solidFill>
+                <a:srgbClr val="0F172A"/>
+              </a:solidFill>
+              <a:latin typeface="Aptos Display"/>
+            </a:endParaRPr>
+          </a:p>
+        </p:txBody>
+      </p:sp>
+      <p:sp>
+        <p:nvSpPr>
+          <p:cNvPr id="9" name="TextBox 8"/>
+          <p:cNvSpPr txBox="1"/>
+          <p:nvPr/>
+        </p:nvSpPr>
+        <p:spPr>
+          <a:xfrm>
+            <a:off x="969264" y="2542032"/>
+            <a:ext cx="1627632" cy="667512"/>
+          </a:xfrm>
+          <a:prstGeom prst="rect">
+            <a:avLst/>
+          </a:prstGeom>
+          <a:noFill/>
+        </p:spPr>
+        <p:txBody>
+          <a:bodyPr wrap="square" anchor="t">
+            <a:spAutoFit/>
+          </a:bodyPr>
+          <a:lstStyle/>
+          <a:p>
+            <a:pPr algn="l"/>
+            <a:r>
+              <a:rPr sz="1300" b="0">
+                <a:solidFill>
+                  <a:srgbClr val="334155"/>
+                </a:solidFill>
+                <a:latin typeface="Aptos"/>
+              </a:rPr>
+              <a:t>Users send HTTP requests, authenticate, and inspect responses through interactive documentation.</a:t>
+            </a:r>
+            <a:endParaRPr sz="1300" b="0">
+              <a:solidFill>
+                <a:srgbClr val="334155"/>
+              </a:solidFill>
+              <a:latin typeface="Aptos"/>
+            </a:endParaRPr>
+          </a:p>
+        </p:txBody>
+      </p:sp>
+      <p:sp>
+        <p:nvSpPr>
+          <p:cNvPr id="10" name="Rounded Rectangle 9"/>
           <p:cNvSpPr/>
           <p:nvPr/>
         </p:nvSpPr>
         <p:spPr>
           <a:xfrm>
-            <a:off x="1828800" y="3749039"/>
-            <a:ext cx="1828800" cy="822960"/>
+            <a:off x="3063240" y="2011680"/>
+            <a:ext cx="2057400" cy="1594485"/>
           </a:xfrm>
           <a:prstGeom prst="roundRect">
             <a:avLst/>
           </a:prstGeom>
           <a:solidFill>
-            <a:srgbClr val="F1F5F9"/>
+            <a:srgbClr val="CCFBF1"/>
           </a:solidFill>
-          <a:ln>
+          <a:ln w="19050">
             <a:solidFill>
-              <a:srgbClr val="0F172A"/>
+              <a:srgbClr val="0D9488"/>
             </a:solidFill>
           </a:ln>
         </p:spPr>
@@ -3813,39 +5178,112 @@
           <a:bodyPr rtlCol="0" anchor="ctr"/>
           <a:lstStyle/>
           <a:p>
-            <a:pPr algn="ctr">
-              <a:defRPr sz="1600" b="1">
+            <a:pPr algn="ctr"/>
+          </a:p>
+        </p:txBody>
+      </p:sp>
+      <p:sp>
+        <p:nvSpPr>
+          <p:cNvPr id="11" name="TextBox 10"/>
+          <p:cNvSpPr txBox="1"/>
+          <p:nvPr/>
+        </p:nvSpPr>
+        <p:spPr>
+          <a:xfrm>
+            <a:off x="3210179" y="2052574"/>
+            <a:ext cx="1764792" cy="320040"/>
+          </a:xfrm>
+          <a:prstGeom prst="rect">
+            <a:avLst/>
+          </a:prstGeom>
+          <a:noFill/>
+        </p:spPr>
+        <p:txBody>
+          <a:bodyPr wrap="square" anchor="t">
+            <a:spAutoFit/>
+          </a:bodyPr>
+          <a:lstStyle/>
+          <a:p>
+            <a:pPr algn="l"/>
+            <a:r>
+              <a:rPr sz="1800" b="1">
                 <a:solidFill>
                   <a:srgbClr val="0F172A"/>
                 </a:solidFill>
-              </a:defRPr>
-            </a:pPr>
-            <a:r>
-              <a:t>SQLite + SQLAlchemy</a:t>
-            </a:r>
-          </a:p>
-        </p:txBody>
-      </p:sp>
-      <p:sp>
-        <p:nvSpPr>
-          <p:cNvPr id="8" name="Rounded Rectangle 7"/>
+                <a:latin typeface="Aptos Display"/>
+              </a:rPr>
+              <a:t>FastAPI Routers</a:t>
+            </a:r>
+            <a:endParaRPr sz="1800" b="1">
+              <a:solidFill>
+                <a:srgbClr val="0F172A"/>
+              </a:solidFill>
+              <a:latin typeface="Aptos Display"/>
+            </a:endParaRPr>
+          </a:p>
+        </p:txBody>
+      </p:sp>
+      <p:sp>
+        <p:nvSpPr>
+          <p:cNvPr id="12" name="TextBox 11"/>
+          <p:cNvSpPr txBox="1"/>
+          <p:nvPr/>
+        </p:nvSpPr>
+        <p:spPr>
+          <a:xfrm>
+            <a:off x="3224149" y="2592832"/>
+            <a:ext cx="1764792" cy="667512"/>
+          </a:xfrm>
+          <a:prstGeom prst="rect">
+            <a:avLst/>
+          </a:prstGeom>
+          <a:noFill/>
+        </p:spPr>
+        <p:txBody>
+          <a:bodyPr wrap="square" anchor="t">
+            <a:spAutoFit/>
+          </a:bodyPr>
+          <a:lstStyle/>
+          <a:p>
+            <a:pPr algn="l"/>
+            <a:r>
+              <a:rPr sz="1300" b="0">
+                <a:solidFill>
+                  <a:srgbClr val="334155"/>
+                </a:solidFill>
+                <a:latin typeface="Aptos"/>
+              </a:rPr>
+              <a:t>Route handlers expose auth, cities, records, imports, and analytics endpoints.</a:t>
+            </a:r>
+            <a:endParaRPr sz="1300" b="0">
+              <a:solidFill>
+                <a:srgbClr val="334155"/>
+              </a:solidFill>
+              <a:latin typeface="Aptos"/>
+            </a:endParaRPr>
+          </a:p>
+        </p:txBody>
+      </p:sp>
+      <p:sp>
+        <p:nvSpPr>
+          <p:cNvPr id="13" name="Rounded Rectangle 12"/>
           <p:cNvSpPr/>
           <p:nvPr/>
         </p:nvSpPr>
         <p:spPr>
           <a:xfrm>
-            <a:off x="4846320" y="3749039"/>
-            <a:ext cx="1828800" cy="822960"/>
+            <a:off x="5468112" y="1828800"/>
+            <a:ext cx="2377440" cy="1691640"/>
           </a:xfrm>
           <a:prstGeom prst="roundRect">
             <a:avLst/>
           </a:prstGeom>
           <a:solidFill>
-            <a:srgbClr val="F1F5F9"/>
+            <a:srgbClr val="FFEDD5"/>
           </a:solidFill>
-          <a:ln>
+          <a:ln w="19050">
             <a:solidFill>
-              <a:srgbClr val="0F172A"/>
+              <a:srgbClr val="F97316"/>
             </a:solidFill>
           </a:ln>
         </p:spPr>
@@ -3867,34 +5305,361 @@
           <a:bodyPr rtlCol="0" anchor="ctr"/>
           <a:lstStyle/>
           <a:p>
-            <a:pPr algn="ctr">
-              <a:defRPr sz="1600" b="1">
+            <a:pPr algn="ctr"/>
+          </a:p>
+        </p:txBody>
+      </p:sp>
+      <p:sp>
+        <p:nvSpPr>
+          <p:cNvPr id="14" name="TextBox 13"/>
+          <p:cNvSpPr txBox="1"/>
+          <p:nvPr/>
+        </p:nvSpPr>
+        <p:spPr>
+          <a:xfrm>
+            <a:off x="5623306" y="1837944"/>
+            <a:ext cx="2084832" cy="320040"/>
+          </a:xfrm>
+          <a:prstGeom prst="rect">
+            <a:avLst/>
+          </a:prstGeom>
+          <a:noFill/>
+        </p:spPr>
+        <p:txBody>
+          <a:bodyPr wrap="square" anchor="t">
+            <a:spAutoFit/>
+          </a:bodyPr>
+          <a:lstStyle/>
+          <a:p>
+            <a:pPr algn="l"/>
+            <a:r>
+              <a:rPr sz="1800" b="1">
                 <a:solidFill>
                   <a:srgbClr val="0F172A"/>
                 </a:solidFill>
-              </a:defRPr>
-            </a:pPr>
-            <a:r>
-              <a:t>Open-Meteo APIs</a:t>
-            </a:r>
+                <a:latin typeface="Aptos Display"/>
+              </a:rPr>
+              <a:t>Services + Validation</a:t>
+            </a:r>
+            <a:endParaRPr sz="1800" b="1">
+              <a:solidFill>
+                <a:srgbClr val="0F172A"/>
+              </a:solidFill>
+              <a:latin typeface="Aptos Display"/>
+            </a:endParaRPr>
+          </a:p>
+        </p:txBody>
+      </p:sp>
+      <p:sp>
+        <p:nvSpPr>
+          <p:cNvPr id="15" name="TextBox 14"/>
+          <p:cNvSpPr txBox="1"/>
+          <p:nvPr/>
+        </p:nvSpPr>
+        <p:spPr>
+          <a:xfrm>
+            <a:off x="5614416" y="2359152"/>
+            <a:ext cx="2084832" cy="1033272"/>
+          </a:xfrm>
+          <a:prstGeom prst="rect">
+            <a:avLst/>
+          </a:prstGeom>
+          <a:noFill/>
+        </p:spPr>
+        <p:txBody>
+          <a:bodyPr wrap="square" anchor="t">
+            <a:spAutoFit/>
+          </a:bodyPr>
+          <a:lstStyle/>
+          <a:p>
+            <a:pPr algn="l"/>
+            <a:r>
+              <a:rPr sz="1300" b="0">
+                <a:solidFill>
+                  <a:srgbClr val="334155"/>
+                </a:solidFill>
+                <a:latin typeface="Aptos"/>
+              </a:rPr>
+              <a:t>Pydantic validates payloads while service modules handle analytics, security helpers, and Open-Meteo logic.</a:t>
+            </a:r>
+            <a:endParaRPr sz="1300" b="0">
+              <a:solidFill>
+                <a:srgbClr val="334155"/>
+              </a:solidFill>
+              <a:latin typeface="Aptos"/>
+            </a:endParaRPr>
+          </a:p>
+        </p:txBody>
+      </p:sp>
+      <p:sp>
+        <p:nvSpPr>
+          <p:cNvPr id="16" name="Rounded Rectangle 15"/>
+          <p:cNvSpPr/>
+          <p:nvPr/>
+        </p:nvSpPr>
+        <p:spPr>
+          <a:xfrm>
+            <a:off x="8211312" y="1783080"/>
+            <a:ext cx="1508760" cy="1234440"/>
+          </a:xfrm>
+          <a:prstGeom prst="roundRect">
+            <a:avLst/>
+          </a:prstGeom>
+          <a:solidFill>
+            <a:srgbClr val="EDE9FE"/>
+          </a:solidFill>
+          <a:ln w="19050">
+            <a:solidFill>
+              <a:srgbClr val="7C3AED"/>
+            </a:solidFill>
+          </a:ln>
+        </p:spPr>
+        <p:style>
+          <a:lnRef idx="1">
+            <a:schemeClr val="accent1"/>
+          </a:lnRef>
+          <a:fillRef idx="3">
+            <a:schemeClr val="accent1"/>
+          </a:fillRef>
+          <a:effectRef idx="2">
+            <a:schemeClr val="accent1"/>
+          </a:effectRef>
+          <a:fontRef idx="minor">
+            <a:schemeClr val="lt1"/>
+          </a:fontRef>
+        </p:style>
+        <p:txBody>
+          <a:bodyPr rtlCol="0" anchor="ctr"/>
+          <a:lstStyle/>
+          <a:p>
+            <a:pPr algn="ctr"/>
+          </a:p>
+        </p:txBody>
+      </p:sp>
+      <p:sp>
+        <p:nvSpPr>
+          <p:cNvPr id="17" name="TextBox 16"/>
+          <p:cNvSpPr txBox="1"/>
+          <p:nvPr/>
+        </p:nvSpPr>
+        <p:spPr>
+          <a:xfrm>
+            <a:off x="8357616" y="1929384"/>
+            <a:ext cx="1216152" cy="320040"/>
+          </a:xfrm>
+          <a:prstGeom prst="rect">
+            <a:avLst/>
+          </a:prstGeom>
+          <a:noFill/>
+        </p:spPr>
+        <p:txBody>
+          <a:bodyPr wrap="square" anchor="t">
+            <a:spAutoFit/>
+          </a:bodyPr>
+          <a:lstStyle/>
+          <a:p>
+            <a:pPr algn="l"/>
+            <a:r>
+              <a:rPr sz="1800" b="1">
+                <a:solidFill>
+                  <a:srgbClr val="0F172A"/>
+                </a:solidFill>
+                <a:latin typeface="Aptos Display"/>
+              </a:rPr>
+              <a:t>SQLite</a:t>
+            </a:r>
+            <a:endParaRPr sz="1800" b="1">
+              <a:solidFill>
+                <a:srgbClr val="0F172A"/>
+              </a:solidFill>
+              <a:latin typeface="Aptos Display"/>
+            </a:endParaRPr>
+          </a:p>
+        </p:txBody>
+      </p:sp>
+      <p:sp>
+        <p:nvSpPr>
+          <p:cNvPr id="18" name="TextBox 17"/>
+          <p:cNvSpPr txBox="1"/>
+          <p:nvPr/>
+        </p:nvSpPr>
+        <p:spPr>
+          <a:xfrm>
+            <a:off x="8357616" y="2313432"/>
+            <a:ext cx="1216152" cy="576072"/>
+          </a:xfrm>
+          <a:prstGeom prst="rect">
+            <a:avLst/>
+          </a:prstGeom>
+          <a:noFill/>
+        </p:spPr>
+        <p:txBody>
+          <a:bodyPr wrap="square" anchor="t">
+            <a:spAutoFit/>
+          </a:bodyPr>
+          <a:lstStyle/>
+          <a:p>
+            <a:pPr algn="l"/>
+            <a:r>
+              <a:rPr sz="1300" b="0">
+                <a:solidFill>
+                  <a:srgbClr val="334155"/>
+                </a:solidFill>
+                <a:latin typeface="Aptos"/>
+              </a:rPr>
+              <a:t>Persistent local data store</a:t>
+            </a:r>
+            <a:endParaRPr sz="1300" b="0">
+              <a:solidFill>
+                <a:srgbClr val="334155"/>
+              </a:solidFill>
+              <a:latin typeface="Aptos"/>
+            </a:endParaRPr>
+          </a:p>
+        </p:txBody>
+      </p:sp>
+      <p:sp>
+        <p:nvSpPr>
+          <p:cNvPr id="19" name="Rounded Rectangle 18"/>
+          <p:cNvSpPr/>
+          <p:nvPr/>
+        </p:nvSpPr>
+        <p:spPr>
+          <a:xfrm>
+            <a:off x="10012680" y="1783080"/>
+            <a:ext cx="1325880" cy="1234440"/>
+          </a:xfrm>
+          <a:prstGeom prst="roundRect">
+            <a:avLst/>
+          </a:prstGeom>
+          <a:solidFill>
+            <a:srgbClr val="FFEDD5"/>
+          </a:solidFill>
+          <a:ln w="19050">
+            <a:solidFill>
+              <a:srgbClr val="F97316"/>
+            </a:solidFill>
+          </a:ln>
+        </p:spPr>
+        <p:style>
+          <a:lnRef idx="1">
+            <a:schemeClr val="accent1"/>
+          </a:lnRef>
+          <a:fillRef idx="3">
+            <a:schemeClr val="accent1"/>
+          </a:fillRef>
+          <a:effectRef idx="2">
+            <a:schemeClr val="accent1"/>
+          </a:effectRef>
+          <a:fontRef idx="minor">
+            <a:schemeClr val="lt1"/>
+          </a:fontRef>
+        </p:style>
+        <p:txBody>
+          <a:bodyPr rtlCol="0" anchor="ctr"/>
+          <a:lstStyle/>
+          <a:p>
+            <a:pPr algn="ctr"/>
+          </a:p>
+        </p:txBody>
+      </p:sp>
+      <p:sp>
+        <p:nvSpPr>
+          <p:cNvPr id="20" name="TextBox 19"/>
+          <p:cNvSpPr txBox="1"/>
+          <p:nvPr/>
+        </p:nvSpPr>
+        <p:spPr>
+          <a:xfrm>
+            <a:off x="10178034" y="1883664"/>
+            <a:ext cx="1033272" cy="320040"/>
+          </a:xfrm>
+          <a:prstGeom prst="rect">
+            <a:avLst/>
+          </a:prstGeom>
+          <a:noFill/>
+        </p:spPr>
+        <p:txBody>
+          <a:bodyPr wrap="square" anchor="t">
+            <a:spAutoFit/>
+          </a:bodyPr>
+          <a:lstStyle/>
+          <a:p>
+            <a:pPr algn="l"/>
+            <a:r>
+              <a:rPr sz="1800" b="1">
+                <a:solidFill>
+                  <a:srgbClr val="0F172A"/>
+                </a:solidFill>
+                <a:latin typeface="Aptos Display"/>
+              </a:rPr>
+              <a:t>Open-Meteo</a:t>
+            </a:r>
+            <a:endParaRPr sz="1800" b="1">
+              <a:solidFill>
+                <a:srgbClr val="0F172A"/>
+              </a:solidFill>
+              <a:latin typeface="Aptos Display"/>
+            </a:endParaRPr>
+          </a:p>
+        </p:txBody>
+      </p:sp>
+      <p:sp>
+        <p:nvSpPr>
+          <p:cNvPr id="21" name="TextBox 20"/>
+          <p:cNvSpPr txBox="1"/>
+          <p:nvPr/>
+        </p:nvSpPr>
+        <p:spPr>
+          <a:xfrm>
+            <a:off x="10158984" y="2441702"/>
+            <a:ext cx="1033272" cy="576072"/>
+          </a:xfrm>
+          <a:prstGeom prst="rect">
+            <a:avLst/>
+          </a:prstGeom>
+          <a:noFill/>
+        </p:spPr>
+        <p:txBody>
+          <a:bodyPr wrap="square" anchor="t">
+            <a:spAutoFit/>
+          </a:bodyPr>
+          <a:lstStyle/>
+          <a:p>
+            <a:pPr algn="l"/>
+            <a:r>
+              <a:rPr sz="1300" b="0">
+                <a:solidFill>
+                  <a:srgbClr val="334155"/>
+                </a:solidFill>
+                <a:latin typeface="Aptos"/>
+              </a:rPr>
+              <a:t>External data source</a:t>
+            </a:r>
+            <a:endParaRPr sz="1300" b="0">
+              <a:solidFill>
+                <a:srgbClr val="334155"/>
+              </a:solidFill>
+              <a:latin typeface="Aptos"/>
+            </a:endParaRPr>
           </a:p>
         </p:txBody>
       </p:sp>
       <p:cxnSp>
         <p:nvCxnSpPr>
-          <p:cNvPr id="9" name="Connector 8"/>
+          <p:cNvPr id="22" name="Connector 21"/>
           <p:cNvCxnSpPr/>
           <p:nvPr/>
         </p:nvCxnSpPr>
         <p:spPr>
           <a:xfrm>
-            <a:off x="1645920" y="2651760"/>
-            <a:ext cx="1188720" cy="0"/>
+            <a:off x="2743200" y="2697480"/>
+            <a:ext cx="320040" cy="0"/>
           </a:xfrm>
           <a:prstGeom prst="line">
             <a:avLst/>
           </a:prstGeom>
-          <a:ln w="25400">
+          <a:ln w="30480">
             <a:solidFill>
               <a:srgbClr val="334155"/>
             </a:solidFill>
@@ -3917,19 +5682,19 @@
       </p:cxnSp>
       <p:cxnSp>
         <p:nvCxnSpPr>
-          <p:cNvPr id="10" name="Connector 9"/>
+          <p:cNvPr id="23" name="Connector 22"/>
           <p:cNvCxnSpPr/>
           <p:nvPr/>
         </p:nvCxnSpPr>
         <p:spPr>
           <a:xfrm>
-            <a:off x="4663440" y="2651760"/>
-            <a:ext cx="274320" cy="0"/>
+            <a:off x="5120640" y="2697480"/>
+            <a:ext cx="347472" cy="0"/>
           </a:xfrm>
           <a:prstGeom prst="line">
             <a:avLst/>
           </a:prstGeom>
-          <a:ln w="25400">
+          <a:ln w="30480">
             <a:solidFill>
               <a:srgbClr val="334155"/>
             </a:solidFill>
@@ -3952,19 +5717,19 @@
       </p:cxnSp>
       <p:cxnSp>
         <p:nvCxnSpPr>
-          <p:cNvPr id="11" name="Connector 10"/>
+          <p:cNvPr id="24" name="Connector 23"/>
           <p:cNvCxnSpPr/>
           <p:nvPr/>
         </p:nvCxnSpPr>
         <p:spPr>
           <a:xfrm>
-            <a:off x="3749039" y="2651760"/>
-            <a:ext cx="0" cy="1097279"/>
+            <a:off x="7845552" y="2423160"/>
+            <a:ext cx="365760" cy="0"/>
           </a:xfrm>
           <a:prstGeom prst="line">
             <a:avLst/>
           </a:prstGeom>
-          <a:ln w="25400">
+          <a:ln w="30480">
             <a:solidFill>
               <a:srgbClr val="334155"/>
             </a:solidFill>
@@ -3987,19 +5752,19 @@
       </p:cxnSp>
       <p:cxnSp>
         <p:nvCxnSpPr>
-          <p:cNvPr id="12" name="Connector 11"/>
+          <p:cNvPr id="25" name="Connector 24"/>
           <p:cNvCxnSpPr/>
           <p:nvPr/>
         </p:nvCxnSpPr>
         <p:spPr>
-          <a:xfrm>
-            <a:off x="5760720" y="2651760"/>
-            <a:ext cx="0" cy="1097279"/>
+          <a:xfrm flipV="1">
+            <a:off x="7845552" y="2423160"/>
+            <a:ext cx="2167128" cy="457200"/>
           </a:xfrm>
           <a:prstGeom prst="line">
             <a:avLst/>
           </a:prstGeom>
-          <a:ln w="25400">
+          <a:ln w="30480">
             <a:solidFill>
               <a:srgbClr val="334155"/>
             </a:solidFill>
@@ -4022,14 +5787,59 @@
       </p:cxnSp>
       <p:sp>
         <p:nvSpPr>
-          <p:cNvPr id="13" name="TextBox 12"/>
+          <p:cNvPr id="26" name="Rounded Rectangle 25"/>
+          <p:cNvSpPr/>
+          <p:nvPr/>
+        </p:nvSpPr>
+        <p:spPr>
+          <a:xfrm>
+            <a:off x="841248" y="4160520"/>
+            <a:ext cx="10561320" cy="1417320"/>
+          </a:xfrm>
+          <a:prstGeom prst="roundRect">
+            <a:avLst/>
+          </a:prstGeom>
+          <a:solidFill>
+            <a:srgbClr val="F8FAFC"/>
+          </a:solidFill>
+          <a:ln w="19050">
+            <a:solidFill>
+              <a:srgbClr val="E2E8F0"/>
+            </a:solidFill>
+          </a:ln>
+        </p:spPr>
+        <p:style>
+          <a:lnRef idx="1">
+            <a:schemeClr val="accent1"/>
+          </a:lnRef>
+          <a:fillRef idx="3">
+            <a:schemeClr val="accent1"/>
+          </a:fillRef>
+          <a:effectRef idx="2">
+            <a:schemeClr val="accent1"/>
+          </a:effectRef>
+          <a:fontRef idx="minor">
+            <a:schemeClr val="lt1"/>
+          </a:fontRef>
+        </p:style>
+        <p:txBody>
+          <a:bodyPr rtlCol="0" anchor="ctr"/>
+          <a:lstStyle/>
+          <a:p>
+            <a:pPr algn="ctr"/>
+          </a:p>
+        </p:txBody>
+      </p:sp>
+      <p:sp>
+        <p:nvSpPr>
+          <p:cNvPr id="27" name="TextBox 26"/>
           <p:cNvSpPr txBox="1"/>
           <p:nvPr/>
         </p:nvSpPr>
         <p:spPr>
           <a:xfrm>
-            <a:off x="731520" y="4937760"/>
-            <a:ext cx="7589520" cy="914400"/>
+            <a:off x="1078992" y="4407408"/>
+            <a:ext cx="10058400" cy="320040"/>
           </a:xfrm>
           <a:prstGeom prst="rect">
             <a:avLst/>
@@ -4037,20 +5847,81 @@
           <a:noFill/>
         </p:spPr>
         <p:txBody>
-          <a:bodyPr wrap="none">
+          <a:bodyPr wrap="square" anchor="t">
             <a:spAutoFit/>
           </a:bodyPr>
           <a:lstStyle/>
           <a:p>
+            <a:pPr algn="l"/>
+            <a:r>
+              <a:rPr sz="2000" b="1">
+                <a:solidFill>
+                  <a:srgbClr val="0F172A"/>
+                </a:solidFill>
+                <a:latin typeface="Aptos Display"/>
+              </a:rPr>
+              <a:t>Key design decision</a:t>
+            </a:r>
+            <a:endParaRPr sz="2000" b="1">
+              <a:solidFill>
+                <a:srgbClr val="0F172A"/>
+              </a:solidFill>
+              <a:latin typeface="Aptos Display"/>
+            </a:endParaRPr>
+          </a:p>
+        </p:txBody>
+      </p:sp>
+      <p:sp>
+        <p:nvSpPr>
+          <p:cNvPr id="28" name="TextBox 27"/>
+          <p:cNvSpPr txBox="1"/>
+          <p:nvPr/>
+        </p:nvSpPr>
+        <p:spPr>
+          <a:xfrm>
+            <a:off x="1097280" y="4754880"/>
+            <a:ext cx="9966960" cy="640080"/>
+          </a:xfrm>
+          <a:prstGeom prst="rect">
+            <a:avLst/>
+          </a:prstGeom>
+          <a:noFill/>
+        </p:spPr>
+        <p:txBody>
+          <a:bodyPr wrap="square">
+            <a:spAutoFit/>
+          </a:bodyPr>
+          <a:lstStyle/>
+          <a:p>
             <a:pPr>
-              <a:defRPr sz="1700">
-                <a:solidFill>
-                  <a:srgbClr val="334155"/>
-                </a:solidFill>
+              <a:spcAft>
+                <a:spcPts val="800"/>
+              </a:spcAft>
+              <a:defRPr sz="1500">
+                <a:solidFill>
+                  <a:srgbClr val="0F172A"/>
+                </a:solidFill>
+                <a:latin typeface="Aptos"/>
               </a:defRPr>
             </a:pPr>
             <a:r>
-              <a:t>Key point: writes are authenticated, analytics stay public, and external data import is isolated behind a service layer.</a:t>
+              <a:t>Read endpoints remain easy to demonstrate, while all write operations are protected by JWT authentication.</a:t>
+            </a:r>
+          </a:p>
+          <a:p>
+            <a:pPr>
+              <a:spcAft>
+                <a:spcPts val="800"/>
+              </a:spcAft>
+              <a:defRPr sz="1500">
+                <a:solidFill>
+                  <a:srgbClr val="0F172A"/>
+                </a:solidFill>
+                <a:latin typeface="Aptos"/>
+              </a:defRPr>
+            </a:pPr>
+            <a:r>
+              <a:t>External data import is isolated behind a service layer, so route handlers remain small and focused.</a:t>
             </a:r>
           </a:p>
         </p:txBody>
@@ -4064,7 +5935,7 @@
 </file>
 
 <file path=ppt/slides/slide4.xml><?xml version="1.0" encoding="utf-8"?>
-<p:sld xmlns:a="http://schemas.openxmlformats.org/drawingml/2006/main" xmlns:p="http://schemas.openxmlformats.org/presentationml/2006/main" xmlns:r="http://schemas.openxmlformats.org/officeDocument/2006/relationships">
+<p:sld xmlns:a="http://schemas.openxmlformats.org/drawingml/2006/main" xmlns:r="http://schemas.openxmlformats.org/officeDocument/2006/relationships" xmlns:p="http://schemas.openxmlformats.org/presentationml/2006/main">
   <p:cSld>
     <p:spTree>
       <p:nvGrpSpPr>
@@ -4075,92 +5946,23 @@
       <p:grpSpPr/>
       <p:sp>
         <p:nvSpPr>
-          <p:cNvPr id="2" name="TextBox 1"/>
-          <p:cNvSpPr txBox="1"/>
-          <p:nvPr/>
-        </p:nvSpPr>
-        <p:spPr>
-          <a:xfrm>
-            <a:off x="640080" y="548640"/>
-            <a:ext cx="7772400" cy="1005840"/>
+          <p:cNvPr id="2" name="Rectangle 1"/>
+          <p:cNvSpPr/>
+          <p:nvPr/>
+        </p:nvSpPr>
+        <p:spPr>
+          <a:xfrm>
+            <a:off x="0" y="0"/>
+            <a:ext cx="12191695" cy="6858000"/>
           </a:xfrm>
           <a:prstGeom prst="rect">
             <a:avLst/>
           </a:prstGeom>
-          <a:noFill/>
-        </p:spPr>
-        <p:txBody>
-          <a:bodyPr wrap="none">
-            <a:spAutoFit/>
-          </a:bodyPr>
-          <a:lstStyle/>
-          <a:p>
-            <a:pPr>
-              <a:defRPr sz="2800" b="1">
-                <a:solidFill>
-                  <a:srgbClr val="0F172A"/>
-                </a:solidFill>
-              </a:defRPr>
-            </a:pPr>
-            <a:r>
-              <a:t>Data Model and Endpoints</a:t>
-            </a:r>
-          </a:p>
-        </p:txBody>
-      </p:sp>
-      <p:sp>
-        <p:nvSpPr>
-          <p:cNvPr id="3" name="TextBox 2"/>
-          <p:cNvSpPr txBox="1"/>
-          <p:nvPr/>
-        </p:nvSpPr>
-        <p:spPr>
-          <a:xfrm>
-            <a:off x="685800" y="1417320"/>
-            <a:ext cx="7315200" cy="731520"/>
-          </a:xfrm>
-          <a:prstGeom prst="rect">
-            <a:avLst/>
-          </a:prstGeom>
-          <a:noFill/>
-        </p:spPr>
-        <p:txBody>
-          <a:bodyPr wrap="none">
-            <a:spAutoFit/>
-          </a:bodyPr>
-          <a:lstStyle/>
-          <a:p>
-            <a:pPr>
-              <a:defRPr sz="1300">
-                <a:solidFill>
-                  <a:srgbClr val="334155"/>
-                </a:solidFill>
-              </a:defRPr>
-            </a:pPr>
-          </a:p>
-        </p:txBody>
-      </p:sp>
-      <p:sp>
-        <p:nvSpPr>
-          <p:cNvPr id="4" name="Rounded Rectangle 3"/>
-          <p:cNvSpPr/>
-          <p:nvPr/>
-        </p:nvSpPr>
-        <p:spPr>
-          <a:xfrm>
-            <a:off x="640080" y="1463040"/>
-            <a:ext cx="7863840" cy="4754880"/>
-          </a:xfrm>
-          <a:prstGeom prst="roundRect">
-            <a:avLst/>
-          </a:prstGeom>
           <a:solidFill>
-            <a:srgbClr val="F1F5F9"/>
+            <a:srgbClr val="F8FAFC"/>
           </a:solidFill>
           <a:ln>
-            <a:solidFill>
-              <a:srgbClr val="F97316"/>
-            </a:solidFill>
+            <a:noFill/>
           </a:ln>
         </p:spPr>
         <p:style>
@@ -4187,14 +5989,266 @@
       </p:sp>
       <p:sp>
         <p:nvSpPr>
+          <p:cNvPr id="3" name="Oval 2"/>
+          <p:cNvSpPr/>
+          <p:nvPr/>
+        </p:nvSpPr>
+        <p:spPr>
+          <a:xfrm>
+            <a:off x="-457200" y="4754880"/>
+            <a:ext cx="1828800" cy="1828800"/>
+          </a:xfrm>
+          <a:prstGeom prst="ellipse">
+            <a:avLst/>
+          </a:prstGeom>
+          <a:solidFill>
+            <a:srgbClr val="DBEAFE"/>
+          </a:solidFill>
+          <a:ln>
+            <a:noFill/>
+          </a:ln>
+        </p:spPr>
+        <p:style>
+          <a:lnRef idx="1">
+            <a:schemeClr val="accent1"/>
+          </a:lnRef>
+          <a:fillRef idx="3">
+            <a:schemeClr val="accent1"/>
+          </a:fillRef>
+          <a:effectRef idx="2">
+            <a:schemeClr val="accent1"/>
+          </a:effectRef>
+          <a:fontRef idx="minor">
+            <a:schemeClr val="lt1"/>
+          </a:fontRef>
+        </p:style>
+        <p:txBody>
+          <a:bodyPr rtlCol="0" anchor="ctr"/>
+          <a:lstStyle/>
+          <a:p>
+            <a:pPr algn="ctr"/>
+          </a:p>
+        </p:txBody>
+      </p:sp>
+      <p:sp>
+        <p:nvSpPr>
+          <p:cNvPr id="4" name="TextBox 3"/>
+          <p:cNvSpPr txBox="1"/>
+          <p:nvPr/>
+        </p:nvSpPr>
+        <p:spPr>
+          <a:xfrm>
+            <a:off x="731520" y="411480"/>
+            <a:ext cx="2926080" cy="365760"/>
+          </a:xfrm>
+          <a:prstGeom prst="rect">
+            <a:avLst/>
+          </a:prstGeom>
+          <a:noFill/>
+        </p:spPr>
+        <p:txBody>
+          <a:bodyPr wrap="square" anchor="t">
+            <a:spAutoFit/>
+          </a:bodyPr>
+          <a:lstStyle/>
+          <a:p>
+            <a:pPr algn="l"/>
+            <a:r>
+              <a:rPr sz="1300" b="1">
+                <a:solidFill>
+                  <a:srgbClr val="0D9488"/>
+                </a:solidFill>
+                <a:latin typeface="Aptos"/>
+              </a:rPr>
+              <a:t>DATA MODEL</a:t>
+            </a:r>
+            <a:endParaRPr sz="1300" b="1">
+              <a:solidFill>
+                <a:srgbClr val="0D9488"/>
+              </a:solidFill>
+              <a:latin typeface="Aptos"/>
+            </a:endParaRPr>
+          </a:p>
+        </p:txBody>
+      </p:sp>
+      <p:sp>
+        <p:nvSpPr>
           <p:cNvPr id="5" name="TextBox 4"/>
           <p:cNvSpPr txBox="1"/>
           <p:nvPr/>
         </p:nvSpPr>
         <p:spPr>
           <a:xfrm>
-            <a:off x="914400" y="1783080"/>
-            <a:ext cx="7315200" cy="4206240"/>
+            <a:off x="731520" y="530352"/>
+            <a:ext cx="8046720" cy="731520"/>
+          </a:xfrm>
+          <a:prstGeom prst="rect">
+            <a:avLst/>
+          </a:prstGeom>
+          <a:noFill/>
+        </p:spPr>
+        <p:txBody>
+          <a:bodyPr wrap="square" anchor="t">
+            <a:spAutoFit/>
+          </a:bodyPr>
+          <a:lstStyle/>
+          <a:p>
+            <a:pPr algn="l"/>
+            <a:r>
+              <a:rPr sz="2800" b="1">
+                <a:solidFill>
+                  <a:srgbClr val="0F172A"/>
+                </a:solidFill>
+                <a:latin typeface="Aptos Display"/>
+              </a:rPr>
+              <a:t>Three core entities support authentication, city metadata, and daily environmental observations</a:t>
+            </a:r>
+            <a:endParaRPr sz="2800" b="1">
+              <a:solidFill>
+                <a:srgbClr val="0F172A"/>
+              </a:solidFill>
+              <a:latin typeface="Aptos Display"/>
+            </a:endParaRPr>
+          </a:p>
+        </p:txBody>
+      </p:sp>
+      <p:sp>
+        <p:nvSpPr>
+          <p:cNvPr id="6" name="TextBox 5"/>
+          <p:cNvSpPr txBox="1"/>
+          <p:nvPr/>
+        </p:nvSpPr>
+        <p:spPr>
+          <a:xfrm>
+            <a:off x="749808" y="1366647"/>
+            <a:ext cx="7863840" cy="502920"/>
+          </a:xfrm>
+          <a:prstGeom prst="rect">
+            <a:avLst/>
+          </a:prstGeom>
+          <a:noFill/>
+        </p:spPr>
+        <p:txBody>
+          <a:bodyPr wrap="square" anchor="t">
+            <a:spAutoFit/>
+          </a:bodyPr>
+          <a:lstStyle/>
+          <a:p>
+            <a:pPr algn="l"/>
+            <a:r>
+              <a:rPr sz="1400" b="0">
+                <a:solidFill>
+                  <a:srgbClr val="64748B"/>
+                </a:solidFill>
+                <a:latin typeface="Aptos"/>
+              </a:rPr>
+              <a:t>The schema is simple enough for coursework, but structured enough to support real analytical queries.</a:t>
+            </a:r>
+            <a:endParaRPr sz="1400" b="0">
+              <a:solidFill>
+                <a:srgbClr val="64748B"/>
+              </a:solidFill>
+              <a:latin typeface="Aptos"/>
+            </a:endParaRPr>
+          </a:p>
+        </p:txBody>
+      </p:sp>
+      <p:sp>
+        <p:nvSpPr>
+          <p:cNvPr id="7" name="Rounded Rectangle 6"/>
+          <p:cNvSpPr/>
+          <p:nvPr/>
+        </p:nvSpPr>
+        <p:spPr>
+          <a:xfrm>
+            <a:off x="731520" y="2011680"/>
+            <a:ext cx="2423160" cy="3017520"/>
+          </a:xfrm>
+          <a:prstGeom prst="roundRect">
+            <a:avLst/>
+          </a:prstGeom>
+          <a:solidFill>
+            <a:srgbClr val="DBEAFE"/>
+          </a:solidFill>
+          <a:ln w="19050">
+            <a:solidFill>
+              <a:srgbClr val="2563EB"/>
+            </a:solidFill>
+          </a:ln>
+        </p:spPr>
+        <p:style>
+          <a:lnRef idx="1">
+            <a:schemeClr val="accent1"/>
+          </a:lnRef>
+          <a:fillRef idx="3">
+            <a:schemeClr val="accent1"/>
+          </a:fillRef>
+          <a:effectRef idx="2">
+            <a:schemeClr val="accent1"/>
+          </a:effectRef>
+          <a:fontRef idx="minor">
+            <a:schemeClr val="lt1"/>
+          </a:fontRef>
+        </p:style>
+        <p:txBody>
+          <a:bodyPr rtlCol="0" anchor="ctr"/>
+          <a:lstStyle/>
+          <a:p>
+            <a:pPr algn="ctr"/>
+          </a:p>
+        </p:txBody>
+      </p:sp>
+      <p:sp>
+        <p:nvSpPr>
+          <p:cNvPr id="8" name="TextBox 7"/>
+          <p:cNvSpPr txBox="1"/>
+          <p:nvPr/>
+        </p:nvSpPr>
+        <p:spPr>
+          <a:xfrm>
+            <a:off x="932688" y="2212848"/>
+            <a:ext cx="1828800" cy="320040"/>
+          </a:xfrm>
+          <a:prstGeom prst="rect">
+            <a:avLst/>
+          </a:prstGeom>
+          <a:noFill/>
+        </p:spPr>
+        <p:txBody>
+          <a:bodyPr wrap="square" anchor="t">
+            <a:spAutoFit/>
+          </a:bodyPr>
+          <a:lstStyle/>
+          <a:p>
+            <a:pPr algn="l"/>
+            <a:r>
+              <a:rPr sz="2200" b="1">
+                <a:solidFill>
+                  <a:srgbClr val="0F172A"/>
+                </a:solidFill>
+                <a:latin typeface="Aptos Display"/>
+              </a:rPr>
+              <a:t>User</a:t>
+            </a:r>
+            <a:endParaRPr sz="2200" b="1">
+              <a:solidFill>
+                <a:srgbClr val="0F172A"/>
+              </a:solidFill>
+              <a:latin typeface="Aptos Display"/>
+            </a:endParaRPr>
+          </a:p>
+        </p:txBody>
+      </p:sp>
+      <p:sp>
+        <p:nvSpPr>
+          <p:cNvPr id="9" name="TextBox 8"/>
+          <p:cNvSpPr txBox="1"/>
+          <p:nvPr/>
+        </p:nvSpPr>
+        <p:spPr>
+          <a:xfrm>
+            <a:off x="932688" y="2670048"/>
+            <a:ext cx="1874519" cy="1508760"/>
           </a:xfrm>
           <a:prstGeom prst="rect">
             <a:avLst/>
@@ -4209,47 +6263,723 @@
           <a:p>
             <a:pPr>
               <a:spcAft>
-                <a:spcPts val="1000"/>
+                <a:spcPts val="800"/>
               </a:spcAft>
-              <a:defRPr sz="2100">
+              <a:defRPr sz="1400">
                 <a:solidFill>
                   <a:srgbClr val="0F172A"/>
                 </a:solidFill>
+                <a:latin typeface="Aptos"/>
               </a:defRPr>
             </a:pPr>
             <a:r>
-              <a:t>Core models: User, City, UrbanClimateRecord.</a:t>
+              <a:t>id</a:t>
             </a:r>
           </a:p>
           <a:p>
             <a:pPr>
               <a:spcAft>
-                <a:spcPts val="1000"/>
+                <a:spcPts val="800"/>
               </a:spcAft>
-              <a:defRPr sz="1900">
+              <a:defRPr sz="1400">
                 <a:solidFill>
                   <a:srgbClr val="0F172A"/>
                 </a:solidFill>
+                <a:latin typeface="Aptos"/>
               </a:defRPr>
             </a:pPr>
             <a:r>
-              <a:t>CRUD endpoints: /auth, /cities, /records.</a:t>
+              <a:t>username</a:t>
             </a:r>
           </a:p>
           <a:p>
             <a:pPr>
               <a:spcAft>
-                <a:spcPts val="1000"/>
+                <a:spcPts val="800"/>
               </a:spcAft>
-              <a:defRPr sz="1900">
+              <a:defRPr sz="1400">
                 <a:solidFill>
                   <a:srgbClr val="0F172A"/>
                 </a:solidFill>
+                <a:latin typeface="Aptos"/>
               </a:defRPr>
             </a:pPr>
             <a:r>
-              <a:t>Advanced endpoints: /imports/cities/{id}/historical, /analytics/summary, /analytics/compare, /analytics/anomalies.</a:t>
-            </a:r>
+              <a:t>email</a:t>
+            </a:r>
+          </a:p>
+          <a:p>
+            <a:pPr>
+              <a:spcAft>
+                <a:spcPts val="800"/>
+              </a:spcAft>
+              <a:defRPr sz="1400">
+                <a:solidFill>
+                  <a:srgbClr val="0F172A"/>
+                </a:solidFill>
+                <a:latin typeface="Aptos"/>
+              </a:defRPr>
+            </a:pPr>
+            <a:r>
+              <a:t>hashed_password</a:t>
+            </a:r>
+          </a:p>
+          <a:p>
+            <a:pPr>
+              <a:spcAft>
+                <a:spcPts val="800"/>
+              </a:spcAft>
+              <a:defRPr sz="1400">
+                <a:solidFill>
+                  <a:srgbClr val="0F172A"/>
+                </a:solidFill>
+                <a:latin typeface="Aptos"/>
+              </a:defRPr>
+            </a:pPr>
+            <a:r>
+              <a:t>is_active</a:t>
+            </a:r>
+          </a:p>
+          <a:p>
+            <a:pPr>
+              <a:spcAft>
+                <a:spcPts val="800"/>
+              </a:spcAft>
+              <a:defRPr sz="1400">
+                <a:solidFill>
+                  <a:srgbClr val="0F172A"/>
+                </a:solidFill>
+                <a:latin typeface="Aptos"/>
+              </a:defRPr>
+            </a:pPr>
+            <a:r>
+              <a:t>created_at</a:t>
+            </a:r>
+          </a:p>
+        </p:txBody>
+      </p:sp>
+      <p:sp>
+        <p:nvSpPr>
+          <p:cNvPr id="10" name="TextBox 9"/>
+          <p:cNvSpPr txBox="1"/>
+          <p:nvPr/>
+        </p:nvSpPr>
+        <p:spPr>
+          <a:xfrm>
+            <a:off x="932688" y="4407408"/>
+            <a:ext cx="1874519" cy="411480"/>
+          </a:xfrm>
+          <a:prstGeom prst="rect">
+            <a:avLst/>
+          </a:prstGeom>
+          <a:noFill/>
+        </p:spPr>
+        <p:txBody>
+          <a:bodyPr wrap="square" anchor="t">
+            <a:spAutoFit/>
+          </a:bodyPr>
+          <a:lstStyle/>
+          <a:p>
+            <a:pPr algn="l"/>
+            <a:r>
+              <a:rPr sz="1200" b="0">
+                <a:solidFill>
+                  <a:srgbClr val="334155"/>
+                </a:solidFill>
+                <a:latin typeface="Aptos"/>
+              </a:rPr>
+              <a:t>Used for registration, login, and protected write access.</a:t>
+            </a:r>
+            <a:endParaRPr sz="1200" b="0">
+              <a:solidFill>
+                <a:srgbClr val="334155"/>
+              </a:solidFill>
+              <a:latin typeface="Aptos"/>
+            </a:endParaRPr>
+          </a:p>
+        </p:txBody>
+      </p:sp>
+      <p:sp>
+        <p:nvSpPr>
+          <p:cNvPr id="11" name="Rounded Rectangle 10"/>
+          <p:cNvSpPr/>
+          <p:nvPr/>
+        </p:nvSpPr>
+        <p:spPr>
+          <a:xfrm>
+            <a:off x="3657600" y="1874519"/>
+            <a:ext cx="2743200" cy="3246120"/>
+          </a:xfrm>
+          <a:prstGeom prst="roundRect">
+            <a:avLst/>
+          </a:prstGeom>
+          <a:solidFill>
+            <a:srgbClr val="CCFBF1"/>
+          </a:solidFill>
+          <a:ln w="19050">
+            <a:solidFill>
+              <a:srgbClr val="0D9488"/>
+            </a:solidFill>
+          </a:ln>
+        </p:spPr>
+        <p:style>
+          <a:lnRef idx="1">
+            <a:schemeClr val="accent1"/>
+          </a:lnRef>
+          <a:fillRef idx="3">
+            <a:schemeClr val="accent1"/>
+          </a:fillRef>
+          <a:effectRef idx="2">
+            <a:schemeClr val="accent1"/>
+          </a:effectRef>
+          <a:fontRef idx="minor">
+            <a:schemeClr val="lt1"/>
+          </a:fontRef>
+        </p:style>
+        <p:txBody>
+          <a:bodyPr rtlCol="0" anchor="ctr"/>
+          <a:lstStyle/>
+          <a:p>
+            <a:pPr algn="ctr"/>
+          </a:p>
+        </p:txBody>
+      </p:sp>
+      <p:sp>
+        <p:nvSpPr>
+          <p:cNvPr id="12" name="TextBox 11"/>
+          <p:cNvSpPr txBox="1"/>
+          <p:nvPr/>
+        </p:nvSpPr>
+        <p:spPr>
+          <a:xfrm>
+            <a:off x="3858768" y="2084831"/>
+            <a:ext cx="2103120" cy="320040"/>
+          </a:xfrm>
+          <a:prstGeom prst="rect">
+            <a:avLst/>
+          </a:prstGeom>
+          <a:noFill/>
+        </p:spPr>
+        <p:txBody>
+          <a:bodyPr wrap="square" anchor="t">
+            <a:spAutoFit/>
+          </a:bodyPr>
+          <a:lstStyle/>
+          <a:p>
+            <a:pPr algn="l"/>
+            <a:r>
+              <a:rPr sz="2200" b="1">
+                <a:solidFill>
+                  <a:srgbClr val="0F172A"/>
+                </a:solidFill>
+                <a:latin typeface="Aptos Display"/>
+              </a:rPr>
+              <a:t>City</a:t>
+            </a:r>
+            <a:endParaRPr sz="2200" b="1">
+              <a:solidFill>
+                <a:srgbClr val="0F172A"/>
+              </a:solidFill>
+              <a:latin typeface="Aptos Display"/>
+            </a:endParaRPr>
+          </a:p>
+        </p:txBody>
+      </p:sp>
+      <p:sp>
+        <p:nvSpPr>
+          <p:cNvPr id="13" name="TextBox 12"/>
+          <p:cNvSpPr txBox="1"/>
+          <p:nvPr/>
+        </p:nvSpPr>
+        <p:spPr>
+          <a:xfrm>
+            <a:off x="3858768" y="2542032"/>
+            <a:ext cx="2103120" cy="1737360"/>
+          </a:xfrm>
+          <a:prstGeom prst="rect">
+            <a:avLst/>
+          </a:prstGeom>
+          <a:noFill/>
+        </p:spPr>
+        <p:txBody>
+          <a:bodyPr wrap="square">
+            <a:spAutoFit/>
+          </a:bodyPr>
+          <a:lstStyle/>
+          <a:p>
+            <a:pPr>
+              <a:spcAft>
+                <a:spcPts val="800"/>
+              </a:spcAft>
+              <a:defRPr sz="1400">
+                <a:solidFill>
+                  <a:srgbClr val="0F172A"/>
+                </a:solidFill>
+                <a:latin typeface="Aptos"/>
+              </a:defRPr>
+            </a:pPr>
+            <a:r>
+              <a:t>id, name, country_code</a:t>
+            </a:r>
+          </a:p>
+          <a:p>
+            <a:pPr>
+              <a:spcAft>
+                <a:spcPts val="800"/>
+              </a:spcAft>
+              <a:defRPr sz="1400">
+                <a:solidFill>
+                  <a:srgbClr val="0F172A"/>
+                </a:solidFill>
+                <a:latin typeface="Aptos"/>
+              </a:defRPr>
+            </a:pPr>
+            <a:r>
+              <a:t>region</a:t>
+            </a:r>
+          </a:p>
+          <a:p>
+            <a:pPr>
+              <a:spcAft>
+                <a:spcPts val="800"/>
+              </a:spcAft>
+              <a:defRPr sz="1400">
+                <a:solidFill>
+                  <a:srgbClr val="0F172A"/>
+                </a:solidFill>
+                <a:latin typeface="Aptos"/>
+              </a:defRPr>
+            </a:pPr>
+            <a:r>
+              <a:t>latitude, longitude</a:t>
+            </a:r>
+          </a:p>
+          <a:p>
+            <a:pPr>
+              <a:spcAft>
+                <a:spcPts val="800"/>
+              </a:spcAft>
+              <a:defRPr sz="1400">
+                <a:solidFill>
+                  <a:srgbClr val="0F172A"/>
+                </a:solidFill>
+                <a:latin typeface="Aptos"/>
+              </a:defRPr>
+            </a:pPr>
+            <a:r>
+              <a:t>timezone</a:t>
+            </a:r>
+          </a:p>
+          <a:p>
+            <a:pPr>
+              <a:spcAft>
+                <a:spcPts val="800"/>
+              </a:spcAft>
+              <a:defRPr sz="1400">
+                <a:solidFill>
+                  <a:srgbClr val="0F172A"/>
+                </a:solidFill>
+                <a:latin typeface="Aptos"/>
+              </a:defRPr>
+            </a:pPr>
+            <a:r>
+              <a:t>source</a:t>
+            </a:r>
+          </a:p>
+          <a:p>
+            <a:pPr>
+              <a:spcAft>
+                <a:spcPts val="800"/>
+              </a:spcAft>
+              <a:defRPr sz="1400">
+                <a:solidFill>
+                  <a:srgbClr val="0F172A"/>
+                </a:solidFill>
+                <a:latin typeface="Aptos"/>
+              </a:defRPr>
+            </a:pPr>
+            <a:r>
+              <a:t>created_at, updated_at</a:t>
+            </a:r>
+          </a:p>
+        </p:txBody>
+      </p:sp>
+      <p:sp>
+        <p:nvSpPr>
+          <p:cNvPr id="14" name="TextBox 13"/>
+          <p:cNvSpPr txBox="1"/>
+          <p:nvPr/>
+        </p:nvSpPr>
+        <p:spPr>
+          <a:xfrm>
+            <a:off x="3858768" y="4617720"/>
+            <a:ext cx="2194560" cy="347472"/>
+          </a:xfrm>
+          <a:prstGeom prst="rect">
+            <a:avLst/>
+          </a:prstGeom>
+          <a:noFill/>
+        </p:spPr>
+        <p:txBody>
+          <a:bodyPr wrap="square" anchor="t">
+            <a:spAutoFit/>
+          </a:bodyPr>
+          <a:lstStyle/>
+          <a:p>
+            <a:pPr algn="l"/>
+            <a:r>
+              <a:rPr sz="1200" b="1">
+                <a:solidFill>
+                  <a:srgbClr val="0D9488"/>
+                </a:solidFill>
+                <a:latin typeface="Aptos"/>
+              </a:rPr>
+              <a:t>Unique: (name, country_code)</a:t>
+            </a:r>
+            <a:endParaRPr sz="1200" b="1">
+              <a:solidFill>
+                <a:srgbClr val="0D9488"/>
+              </a:solidFill>
+              <a:latin typeface="Aptos"/>
+            </a:endParaRPr>
+          </a:p>
+        </p:txBody>
+      </p:sp>
+      <p:sp>
+        <p:nvSpPr>
+          <p:cNvPr id="15" name="Rounded Rectangle 14"/>
+          <p:cNvSpPr/>
+          <p:nvPr/>
+        </p:nvSpPr>
+        <p:spPr>
+          <a:xfrm>
+            <a:off x="6903720" y="1645920"/>
+            <a:ext cx="3657600" cy="3474720"/>
+          </a:xfrm>
+          <a:prstGeom prst="roundRect">
+            <a:avLst/>
+          </a:prstGeom>
+          <a:solidFill>
+            <a:srgbClr val="FFEDD5"/>
+          </a:solidFill>
+          <a:ln w="19050">
+            <a:solidFill>
+              <a:srgbClr val="F97316"/>
+            </a:solidFill>
+          </a:ln>
+        </p:spPr>
+        <p:style>
+          <a:lnRef idx="1">
+            <a:schemeClr val="accent1"/>
+          </a:lnRef>
+          <a:fillRef idx="3">
+            <a:schemeClr val="accent1"/>
+          </a:fillRef>
+          <a:effectRef idx="2">
+            <a:schemeClr val="accent1"/>
+          </a:effectRef>
+          <a:fontRef idx="minor">
+            <a:schemeClr val="lt1"/>
+          </a:fontRef>
+        </p:style>
+        <p:txBody>
+          <a:bodyPr rtlCol="0" anchor="ctr"/>
+          <a:lstStyle/>
+          <a:p>
+            <a:pPr algn="ctr"/>
+          </a:p>
+        </p:txBody>
+      </p:sp>
+      <p:sp>
+        <p:nvSpPr>
+          <p:cNvPr id="16" name="TextBox 15"/>
+          <p:cNvSpPr txBox="1"/>
+          <p:nvPr/>
+        </p:nvSpPr>
+        <p:spPr>
+          <a:xfrm>
+            <a:off x="7132320" y="1874519"/>
+            <a:ext cx="2926080" cy="320040"/>
+          </a:xfrm>
+          <a:prstGeom prst="rect">
+            <a:avLst/>
+          </a:prstGeom>
+          <a:noFill/>
+        </p:spPr>
+        <p:txBody>
+          <a:bodyPr wrap="square" anchor="t">
+            <a:spAutoFit/>
+          </a:bodyPr>
+          <a:lstStyle/>
+          <a:p>
+            <a:pPr algn="l"/>
+            <a:r>
+              <a:rPr sz="2200" b="1">
+                <a:solidFill>
+                  <a:srgbClr val="0F172A"/>
+                </a:solidFill>
+                <a:latin typeface="Aptos Display"/>
+              </a:rPr>
+              <a:t>UrbanClimateRecord</a:t>
+            </a:r>
+            <a:endParaRPr sz="2200" b="1">
+              <a:solidFill>
+                <a:srgbClr val="0F172A"/>
+              </a:solidFill>
+              <a:latin typeface="Aptos Display"/>
+            </a:endParaRPr>
+          </a:p>
+        </p:txBody>
+      </p:sp>
+      <p:sp>
+        <p:nvSpPr>
+          <p:cNvPr id="17" name="TextBox 16"/>
+          <p:cNvSpPr txBox="1"/>
+          <p:nvPr/>
+        </p:nvSpPr>
+        <p:spPr>
+          <a:xfrm>
+            <a:off x="7150608" y="2286000"/>
+            <a:ext cx="2743200" cy="2011680"/>
+          </a:xfrm>
+          <a:prstGeom prst="rect">
+            <a:avLst/>
+          </a:prstGeom>
+          <a:noFill/>
+        </p:spPr>
+        <p:txBody>
+          <a:bodyPr wrap="square">
+            <a:spAutoFit/>
+          </a:bodyPr>
+          <a:lstStyle/>
+          <a:p>
+            <a:pPr>
+              <a:spcAft>
+                <a:spcPts val="800"/>
+              </a:spcAft>
+              <a:defRPr sz="1400">
+                <a:solidFill>
+                  <a:srgbClr val="0F172A"/>
+                </a:solidFill>
+                <a:latin typeface="Aptos"/>
+              </a:defRPr>
+            </a:pPr>
+            <a:r>
+              <a:t>id, city_id, record_date</a:t>
+            </a:r>
+          </a:p>
+          <a:p>
+            <a:pPr>
+              <a:spcAft>
+                <a:spcPts val="800"/>
+              </a:spcAft>
+              <a:defRPr sz="1400">
+                <a:solidFill>
+                  <a:srgbClr val="0F172A"/>
+                </a:solidFill>
+                <a:latin typeface="Aptos"/>
+              </a:defRPr>
+            </a:pPr>
+            <a:r>
+              <a:t>temperature_max_c / min_c</a:t>
+            </a:r>
+          </a:p>
+          <a:p>
+            <a:pPr>
+              <a:spcAft>
+                <a:spcPts val="800"/>
+              </a:spcAft>
+              <a:defRPr sz="1400">
+                <a:solidFill>
+                  <a:srgbClr val="0F172A"/>
+                </a:solidFill>
+                <a:latin typeface="Aptos"/>
+              </a:defRPr>
+            </a:pPr>
+            <a:r>
+              <a:t>precipitation_sum_mm</a:t>
+            </a:r>
+          </a:p>
+          <a:p>
+            <a:pPr>
+              <a:spcAft>
+                <a:spcPts val="800"/>
+              </a:spcAft>
+              <a:defRPr sz="1400">
+                <a:solidFill>
+                  <a:srgbClr val="0F172A"/>
+                </a:solidFill>
+                <a:latin typeface="Aptos"/>
+              </a:defRPr>
+            </a:pPr>
+            <a:r>
+              <a:t>wind_speed_max_kmh</a:t>
+            </a:r>
+          </a:p>
+          <a:p>
+            <a:pPr>
+              <a:spcAft>
+                <a:spcPts val="800"/>
+              </a:spcAft>
+              <a:defRPr sz="1400">
+                <a:solidFill>
+                  <a:srgbClr val="0F172A"/>
+                </a:solidFill>
+                <a:latin typeface="Aptos"/>
+              </a:defRPr>
+            </a:pPr>
+            <a:r>
+              <a:t>pm2_5, pm10</a:t>
+            </a:r>
+          </a:p>
+          <a:p>
+            <a:pPr>
+              <a:spcAft>
+                <a:spcPts val="800"/>
+              </a:spcAft>
+              <a:defRPr sz="1400">
+                <a:solidFill>
+                  <a:srgbClr val="0F172A"/>
+                </a:solidFill>
+                <a:latin typeface="Aptos"/>
+              </a:defRPr>
+            </a:pPr>
+            <a:r>
+              <a:t>nitrogen_dioxide, ozone</a:t>
+            </a:r>
+          </a:p>
+          <a:p>
+            <a:pPr>
+              <a:spcAft>
+                <a:spcPts val="800"/>
+              </a:spcAft>
+              <a:defRPr sz="1400">
+                <a:solidFill>
+                  <a:srgbClr val="0F172A"/>
+                </a:solidFill>
+                <a:latin typeface="Aptos"/>
+              </a:defRPr>
+            </a:pPr>
+            <a:r>
+              <a:t>european_aqi, source</a:t>
+            </a:r>
+          </a:p>
+        </p:txBody>
+      </p:sp>
+      <p:sp>
+        <p:nvSpPr>
+          <p:cNvPr id="18" name="TextBox 17"/>
+          <p:cNvSpPr txBox="1"/>
+          <p:nvPr/>
+        </p:nvSpPr>
+        <p:spPr>
+          <a:xfrm>
+            <a:off x="7150608" y="4645152"/>
+            <a:ext cx="2834640" cy="347472"/>
+          </a:xfrm>
+          <a:prstGeom prst="rect">
+            <a:avLst/>
+          </a:prstGeom>
+          <a:noFill/>
+        </p:spPr>
+        <p:txBody>
+          <a:bodyPr wrap="square" anchor="t">
+            <a:spAutoFit/>
+          </a:bodyPr>
+          <a:lstStyle/>
+          <a:p>
+            <a:pPr algn="l"/>
+            <a:r>
+              <a:rPr sz="1200" b="1">
+                <a:solidFill>
+                  <a:srgbClr val="F97316"/>
+                </a:solidFill>
+                <a:latin typeface="Aptos"/>
+              </a:rPr>
+              <a:t>Unique: (city_id, record_date)</a:t>
+            </a:r>
+            <a:endParaRPr sz="1200" b="1">
+              <a:solidFill>
+                <a:srgbClr val="F97316"/>
+              </a:solidFill>
+              <a:latin typeface="Aptos"/>
+            </a:endParaRPr>
+          </a:p>
+        </p:txBody>
+      </p:sp>
+      <p:cxnSp>
+        <p:nvCxnSpPr>
+          <p:cNvPr id="19" name="Connector 18"/>
+          <p:cNvCxnSpPr/>
+          <p:nvPr/>
+        </p:nvCxnSpPr>
+        <p:spPr>
+          <a:xfrm>
+            <a:off x="6400800" y="3108960"/>
+            <a:ext cx="502920" cy="0"/>
+          </a:xfrm>
+          <a:prstGeom prst="line">
+            <a:avLst/>
+          </a:prstGeom>
+          <a:ln w="30480">
+            <a:solidFill>
+              <a:srgbClr val="334155"/>
+            </a:solidFill>
+          </a:ln>
+        </p:spPr>
+        <p:style>
+          <a:lnRef idx="2">
+            <a:schemeClr val="accent1"/>
+          </a:lnRef>
+          <a:fillRef idx="0">
+            <a:schemeClr val="accent1"/>
+          </a:fillRef>
+          <a:effectRef idx="1">
+            <a:schemeClr val="accent1"/>
+          </a:effectRef>
+          <a:fontRef idx="minor">
+            <a:schemeClr val="tx1"/>
+          </a:fontRef>
+        </p:style>
+      </p:cxnSp>
+      <p:sp>
+        <p:nvSpPr>
+          <p:cNvPr id="20" name="TextBox 19"/>
+          <p:cNvSpPr txBox="1"/>
+          <p:nvPr/>
+        </p:nvSpPr>
+        <p:spPr>
+          <a:xfrm>
+            <a:off x="6172200" y="2816352"/>
+            <a:ext cx="640080" cy="228600"/>
+          </a:xfrm>
+          <a:prstGeom prst="rect">
+            <a:avLst/>
+          </a:prstGeom>
+          <a:noFill/>
+        </p:spPr>
+        <p:txBody>
+          <a:bodyPr wrap="square" anchor="t">
+            <a:spAutoFit/>
+          </a:bodyPr>
+          <a:lstStyle/>
+          <a:p>
+            <a:pPr algn="l"/>
+            <a:r>
+              <a:rPr sz="1300" b="1">
+                <a:solidFill>
+                  <a:srgbClr val="334155"/>
+                </a:solidFill>
+                <a:latin typeface="Aptos"/>
+              </a:rPr>
+              <a:t>1 → *</a:t>
+            </a:r>
+            <a:endParaRPr sz="1300" b="1">
+              <a:solidFill>
+                <a:srgbClr val="334155"/>
+              </a:solidFill>
+              <a:latin typeface="Aptos"/>
+            </a:endParaRPr>
           </a:p>
         </p:txBody>
       </p:sp>
@@ -4262,7 +6992,7 @@
 </file>
 
 <file path=ppt/slides/slide5.xml><?xml version="1.0" encoding="utf-8"?>
-<p:sld xmlns:a="http://schemas.openxmlformats.org/drawingml/2006/main" xmlns:p="http://schemas.openxmlformats.org/presentationml/2006/main" xmlns:r="http://schemas.openxmlformats.org/officeDocument/2006/relationships">
+<p:sld xmlns:a="http://schemas.openxmlformats.org/drawingml/2006/main" xmlns:r="http://schemas.openxmlformats.org/officeDocument/2006/relationships" xmlns:p="http://schemas.openxmlformats.org/presentationml/2006/main">
   <p:cSld>
     <p:spTree>
       <p:nvGrpSpPr>
@@ -4273,92 +7003,23 @@
       <p:grpSpPr/>
       <p:sp>
         <p:nvSpPr>
-          <p:cNvPr id="2" name="TextBox 1"/>
-          <p:cNvSpPr txBox="1"/>
-          <p:nvPr/>
-        </p:nvSpPr>
-        <p:spPr>
-          <a:xfrm>
-            <a:off x="640080" y="548640"/>
-            <a:ext cx="7772400" cy="1005840"/>
+          <p:cNvPr id="2" name="Rectangle 1"/>
+          <p:cNvSpPr/>
+          <p:nvPr/>
+        </p:nvSpPr>
+        <p:spPr>
+          <a:xfrm>
+            <a:off x="0" y="0"/>
+            <a:ext cx="12191695" cy="6858000"/>
           </a:xfrm>
           <a:prstGeom prst="rect">
             <a:avLst/>
           </a:prstGeom>
-          <a:noFill/>
-        </p:spPr>
-        <p:txBody>
-          <a:bodyPr wrap="none">
-            <a:spAutoFit/>
-          </a:bodyPr>
-          <a:lstStyle/>
-          <a:p>
-            <a:pPr>
-              <a:defRPr sz="2800" b="1">
-                <a:solidFill>
-                  <a:srgbClr val="0F172A"/>
-                </a:solidFill>
-              </a:defRPr>
-            </a:pPr>
-            <a:r>
-              <a:t>Security, Validation, and Errors</a:t>
-            </a:r>
-          </a:p>
-        </p:txBody>
-      </p:sp>
-      <p:sp>
-        <p:nvSpPr>
-          <p:cNvPr id="3" name="TextBox 2"/>
-          <p:cNvSpPr txBox="1"/>
-          <p:nvPr/>
-        </p:nvSpPr>
-        <p:spPr>
-          <a:xfrm>
-            <a:off x="685800" y="1417320"/>
-            <a:ext cx="7315200" cy="731520"/>
-          </a:xfrm>
-          <a:prstGeom prst="rect">
-            <a:avLst/>
-          </a:prstGeom>
-          <a:noFill/>
-        </p:spPr>
-        <p:txBody>
-          <a:bodyPr wrap="none">
-            <a:spAutoFit/>
-          </a:bodyPr>
-          <a:lstStyle/>
-          <a:p>
-            <a:pPr>
-              <a:defRPr sz="1300">
-                <a:solidFill>
-                  <a:srgbClr val="334155"/>
-                </a:solidFill>
-              </a:defRPr>
-            </a:pPr>
-          </a:p>
-        </p:txBody>
-      </p:sp>
-      <p:sp>
-        <p:nvSpPr>
-          <p:cNvPr id="4" name="Rounded Rectangle 3"/>
-          <p:cNvSpPr/>
-          <p:nvPr/>
-        </p:nvSpPr>
-        <p:spPr>
-          <a:xfrm>
-            <a:off x="640080" y="1463040"/>
-            <a:ext cx="7863840" cy="4754880"/>
-          </a:xfrm>
-          <a:prstGeom prst="roundRect">
-            <a:avLst/>
-          </a:prstGeom>
           <a:solidFill>
-            <a:srgbClr val="F1F5F9"/>
+            <a:srgbClr val="FFFFFF"/>
           </a:solidFill>
           <a:ln>
-            <a:solidFill>
-              <a:srgbClr val="0D9488"/>
-            </a:solidFill>
+            <a:noFill/>
           </a:ln>
         </p:spPr>
         <p:style>
@@ -4385,14 +7046,320 @@
       </p:sp>
       <p:sp>
         <p:nvSpPr>
+          <p:cNvPr id="3" name="TextBox 2"/>
+          <p:cNvSpPr txBox="1"/>
+          <p:nvPr/>
+        </p:nvSpPr>
+        <p:spPr>
+          <a:xfrm>
+            <a:off x="731520" y="411480"/>
+            <a:ext cx="2926080" cy="365760"/>
+          </a:xfrm>
+          <a:prstGeom prst="rect">
+            <a:avLst/>
+          </a:prstGeom>
+          <a:noFill/>
+        </p:spPr>
+        <p:txBody>
+          <a:bodyPr wrap="square" anchor="t">
+            <a:spAutoFit/>
+          </a:bodyPr>
+          <a:lstStyle/>
+          <a:p>
+            <a:pPr algn="l"/>
+            <a:r>
+              <a:rPr sz="1300" b="1">
+                <a:solidFill>
+                  <a:srgbClr val="0D9488"/>
+                </a:solidFill>
+                <a:latin typeface="Aptos"/>
+              </a:rPr>
+              <a:t>LIVE DOCUMENTATION</a:t>
+            </a:r>
+            <a:endParaRPr sz="1300" b="1">
+              <a:solidFill>
+                <a:srgbClr val="0D9488"/>
+              </a:solidFill>
+              <a:latin typeface="Aptos"/>
+            </a:endParaRPr>
+          </a:p>
+        </p:txBody>
+      </p:sp>
+      <p:sp>
+        <p:nvSpPr>
+          <p:cNvPr id="4" name="TextBox 3"/>
+          <p:cNvSpPr txBox="1"/>
+          <p:nvPr/>
+        </p:nvSpPr>
+        <p:spPr>
+          <a:xfrm>
+            <a:off x="731520" y="713232"/>
+            <a:ext cx="8046720" cy="731520"/>
+          </a:xfrm>
+          <a:prstGeom prst="rect">
+            <a:avLst/>
+          </a:prstGeom>
+          <a:noFill/>
+        </p:spPr>
+        <p:txBody>
+          <a:bodyPr wrap="square" anchor="t">
+            <a:spAutoFit/>
+          </a:bodyPr>
+          <a:lstStyle/>
+          <a:p>
+            <a:pPr algn="l"/>
+            <a:r>
+              <a:rPr sz="2800" b="1">
+                <a:solidFill>
+                  <a:srgbClr val="0F172A"/>
+                </a:solidFill>
+                <a:latin typeface="Aptos Display"/>
+              </a:rPr>
+              <a:t>Swagger UI makes the API easy to demonstrate and inspect</a:t>
+            </a:r>
+            <a:endParaRPr sz="2800" b="1">
+              <a:solidFill>
+                <a:srgbClr val="0F172A"/>
+              </a:solidFill>
+              <a:latin typeface="Aptos Display"/>
+            </a:endParaRPr>
+          </a:p>
+        </p:txBody>
+      </p:sp>
+      <p:sp>
+        <p:nvSpPr>
           <p:cNvPr id="5" name="TextBox 4"/>
           <p:cNvSpPr txBox="1"/>
           <p:nvPr/>
         </p:nvSpPr>
         <p:spPr>
           <a:xfrm>
-            <a:off x="914400" y="1783080"/>
-            <a:ext cx="7315200" cy="4206240"/>
+            <a:off x="731393" y="1499362"/>
+            <a:ext cx="7863840" cy="502920"/>
+          </a:xfrm>
+          <a:prstGeom prst="rect">
+            <a:avLst/>
+          </a:prstGeom>
+          <a:noFill/>
+        </p:spPr>
+        <p:txBody>
+          <a:bodyPr wrap="square" anchor="t">
+            <a:spAutoFit/>
+          </a:bodyPr>
+          <a:lstStyle/>
+          <a:p>
+            <a:pPr algn="l"/>
+            <a:r>
+              <a:rPr sz="1400" b="0">
+                <a:solidFill>
+                  <a:srgbClr val="64748B"/>
+                </a:solidFill>
+                <a:latin typeface="Aptos"/>
+              </a:rPr>
+              <a:t>The interactive docs helped during development and will also be used directly in the oral exam.</a:t>
+            </a:r>
+            <a:endParaRPr sz="1400" b="0">
+              <a:solidFill>
+                <a:srgbClr val="64748B"/>
+              </a:solidFill>
+              <a:latin typeface="Aptos"/>
+            </a:endParaRPr>
+          </a:p>
+        </p:txBody>
+      </p:sp>
+      <p:sp>
+        <p:nvSpPr>
+          <p:cNvPr id="6" name="Rounded Rectangle 5"/>
+          <p:cNvSpPr/>
+          <p:nvPr/>
+        </p:nvSpPr>
+        <p:spPr>
+          <a:xfrm>
+            <a:off x="777240" y="1828800"/>
+            <a:ext cx="7132320" cy="4160520"/>
+          </a:xfrm>
+          <a:prstGeom prst="roundRect">
+            <a:avLst/>
+          </a:prstGeom>
+          <a:solidFill>
+            <a:srgbClr val="FFFFFF"/>
+          </a:solidFill>
+          <a:ln w="19050">
+            <a:solidFill>
+              <a:srgbClr val="0D9488"/>
+            </a:solidFill>
+          </a:ln>
+        </p:spPr>
+        <p:style>
+          <a:lnRef idx="1">
+            <a:schemeClr val="accent1"/>
+          </a:lnRef>
+          <a:fillRef idx="3">
+            <a:schemeClr val="accent1"/>
+          </a:fillRef>
+          <a:effectRef idx="2">
+            <a:schemeClr val="accent1"/>
+          </a:effectRef>
+          <a:fontRef idx="minor">
+            <a:schemeClr val="lt1"/>
+          </a:fontRef>
+        </p:style>
+        <p:txBody>
+          <a:bodyPr rtlCol="0" anchor="ctr"/>
+          <a:lstStyle/>
+          <a:p>
+            <a:pPr algn="ctr"/>
+          </a:p>
+        </p:txBody>
+      </p:sp>
+      <p:pic>
+        <p:nvPicPr>
+          <p:cNvPr id="7" name="Picture 6" descr="docsassetsswagger-ui2.png"/>
+          <p:cNvPicPr>
+            <a:picLocks noChangeAspect="1"/>
+          </p:cNvPicPr>
+          <p:nvPr/>
+        </p:nvPicPr>
+        <p:blipFill>
+          <a:blip r:embed="rId1"/>
+          <a:stretch>
+            <a:fillRect/>
+          </a:stretch>
+        </p:blipFill>
+        <p:spPr>
+          <a:xfrm>
+            <a:off x="886968" y="2057314"/>
+            <a:ext cx="6912864" cy="3703491"/>
+          </a:xfrm>
+          <a:prstGeom prst="rect">
+            <a:avLst/>
+          </a:prstGeom>
+        </p:spPr>
+      </p:pic>
+      <p:sp>
+        <p:nvSpPr>
+          <p:cNvPr id="8" name="Rounded Rectangle 7"/>
+          <p:cNvSpPr/>
+          <p:nvPr/>
+        </p:nvSpPr>
+        <p:spPr>
+          <a:xfrm>
+            <a:off x="8183879" y="1965960"/>
+            <a:ext cx="3154680" cy="2377440"/>
+          </a:xfrm>
+          <a:prstGeom prst="roundRect">
+            <a:avLst/>
+          </a:prstGeom>
+          <a:solidFill>
+            <a:srgbClr val="FFFFFF"/>
+          </a:solidFill>
+          <a:ln w="19050">
+            <a:solidFill>
+              <a:srgbClr val="F97316"/>
+            </a:solidFill>
+          </a:ln>
+        </p:spPr>
+        <p:style>
+          <a:lnRef idx="1">
+            <a:schemeClr val="accent1"/>
+          </a:lnRef>
+          <a:fillRef idx="3">
+            <a:schemeClr val="accent1"/>
+          </a:fillRef>
+          <a:effectRef idx="2">
+            <a:schemeClr val="accent1"/>
+          </a:effectRef>
+          <a:fontRef idx="minor">
+            <a:schemeClr val="lt1"/>
+          </a:fontRef>
+        </p:style>
+        <p:txBody>
+          <a:bodyPr rtlCol="0" anchor="ctr"/>
+          <a:lstStyle/>
+          <a:p>
+            <a:pPr algn="ctr"/>
+          </a:p>
+        </p:txBody>
+      </p:sp>
+      <p:pic>
+        <p:nvPicPr>
+          <p:cNvPr id="9" name="Picture 8" descr="docsassetsswagger-auth.png"/>
+          <p:cNvPicPr>
+            <a:picLocks noChangeAspect="1"/>
+          </p:cNvPicPr>
+          <p:nvPr/>
+        </p:nvPicPr>
+        <p:blipFill>
+          <a:blip r:embed="rId2"/>
+          <a:stretch>
+            <a:fillRect/>
+          </a:stretch>
+        </p:blipFill>
+        <p:spPr>
+          <a:xfrm>
+            <a:off x="8315902" y="2075688"/>
+            <a:ext cx="2890632" cy="2157984"/>
+          </a:xfrm>
+          <a:prstGeom prst="rect">
+            <a:avLst/>
+          </a:prstGeom>
+        </p:spPr>
+      </p:pic>
+      <p:sp>
+        <p:nvSpPr>
+          <p:cNvPr id="10" name="Rounded Rectangle 9"/>
+          <p:cNvSpPr/>
+          <p:nvPr/>
+        </p:nvSpPr>
+        <p:spPr>
+          <a:xfrm>
+            <a:off x="8183879" y="4572000"/>
+            <a:ext cx="3154680" cy="1417320"/>
+          </a:xfrm>
+          <a:prstGeom prst="roundRect">
+            <a:avLst/>
+          </a:prstGeom>
+          <a:solidFill>
+            <a:srgbClr val="F8FAFC"/>
+          </a:solidFill>
+          <a:ln w="19050">
+            <a:solidFill>
+              <a:srgbClr val="E2E8F0"/>
+            </a:solidFill>
+          </a:ln>
+        </p:spPr>
+        <p:style>
+          <a:lnRef idx="1">
+            <a:schemeClr val="accent1"/>
+          </a:lnRef>
+          <a:fillRef idx="3">
+            <a:schemeClr val="accent1"/>
+          </a:fillRef>
+          <a:effectRef idx="2">
+            <a:schemeClr val="accent1"/>
+          </a:effectRef>
+          <a:fontRef idx="minor">
+            <a:schemeClr val="lt1"/>
+          </a:fontRef>
+        </p:style>
+        <p:txBody>
+          <a:bodyPr rtlCol="0" anchor="ctr"/>
+          <a:lstStyle/>
+          <a:p>
+            <a:pPr algn="ctr"/>
+          </a:p>
+        </p:txBody>
+      </p:sp>
+      <p:sp>
+        <p:nvSpPr>
+          <p:cNvPr id="11" name="TextBox 10"/>
+          <p:cNvSpPr txBox="1"/>
+          <p:nvPr/>
+        </p:nvSpPr>
+        <p:spPr>
+          <a:xfrm>
+            <a:off x="8394192" y="4773168"/>
+            <a:ext cx="2743200" cy="1005840"/>
           </a:xfrm>
           <a:prstGeom prst="rect">
             <a:avLst/>
@@ -4407,46 +7374,49 @@
           <a:p>
             <a:pPr>
               <a:spcAft>
-                <a:spcPts val="1000"/>
+                <a:spcPts val="800"/>
               </a:spcAft>
-              <a:defRPr sz="2100">
+              <a:defRPr sz="1400">
                 <a:solidFill>
                   <a:srgbClr val="0F172A"/>
                 </a:solidFill>
+                <a:latin typeface="Aptos"/>
               </a:defRPr>
             </a:pPr>
             <a:r>
-              <a:t>JWT bearer authentication protects all write operations.</a:t>
+              <a:t>Interactive endpoint testing</a:t>
             </a:r>
           </a:p>
           <a:p>
             <a:pPr>
               <a:spcAft>
-                <a:spcPts val="1000"/>
+                <a:spcPts val="800"/>
               </a:spcAft>
-              <a:defRPr sz="1900">
+              <a:defRPr sz="1400">
                 <a:solidFill>
                   <a:srgbClr val="0F172A"/>
                 </a:solidFill>
+                <a:latin typeface="Aptos"/>
               </a:defRPr>
             </a:pPr>
             <a:r>
-              <a:t>Pydantic validation enforces field ranges, date logic, and temperature consistency.</a:t>
+              <a:t>JWT login through Authorize</a:t>
             </a:r>
           </a:p>
           <a:p>
             <a:pPr>
               <a:spcAft>
-                <a:spcPts val="1000"/>
+                <a:spcPts val="800"/>
               </a:spcAft>
-              <a:defRPr sz="1900">
+              <a:defRPr sz="1400">
                 <a:solidFill>
                   <a:srgbClr val="0F172A"/>
                 </a:solidFill>
+                <a:latin typeface="Aptos"/>
               </a:defRPr>
             </a:pPr>
             <a:r>
-              <a:t>HTTP status codes follow convention: 201 created, 204 deleted, 401 unauthorised, 404 not found, 409 conflict, 502 upstream failure.</a:t>
+              <a:t>OpenAPI schema export included</a:t>
             </a:r>
           </a:p>
         </p:txBody>
@@ -4460,7 +7430,7 @@
 </file>
 
 <file path=ppt/slides/slide6.xml><?xml version="1.0" encoding="utf-8"?>
-<p:sld xmlns:a="http://schemas.openxmlformats.org/drawingml/2006/main" xmlns:p="http://schemas.openxmlformats.org/presentationml/2006/main" xmlns:r="http://schemas.openxmlformats.org/officeDocument/2006/relationships">
+<p:sld xmlns:a="http://schemas.openxmlformats.org/drawingml/2006/main" xmlns:r="http://schemas.openxmlformats.org/officeDocument/2006/relationships" xmlns:p="http://schemas.openxmlformats.org/presentationml/2006/main">
   <p:cSld>
     <p:spTree>
       <p:nvGrpSpPr>
@@ -4471,92 +7441,23 @@
       <p:grpSpPr/>
       <p:sp>
         <p:nvSpPr>
-          <p:cNvPr id="2" name="TextBox 1"/>
-          <p:cNvSpPr txBox="1"/>
-          <p:nvPr/>
-        </p:nvSpPr>
-        <p:spPr>
-          <a:xfrm>
-            <a:off x="640080" y="548640"/>
-            <a:ext cx="7772400" cy="1005840"/>
+          <p:cNvPr id="2" name="Rectangle 1"/>
+          <p:cNvSpPr/>
+          <p:nvPr/>
+        </p:nvSpPr>
+        <p:spPr>
+          <a:xfrm>
+            <a:off x="0" y="0"/>
+            <a:ext cx="12191695" cy="6858000"/>
           </a:xfrm>
           <a:prstGeom prst="rect">
             <a:avLst/>
           </a:prstGeom>
-          <a:noFill/>
-        </p:spPr>
-        <p:txBody>
-          <a:bodyPr wrap="none">
-            <a:spAutoFit/>
-          </a:bodyPr>
-          <a:lstStyle/>
-          <a:p>
-            <a:pPr>
-              <a:defRPr sz="2800" b="1">
-                <a:solidFill>
-                  <a:srgbClr val="0F172A"/>
-                </a:solidFill>
-              </a:defRPr>
-            </a:pPr>
-            <a:r>
-              <a:t>Documentation, Testing, and Version Control</a:t>
-            </a:r>
-          </a:p>
-        </p:txBody>
-      </p:sp>
-      <p:sp>
-        <p:nvSpPr>
-          <p:cNvPr id="3" name="TextBox 2"/>
-          <p:cNvSpPr txBox="1"/>
-          <p:nvPr/>
-        </p:nvSpPr>
-        <p:spPr>
-          <a:xfrm>
-            <a:off x="685800" y="1417320"/>
-            <a:ext cx="7315200" cy="731520"/>
-          </a:xfrm>
-          <a:prstGeom prst="rect">
-            <a:avLst/>
-          </a:prstGeom>
-          <a:noFill/>
-        </p:spPr>
-        <p:txBody>
-          <a:bodyPr wrap="none">
-            <a:spAutoFit/>
-          </a:bodyPr>
-          <a:lstStyle/>
-          <a:p>
-            <a:pPr>
-              <a:defRPr sz="1300">
-                <a:solidFill>
-                  <a:srgbClr val="334155"/>
-                </a:solidFill>
-              </a:defRPr>
-            </a:pPr>
-          </a:p>
-        </p:txBody>
-      </p:sp>
-      <p:sp>
-        <p:nvSpPr>
-          <p:cNvPr id="4" name="Rounded Rectangle 3"/>
-          <p:cNvSpPr/>
-          <p:nvPr/>
-        </p:nvSpPr>
-        <p:spPr>
-          <a:xfrm>
-            <a:off x="640080" y="1463040"/>
-            <a:ext cx="7863840" cy="4754880"/>
-          </a:xfrm>
-          <a:prstGeom prst="roundRect">
-            <a:avLst/>
-          </a:prstGeom>
           <a:solidFill>
-            <a:srgbClr val="F1F5F9"/>
+            <a:srgbClr val="F8FAFC"/>
           </a:solidFill>
           <a:ln>
-            <a:solidFill>
-              <a:srgbClr val="F97316"/>
-            </a:solidFill>
+            <a:noFill/>
           </a:ln>
         </p:spPr>
         <p:style>
@@ -4583,14 +7484,473 @@
       </p:sp>
       <p:sp>
         <p:nvSpPr>
+          <p:cNvPr id="3" name="Oval 2"/>
+          <p:cNvSpPr/>
+          <p:nvPr/>
+        </p:nvSpPr>
+        <p:spPr>
+          <a:xfrm>
+            <a:off x="9875520" y="4937760"/>
+            <a:ext cx="2011680" cy="2011680"/>
+          </a:xfrm>
+          <a:prstGeom prst="ellipse">
+            <a:avLst/>
+          </a:prstGeom>
+          <a:solidFill>
+            <a:srgbClr val="FFEDD5"/>
+          </a:solidFill>
+          <a:ln>
+            <a:noFill/>
+          </a:ln>
+        </p:spPr>
+        <p:style>
+          <a:lnRef idx="1">
+            <a:schemeClr val="accent1"/>
+          </a:lnRef>
+          <a:fillRef idx="3">
+            <a:schemeClr val="accent1"/>
+          </a:fillRef>
+          <a:effectRef idx="2">
+            <a:schemeClr val="accent1"/>
+          </a:effectRef>
+          <a:fontRef idx="minor">
+            <a:schemeClr val="lt1"/>
+          </a:fontRef>
+        </p:style>
+        <p:txBody>
+          <a:bodyPr rtlCol="0" anchor="ctr"/>
+          <a:lstStyle/>
+          <a:p>
+            <a:pPr algn="ctr"/>
+          </a:p>
+        </p:txBody>
+      </p:sp>
+      <p:sp>
+        <p:nvSpPr>
+          <p:cNvPr id="4" name="TextBox 3"/>
+          <p:cNvSpPr txBox="1"/>
+          <p:nvPr/>
+        </p:nvSpPr>
+        <p:spPr>
+          <a:xfrm>
+            <a:off x="731520" y="219075"/>
+            <a:ext cx="2926080" cy="365760"/>
+          </a:xfrm>
+          <a:prstGeom prst="rect">
+            <a:avLst/>
+          </a:prstGeom>
+          <a:noFill/>
+        </p:spPr>
+        <p:txBody>
+          <a:bodyPr wrap="square" anchor="t">
+            <a:spAutoFit/>
+          </a:bodyPr>
+          <a:lstStyle/>
+          <a:p>
+            <a:pPr algn="l"/>
+            <a:r>
+              <a:rPr sz="1300" b="1">
+                <a:solidFill>
+                  <a:srgbClr val="0D9488"/>
+                </a:solidFill>
+                <a:latin typeface="Aptos"/>
+              </a:rPr>
+              <a:t>ANALYTICS OUTPUT</a:t>
+            </a:r>
+            <a:endParaRPr sz="1300" b="1">
+              <a:solidFill>
+                <a:srgbClr val="0D9488"/>
+              </a:solidFill>
+              <a:latin typeface="Aptos"/>
+            </a:endParaRPr>
+          </a:p>
+        </p:txBody>
+      </p:sp>
+      <p:sp>
+        <p:nvSpPr>
           <p:cNvPr id="5" name="TextBox 4"/>
           <p:cNvSpPr txBox="1"/>
           <p:nvPr/>
         </p:nvSpPr>
         <p:spPr>
           <a:xfrm>
-            <a:off x="914400" y="1783080"/>
-            <a:ext cx="7315200" cy="4206240"/>
+            <a:off x="731520" y="391922"/>
+            <a:ext cx="8046720" cy="731520"/>
+          </a:xfrm>
+          <a:prstGeom prst="rect">
+            <a:avLst/>
+          </a:prstGeom>
+          <a:noFill/>
+        </p:spPr>
+        <p:txBody>
+          <a:bodyPr wrap="square" anchor="t">
+            <a:spAutoFit/>
+          </a:bodyPr>
+          <a:lstStyle/>
+          <a:p>
+            <a:pPr algn="l"/>
+            <a:r>
+              <a:rPr sz="2800" b="1">
+                <a:solidFill>
+                  <a:srgbClr val="0F172A"/>
+                </a:solidFill>
+                <a:latin typeface="Aptos Display"/>
+              </a:rPr>
+              <a:t>The API goes beyond CRUD by returning meaningful aggregated insights</a:t>
+            </a:r>
+            <a:endParaRPr sz="2800" b="1">
+              <a:solidFill>
+                <a:srgbClr val="0F172A"/>
+              </a:solidFill>
+              <a:latin typeface="Aptos Display"/>
+            </a:endParaRPr>
+          </a:p>
+        </p:txBody>
+      </p:sp>
+      <p:sp>
+        <p:nvSpPr>
+          <p:cNvPr id="6" name="TextBox 5"/>
+          <p:cNvSpPr txBox="1"/>
+          <p:nvPr/>
+        </p:nvSpPr>
+        <p:spPr>
+          <a:xfrm>
+            <a:off x="749808" y="1353312"/>
+            <a:ext cx="7863840" cy="502920"/>
+          </a:xfrm>
+          <a:prstGeom prst="rect">
+            <a:avLst/>
+          </a:prstGeom>
+          <a:noFill/>
+        </p:spPr>
+        <p:txBody>
+          <a:bodyPr wrap="square" anchor="t">
+            <a:spAutoFit/>
+          </a:bodyPr>
+          <a:lstStyle/>
+          <a:p>
+            <a:pPr algn="l"/>
+            <a:r>
+              <a:rPr sz="1400" b="0">
+                <a:solidFill>
+                  <a:srgbClr val="64748B"/>
+                </a:solidFill>
+                <a:latin typeface="Aptos"/>
+              </a:rPr>
+              <a:t>These screenshots show real outputs from the seeded Leeds data rather than manually mocked examples.</a:t>
+            </a:r>
+            <a:endParaRPr sz="1400" b="0">
+              <a:solidFill>
+                <a:srgbClr val="64748B"/>
+              </a:solidFill>
+              <a:latin typeface="Aptos"/>
+            </a:endParaRPr>
+          </a:p>
+        </p:txBody>
+      </p:sp>
+      <p:sp>
+        <p:nvSpPr>
+          <p:cNvPr id="7" name="Rounded Rectangle 6"/>
+          <p:cNvSpPr/>
+          <p:nvPr/>
+        </p:nvSpPr>
+        <p:spPr>
+          <a:xfrm>
+            <a:off x="749935" y="1874520"/>
+            <a:ext cx="5784850" cy="4800600"/>
+          </a:xfrm>
+          <a:prstGeom prst="roundRect">
+            <a:avLst/>
+          </a:prstGeom>
+          <a:solidFill>
+            <a:srgbClr val="FFFFFF"/>
+          </a:solidFill>
+          <a:ln w="19050">
+            <a:solidFill>
+              <a:srgbClr val="F97316"/>
+            </a:solidFill>
+          </a:ln>
+        </p:spPr>
+        <p:style>
+          <a:lnRef idx="1">
+            <a:schemeClr val="accent1"/>
+          </a:lnRef>
+          <a:fillRef idx="3">
+            <a:schemeClr val="accent1"/>
+          </a:fillRef>
+          <a:effectRef idx="2">
+            <a:schemeClr val="accent1"/>
+          </a:effectRef>
+          <a:fontRef idx="minor">
+            <a:schemeClr val="lt1"/>
+          </a:fontRef>
+        </p:style>
+        <p:txBody>
+          <a:bodyPr rtlCol="0" anchor="ctr"/>
+          <a:lstStyle/>
+          <a:p>
+            <a:pPr algn="ctr"/>
+          </a:p>
+        </p:txBody>
+      </p:sp>
+      <p:pic>
+        <p:nvPicPr>
+          <p:cNvPr id="8" name="Picture 7" descr="docsassetsanalytics-summary3.png"/>
+          <p:cNvPicPr>
+            <a:picLocks noChangeAspect="1"/>
+          </p:cNvPicPr>
+          <p:nvPr/>
+        </p:nvPicPr>
+        <p:blipFill>
+          <a:blip r:embed="rId1"/>
+          <a:stretch>
+            <a:fillRect/>
+          </a:stretch>
+        </p:blipFill>
+        <p:spPr>
+          <a:xfrm>
+            <a:off x="906780" y="1984375"/>
+            <a:ext cx="5598160" cy="4231005"/>
+          </a:xfrm>
+          <a:prstGeom prst="rect">
+            <a:avLst/>
+          </a:prstGeom>
+        </p:spPr>
+      </p:pic>
+      <p:sp>
+        <p:nvSpPr>
+          <p:cNvPr id="9" name="Rounded Rectangle 8"/>
+          <p:cNvSpPr/>
+          <p:nvPr/>
+        </p:nvSpPr>
+        <p:spPr>
+          <a:xfrm>
+            <a:off x="6675120" y="1874519"/>
+            <a:ext cx="2194560" cy="1572768"/>
+          </a:xfrm>
+          <a:prstGeom prst="roundRect">
+            <a:avLst/>
+          </a:prstGeom>
+          <a:solidFill>
+            <a:srgbClr val="FFFFFF"/>
+          </a:solidFill>
+          <a:ln w="19050">
+            <a:solidFill>
+              <a:srgbClr val="0D9488"/>
+            </a:solidFill>
+          </a:ln>
+        </p:spPr>
+        <p:style>
+          <a:lnRef idx="1">
+            <a:schemeClr val="accent1"/>
+          </a:lnRef>
+          <a:fillRef idx="3">
+            <a:schemeClr val="accent1"/>
+          </a:fillRef>
+          <a:effectRef idx="2">
+            <a:schemeClr val="accent1"/>
+          </a:effectRef>
+          <a:fontRef idx="minor">
+            <a:schemeClr val="lt1"/>
+          </a:fontRef>
+        </p:style>
+        <p:txBody>
+          <a:bodyPr rtlCol="0" anchor="ctr"/>
+          <a:lstStyle/>
+          <a:p>
+            <a:pPr algn="ctr"/>
+          </a:p>
+        </p:txBody>
+      </p:sp>
+      <p:pic>
+        <p:nvPicPr>
+          <p:cNvPr id="10" name="Picture 9" descr="docsassetsanalytics-summary1.png"/>
+          <p:cNvPicPr>
+            <a:picLocks noChangeAspect="1"/>
+          </p:cNvPicPr>
+          <p:nvPr/>
+        </p:nvPicPr>
+        <p:blipFill>
+          <a:blip r:embed="rId2"/>
+          <a:stretch>
+            <a:fillRect/>
+          </a:stretch>
+        </p:blipFill>
+        <p:spPr>
+          <a:xfrm>
+            <a:off x="6784848" y="2086180"/>
+            <a:ext cx="1975104" cy="1149445"/>
+          </a:xfrm>
+          <a:prstGeom prst="rect">
+            <a:avLst/>
+          </a:prstGeom>
+        </p:spPr>
+      </p:pic>
+      <p:sp>
+        <p:nvSpPr>
+          <p:cNvPr id="11" name="Rounded Rectangle 10"/>
+          <p:cNvSpPr/>
+          <p:nvPr/>
+        </p:nvSpPr>
+        <p:spPr>
+          <a:xfrm>
+            <a:off x="9098280" y="1874519"/>
+            <a:ext cx="2194560" cy="1572768"/>
+          </a:xfrm>
+          <a:prstGeom prst="roundRect">
+            <a:avLst/>
+          </a:prstGeom>
+          <a:solidFill>
+            <a:srgbClr val="FFFFFF"/>
+          </a:solidFill>
+          <a:ln w="19050">
+            <a:solidFill>
+              <a:srgbClr val="0D9488"/>
+            </a:solidFill>
+          </a:ln>
+        </p:spPr>
+        <p:style>
+          <a:lnRef idx="1">
+            <a:schemeClr val="accent1"/>
+          </a:lnRef>
+          <a:fillRef idx="3">
+            <a:schemeClr val="accent1"/>
+          </a:fillRef>
+          <a:effectRef idx="2">
+            <a:schemeClr val="accent1"/>
+          </a:effectRef>
+          <a:fontRef idx="minor">
+            <a:schemeClr val="lt1"/>
+          </a:fontRef>
+        </p:style>
+        <p:txBody>
+          <a:bodyPr rtlCol="0" anchor="ctr"/>
+          <a:lstStyle/>
+          <a:p>
+            <a:pPr algn="ctr"/>
+          </a:p>
+        </p:txBody>
+      </p:sp>
+      <p:pic>
+        <p:nvPicPr>
+          <p:cNvPr id="12" name="Picture 11" descr="docsassetsanalytics-summary2.png"/>
+          <p:cNvPicPr>
+            <a:picLocks noChangeAspect="1"/>
+          </p:cNvPicPr>
+          <p:nvPr/>
+        </p:nvPicPr>
+        <p:blipFill>
+          <a:blip r:embed="rId3"/>
+          <a:stretch>
+            <a:fillRect/>
+          </a:stretch>
+        </p:blipFill>
+        <p:spPr>
+          <a:xfrm>
+            <a:off x="9208008" y="2287253"/>
+            <a:ext cx="1975104" cy="747298"/>
+          </a:xfrm>
+          <a:prstGeom prst="rect">
+            <a:avLst/>
+          </a:prstGeom>
+        </p:spPr>
+      </p:pic>
+      <p:sp>
+        <p:nvSpPr>
+          <p:cNvPr id="13" name="Rounded Rectangle 12"/>
+          <p:cNvSpPr/>
+          <p:nvPr/>
+        </p:nvSpPr>
+        <p:spPr>
+          <a:xfrm>
+            <a:off x="6675120" y="3703320"/>
+            <a:ext cx="4617720" cy="1783715"/>
+          </a:xfrm>
+          <a:prstGeom prst="roundRect">
+            <a:avLst/>
+          </a:prstGeom>
+          <a:solidFill>
+            <a:srgbClr val="FFFFFF"/>
+          </a:solidFill>
+          <a:ln w="19050">
+            <a:solidFill>
+              <a:srgbClr val="E2E8F0"/>
+            </a:solidFill>
+          </a:ln>
+        </p:spPr>
+        <p:style>
+          <a:lnRef idx="1">
+            <a:schemeClr val="accent1"/>
+          </a:lnRef>
+          <a:fillRef idx="3">
+            <a:schemeClr val="accent1"/>
+          </a:fillRef>
+          <a:effectRef idx="2">
+            <a:schemeClr val="accent1"/>
+          </a:effectRef>
+          <a:fontRef idx="minor">
+            <a:schemeClr val="lt1"/>
+          </a:fontRef>
+        </p:style>
+        <p:txBody>
+          <a:bodyPr rtlCol="0" anchor="ctr"/>
+          <a:lstStyle/>
+          <a:p>
+            <a:pPr algn="ctr"/>
+          </a:p>
+        </p:txBody>
+      </p:sp>
+      <p:sp>
+        <p:nvSpPr>
+          <p:cNvPr id="14" name="TextBox 13"/>
+          <p:cNvSpPr txBox="1"/>
+          <p:nvPr/>
+        </p:nvSpPr>
+        <p:spPr>
+          <a:xfrm>
+            <a:off x="6931152" y="3931920"/>
+            <a:ext cx="4114800" cy="292608"/>
+          </a:xfrm>
+          <a:prstGeom prst="rect">
+            <a:avLst/>
+          </a:prstGeom>
+          <a:noFill/>
+        </p:spPr>
+        <p:txBody>
+          <a:bodyPr wrap="square" anchor="t">
+            <a:spAutoFit/>
+          </a:bodyPr>
+          <a:lstStyle/>
+          <a:p>
+            <a:pPr algn="l"/>
+            <a:r>
+              <a:rPr sz="1900" b="1">
+                <a:solidFill>
+                  <a:srgbClr val="0F172A"/>
+                </a:solidFill>
+                <a:latin typeface="Aptos Display"/>
+              </a:rPr>
+              <a:t>What this demonstrates</a:t>
+            </a:r>
+            <a:endParaRPr sz="1900" b="1">
+              <a:solidFill>
+                <a:srgbClr val="0F172A"/>
+              </a:solidFill>
+              <a:latin typeface="Aptos Display"/>
+            </a:endParaRPr>
+          </a:p>
+        </p:txBody>
+      </p:sp>
+      <p:sp>
+        <p:nvSpPr>
+          <p:cNvPr id="15" name="TextBox 14"/>
+          <p:cNvSpPr txBox="1"/>
+          <p:nvPr/>
+        </p:nvSpPr>
+        <p:spPr>
+          <a:xfrm>
+            <a:off x="6949440" y="4297680"/>
+            <a:ext cx="4069080" cy="749808"/>
           </a:xfrm>
           <a:prstGeom prst="rect">
             <a:avLst/>
@@ -4605,61 +7965,33 @@
           <a:p>
             <a:pPr>
               <a:spcAft>
-                <a:spcPts val="1000"/>
+                <a:spcPts val="800"/>
               </a:spcAft>
-              <a:defRPr sz="2100">
+              <a:defRPr sz="1400">
                 <a:solidFill>
                   <a:srgbClr val="0F172A"/>
                 </a:solidFill>
+                <a:latin typeface="Aptos"/>
               </a:defRPr>
             </a:pPr>
             <a:r>
-              <a:t>Swagger UI and exported OpenAPI schema document the live API.</a:t>
+              <a:t>Summary endpoint returns averaged metrics and the hottest day.</a:t>
             </a:r>
           </a:p>
           <a:p>
             <a:pPr>
               <a:spcAft>
-                <a:spcPts val="1000"/>
+                <a:spcPts val="800"/>
               </a:spcAft>
-              <a:defRPr sz="1900">
+              <a:defRPr sz="1400">
                 <a:solidFill>
                   <a:srgbClr val="0F172A"/>
                 </a:solidFill>
+                <a:latin typeface="Aptos"/>
               </a:defRPr>
             </a:pPr>
             <a:r>
-              <a:t>Pytest covers authentication, CRUD, and analytics behaviour.</a:t>
-            </a:r>
-          </a:p>
-          <a:p>
-            <a:pPr>
-              <a:spcAft>
-                <a:spcPts val="1000"/>
-              </a:spcAft>
-              <a:defRPr sz="1900">
-                <a:solidFill>
-                  <a:srgbClr val="0F172A"/>
-                </a:solidFill>
-              </a:defRPr>
-            </a:pPr>
-            <a:r>
-              <a:t>Technical report highlights stack choice, testing, limitations, and declared GenAI usage.</a:t>
-            </a:r>
-          </a:p>
-          <a:p>
-            <a:pPr>
-              <a:spcAft>
-                <a:spcPts val="1000"/>
-              </a:spcAft>
-              <a:defRPr sz="1900">
-                <a:solidFill>
-                  <a:srgbClr val="0F172A"/>
-                </a:solidFill>
-              </a:defRPr>
-            </a:pPr>
-            <a:r>
-              <a:t>Repository includes README, PDF API docs, PDF technical report, Dockerfile, and generated slide deck.</a:t>
+              <a:t>Outputs are suitable for comparison, dashboarding, and explanation in viva questions.</a:t>
             </a:r>
           </a:p>
         </p:txBody>
@@ -4673,7 +8005,7 @@
 </file>
 
 <file path=ppt/slides/slide7.xml><?xml version="1.0" encoding="utf-8"?>
-<p:sld xmlns:a="http://schemas.openxmlformats.org/drawingml/2006/main" xmlns:p="http://schemas.openxmlformats.org/presentationml/2006/main" xmlns:r="http://schemas.openxmlformats.org/officeDocument/2006/relationships">
+<p:sld xmlns:a="http://schemas.openxmlformats.org/drawingml/2006/main" xmlns:r="http://schemas.openxmlformats.org/officeDocument/2006/relationships" xmlns:p="http://schemas.openxmlformats.org/presentationml/2006/main">
   <p:cSld>
     <p:spTree>
       <p:nvGrpSpPr>
@@ -4684,92 +8016,23 @@
       <p:grpSpPr/>
       <p:sp>
         <p:nvSpPr>
-          <p:cNvPr id="2" name="TextBox 1"/>
-          <p:cNvSpPr txBox="1"/>
-          <p:nvPr/>
-        </p:nvSpPr>
-        <p:spPr>
-          <a:xfrm>
-            <a:off x="640080" y="548640"/>
-            <a:ext cx="7772400" cy="1005840"/>
+          <p:cNvPr id="2" name="Rectangle 1"/>
+          <p:cNvSpPr/>
+          <p:nvPr/>
+        </p:nvSpPr>
+        <p:spPr>
+          <a:xfrm>
+            <a:off x="0" y="0"/>
+            <a:ext cx="12191695" cy="6858000"/>
           </a:xfrm>
           <a:prstGeom prst="rect">
             <a:avLst/>
           </a:prstGeom>
-          <a:noFill/>
-        </p:spPr>
-        <p:txBody>
-          <a:bodyPr wrap="none">
-            <a:spAutoFit/>
-          </a:bodyPr>
-          <a:lstStyle/>
-          <a:p>
-            <a:pPr>
-              <a:defRPr sz="2800" b="1">
-                <a:solidFill>
-                  <a:srgbClr val="0F172A"/>
-                </a:solidFill>
-              </a:defRPr>
-            </a:pPr>
-            <a:r>
-              <a:t>Live Demo Flow</a:t>
-            </a:r>
-          </a:p>
-        </p:txBody>
-      </p:sp>
-      <p:sp>
-        <p:nvSpPr>
-          <p:cNvPr id="3" name="TextBox 2"/>
-          <p:cNvSpPr txBox="1"/>
-          <p:nvPr/>
-        </p:nvSpPr>
-        <p:spPr>
-          <a:xfrm>
-            <a:off x="685800" y="1417320"/>
-            <a:ext cx="7315200" cy="731520"/>
-          </a:xfrm>
-          <a:prstGeom prst="rect">
-            <a:avLst/>
-          </a:prstGeom>
-          <a:noFill/>
-        </p:spPr>
-        <p:txBody>
-          <a:bodyPr wrap="none">
-            <a:spAutoFit/>
-          </a:bodyPr>
-          <a:lstStyle/>
-          <a:p>
-            <a:pPr>
-              <a:defRPr sz="1300">
-                <a:solidFill>
-                  <a:srgbClr val="334155"/>
-                </a:solidFill>
-              </a:defRPr>
-            </a:pPr>
-          </a:p>
-        </p:txBody>
-      </p:sp>
-      <p:sp>
-        <p:nvSpPr>
-          <p:cNvPr id="4" name="Rounded Rectangle 3"/>
-          <p:cNvSpPr/>
-          <p:nvPr/>
-        </p:nvSpPr>
-        <p:spPr>
-          <a:xfrm>
-            <a:off x="640080" y="1463040"/>
-            <a:ext cx="7863840" cy="4754880"/>
-          </a:xfrm>
-          <a:prstGeom prst="roundRect">
-            <a:avLst/>
-          </a:prstGeom>
           <a:solidFill>
-            <a:srgbClr val="F1F5F9"/>
+            <a:srgbClr val="FFFFFF"/>
           </a:solidFill>
           <a:ln>
-            <a:solidFill>
-              <a:srgbClr val="0D9488"/>
-            </a:solidFill>
+            <a:noFill/>
           </a:ln>
         </p:spPr>
         <p:style>
@@ -4796,14 +8059,223 @@
       </p:sp>
       <p:sp>
         <p:nvSpPr>
+          <p:cNvPr id="3" name="TextBox 2"/>
+          <p:cNvSpPr txBox="1"/>
+          <p:nvPr/>
+        </p:nvSpPr>
+        <p:spPr>
+          <a:xfrm>
+            <a:off x="731520" y="411480"/>
+            <a:ext cx="2926080" cy="365760"/>
+          </a:xfrm>
+          <a:prstGeom prst="rect">
+            <a:avLst/>
+          </a:prstGeom>
+          <a:noFill/>
+        </p:spPr>
+        <p:txBody>
+          <a:bodyPr wrap="square" anchor="t">
+            <a:spAutoFit/>
+          </a:bodyPr>
+          <a:lstStyle/>
+          <a:p>
+            <a:pPr algn="l"/>
+            <a:r>
+              <a:rPr sz="1300" b="1">
+                <a:solidFill>
+                  <a:srgbClr val="0D9488"/>
+                </a:solidFill>
+                <a:latin typeface="Aptos"/>
+              </a:rPr>
+              <a:t>QUALITY AND DELIVERABLES</a:t>
+            </a:r>
+            <a:endParaRPr sz="1300" b="1">
+              <a:solidFill>
+                <a:srgbClr val="0D9488"/>
+              </a:solidFill>
+              <a:latin typeface="Aptos"/>
+            </a:endParaRPr>
+          </a:p>
+        </p:txBody>
+      </p:sp>
+      <p:sp>
+        <p:nvSpPr>
+          <p:cNvPr id="4" name="TextBox 3"/>
+          <p:cNvSpPr txBox="1"/>
+          <p:nvPr/>
+        </p:nvSpPr>
+        <p:spPr>
+          <a:xfrm>
+            <a:off x="749935" y="548767"/>
+            <a:ext cx="8046720" cy="731520"/>
+          </a:xfrm>
+          <a:prstGeom prst="rect">
+            <a:avLst/>
+          </a:prstGeom>
+          <a:noFill/>
+        </p:spPr>
+        <p:txBody>
+          <a:bodyPr wrap="square" anchor="t">
+            <a:spAutoFit/>
+          </a:bodyPr>
+          <a:lstStyle/>
+          <a:p>
+            <a:pPr algn="l"/>
+            <a:r>
+              <a:rPr sz="2800" b="1">
+                <a:solidFill>
+                  <a:srgbClr val="0F172A"/>
+                </a:solidFill>
+                <a:latin typeface="Aptos Display"/>
+              </a:rPr>
+              <a:t>The repository includes the materials examiners are expected to inspect</a:t>
+            </a:r>
+            <a:endParaRPr sz="2800" b="1">
+              <a:solidFill>
+                <a:srgbClr val="0F172A"/>
+              </a:solidFill>
+              <a:latin typeface="Aptos Display"/>
+            </a:endParaRPr>
+          </a:p>
+        </p:txBody>
+      </p:sp>
+      <p:sp>
+        <p:nvSpPr>
           <p:cNvPr id="5" name="TextBox 4"/>
           <p:cNvSpPr txBox="1"/>
           <p:nvPr/>
         </p:nvSpPr>
         <p:spPr>
           <a:xfrm>
-            <a:off x="914400" y="1783080"/>
-            <a:ext cx="7315200" cy="4206240"/>
+            <a:off x="749808" y="1353312"/>
+            <a:ext cx="7863840" cy="502920"/>
+          </a:xfrm>
+          <a:prstGeom prst="rect">
+            <a:avLst/>
+          </a:prstGeom>
+          <a:noFill/>
+        </p:spPr>
+        <p:txBody>
+          <a:bodyPr wrap="square" anchor="t">
+            <a:spAutoFit/>
+          </a:bodyPr>
+          <a:lstStyle/>
+          <a:p>
+            <a:pPr algn="l"/>
+            <a:r>
+              <a:rPr sz="1400" b="0">
+                <a:solidFill>
+                  <a:srgbClr val="64748B"/>
+                </a:solidFill>
+                <a:latin typeface="Aptos"/>
+              </a:rPr>
+              <a:t>I prepared the project so the code, documentation, tests, and presentation all point to the same final version.</a:t>
+            </a:r>
+            <a:endParaRPr sz="1400" b="0">
+              <a:solidFill>
+                <a:srgbClr val="64748B"/>
+              </a:solidFill>
+              <a:latin typeface="Aptos"/>
+            </a:endParaRPr>
+          </a:p>
+        </p:txBody>
+      </p:sp>
+      <p:sp>
+        <p:nvSpPr>
+          <p:cNvPr id="6" name="Rounded Rectangle 5"/>
+          <p:cNvSpPr/>
+          <p:nvPr/>
+        </p:nvSpPr>
+        <p:spPr>
+          <a:xfrm>
+            <a:off x="777240" y="1828800"/>
+            <a:ext cx="2514600" cy="1600200"/>
+          </a:xfrm>
+          <a:prstGeom prst="roundRect">
+            <a:avLst/>
+          </a:prstGeom>
+          <a:solidFill>
+            <a:srgbClr val="DBEAFE"/>
+          </a:solidFill>
+          <a:ln w="19050">
+            <a:solidFill>
+              <a:srgbClr val="2563EB"/>
+            </a:solidFill>
+          </a:ln>
+        </p:spPr>
+        <p:style>
+          <a:lnRef idx="1">
+            <a:schemeClr val="accent1"/>
+          </a:lnRef>
+          <a:fillRef idx="3">
+            <a:schemeClr val="accent1"/>
+          </a:fillRef>
+          <a:effectRef idx="2">
+            <a:schemeClr val="accent1"/>
+          </a:effectRef>
+          <a:fontRef idx="minor">
+            <a:schemeClr val="lt1"/>
+          </a:fontRef>
+        </p:style>
+        <p:txBody>
+          <a:bodyPr rtlCol="0" anchor="ctr"/>
+          <a:lstStyle/>
+          <a:p>
+            <a:pPr algn="ctr"/>
+          </a:p>
+        </p:txBody>
+      </p:sp>
+      <p:sp>
+        <p:nvSpPr>
+          <p:cNvPr id="7" name="TextBox 6"/>
+          <p:cNvSpPr txBox="1"/>
+          <p:nvPr/>
+        </p:nvSpPr>
+        <p:spPr>
+          <a:xfrm>
+            <a:off x="987552" y="2084831"/>
+            <a:ext cx="2011680" cy="292608"/>
+          </a:xfrm>
+          <a:prstGeom prst="rect">
+            <a:avLst/>
+          </a:prstGeom>
+          <a:noFill/>
+        </p:spPr>
+        <p:txBody>
+          <a:bodyPr wrap="square" anchor="t">
+            <a:spAutoFit/>
+          </a:bodyPr>
+          <a:lstStyle/>
+          <a:p>
+            <a:pPr algn="l"/>
+            <a:r>
+              <a:rPr sz="2000" b="1">
+                <a:solidFill>
+                  <a:srgbClr val="0F172A"/>
+                </a:solidFill>
+                <a:latin typeface="Aptos Display"/>
+              </a:rPr>
+              <a:t>Version Control</a:t>
+            </a:r>
+            <a:endParaRPr sz="2000" b="1">
+              <a:solidFill>
+                <a:srgbClr val="0F172A"/>
+              </a:solidFill>
+              <a:latin typeface="Aptos Display"/>
+            </a:endParaRPr>
+          </a:p>
+        </p:txBody>
+      </p:sp>
+      <p:sp>
+        <p:nvSpPr>
+          <p:cNvPr id="8" name="TextBox 7"/>
+          <p:cNvSpPr txBox="1"/>
+          <p:nvPr/>
+        </p:nvSpPr>
+        <p:spPr>
+          <a:xfrm>
+            <a:off x="987552" y="2487168"/>
+            <a:ext cx="2011680" cy="640080"/>
           </a:xfrm>
           <a:prstGeom prst="rect">
             <a:avLst/>
@@ -4818,61 +8290,645 @@
           <a:p>
             <a:pPr>
               <a:spcAft>
-                <a:spcPts val="1000"/>
+                <a:spcPts val="800"/>
               </a:spcAft>
-              <a:defRPr sz="2100">
+              <a:defRPr sz="1400">
                 <a:solidFill>
                   <a:srgbClr val="0F172A"/>
                 </a:solidFill>
+                <a:latin typeface="Aptos"/>
               </a:defRPr>
             </a:pPr>
             <a:r>
-              <a:t>1. Start API and open /docs.</a:t>
+              <a:t>Public GitHub repo</a:t>
             </a:r>
           </a:p>
           <a:p>
             <a:pPr>
               <a:spcAft>
-                <a:spcPts val="1000"/>
+                <a:spcPts val="800"/>
               </a:spcAft>
-              <a:defRPr sz="1900">
+              <a:defRPr sz="1400">
                 <a:solidFill>
                   <a:srgbClr val="0F172A"/>
                 </a:solidFill>
+                <a:latin typeface="Aptos"/>
               </a:defRPr>
             </a:pPr>
             <a:r>
-              <a:t>2. Log in with the seeded demo account.</a:t>
+              <a:t>Visible commit history</a:t>
             </a:r>
           </a:p>
           <a:p>
             <a:pPr>
               <a:spcAft>
-                <a:spcPts val="1000"/>
+                <a:spcPts val="800"/>
               </a:spcAft>
-              <a:defRPr sz="1900">
+              <a:defRPr sz="1400">
                 <a:solidFill>
                   <a:srgbClr val="0F172A"/>
                 </a:solidFill>
+                <a:latin typeface="Aptos"/>
               </a:defRPr>
             </a:pPr>
             <a:r>
-              <a:t>3. Show city list, create a record, then run summary and comparison analytics.</a:t>
-            </a:r>
-          </a:p>
+              <a:t>Runnable project state</a:t>
+            </a:r>
+          </a:p>
+        </p:txBody>
+      </p:sp>
+      <p:sp>
+        <p:nvSpPr>
+          <p:cNvPr id="9" name="Rounded Rectangle 8"/>
+          <p:cNvSpPr/>
+          <p:nvPr/>
+        </p:nvSpPr>
+        <p:spPr>
+          <a:xfrm>
+            <a:off x="3502152" y="1828800"/>
+            <a:ext cx="2514600" cy="1600200"/>
+          </a:xfrm>
+          <a:prstGeom prst="roundRect">
+            <a:avLst/>
+          </a:prstGeom>
+          <a:solidFill>
+            <a:srgbClr val="CCFBF1"/>
+          </a:solidFill>
+          <a:ln w="19050">
+            <a:solidFill>
+              <a:srgbClr val="0D9488"/>
+            </a:solidFill>
+          </a:ln>
+        </p:spPr>
+        <p:style>
+          <a:lnRef idx="1">
+            <a:schemeClr val="accent1"/>
+          </a:lnRef>
+          <a:fillRef idx="3">
+            <a:schemeClr val="accent1"/>
+          </a:fillRef>
+          <a:effectRef idx="2">
+            <a:schemeClr val="accent1"/>
+          </a:effectRef>
+          <a:fontRef idx="minor">
+            <a:schemeClr val="lt1"/>
+          </a:fontRef>
+        </p:style>
+        <p:txBody>
+          <a:bodyPr rtlCol="0" anchor="ctr"/>
+          <a:lstStyle/>
+          <a:p>
+            <a:pPr algn="ctr"/>
+          </a:p>
+        </p:txBody>
+      </p:sp>
+      <p:sp>
+        <p:nvSpPr>
+          <p:cNvPr id="10" name="TextBox 9"/>
+          <p:cNvSpPr txBox="1"/>
+          <p:nvPr/>
+        </p:nvSpPr>
+        <p:spPr>
+          <a:xfrm>
+            <a:off x="3712463" y="2084831"/>
+            <a:ext cx="2011680" cy="292608"/>
+          </a:xfrm>
+          <a:prstGeom prst="rect">
+            <a:avLst/>
+          </a:prstGeom>
+          <a:noFill/>
+        </p:spPr>
+        <p:txBody>
+          <a:bodyPr wrap="square" anchor="t">
+            <a:spAutoFit/>
+          </a:bodyPr>
+          <a:lstStyle/>
+          <a:p>
+            <a:pPr algn="l"/>
+            <a:r>
+              <a:rPr sz="2000" b="1">
+                <a:solidFill>
+                  <a:srgbClr val="0F172A"/>
+                </a:solidFill>
+                <a:latin typeface="Aptos Display"/>
+              </a:rPr>
+              <a:t>API Documentation</a:t>
+            </a:r>
+            <a:endParaRPr sz="2000" b="1">
+              <a:solidFill>
+                <a:srgbClr val="0F172A"/>
+              </a:solidFill>
+              <a:latin typeface="Aptos Display"/>
+            </a:endParaRPr>
+          </a:p>
+        </p:txBody>
+      </p:sp>
+      <p:sp>
+        <p:nvSpPr>
+          <p:cNvPr id="11" name="TextBox 10"/>
+          <p:cNvSpPr txBox="1"/>
+          <p:nvPr/>
+        </p:nvSpPr>
+        <p:spPr>
+          <a:xfrm>
+            <a:off x="3712463" y="2487168"/>
+            <a:ext cx="2011680" cy="640080"/>
+          </a:xfrm>
+          <a:prstGeom prst="rect">
+            <a:avLst/>
+          </a:prstGeom>
+          <a:noFill/>
+        </p:spPr>
+        <p:txBody>
+          <a:bodyPr wrap="square">
+            <a:spAutoFit/>
+          </a:bodyPr>
+          <a:lstStyle/>
           <a:p>
             <a:pPr>
               <a:spcAft>
-                <a:spcPts val="1000"/>
+                <a:spcPts val="800"/>
               </a:spcAft>
-              <a:defRPr sz="1900">
+              <a:defRPr sz="1400">
                 <a:solidFill>
                   <a:srgbClr val="0F172A"/>
                 </a:solidFill>
+                <a:latin typeface="Aptos"/>
               </a:defRPr>
             </a:pPr>
             <a:r>
-              <a:t>4. Explain how Open-Meteo import populates 30 days of weather and air-quality data.</a:t>
+              <a:t>Swagger UI</a:t>
+            </a:r>
+          </a:p>
+          <a:p>
+            <a:pPr>
+              <a:spcAft>
+                <a:spcPts val="800"/>
+              </a:spcAft>
+              <a:defRPr sz="1400">
+                <a:solidFill>
+                  <a:srgbClr val="0F172A"/>
+                </a:solidFill>
+                <a:latin typeface="Aptos"/>
+              </a:defRPr>
+            </a:pPr>
+            <a:r>
+              <a:t>OpenAPI JSON export</a:t>
+            </a:r>
+          </a:p>
+          <a:p>
+            <a:pPr>
+              <a:spcAft>
+                <a:spcPts val="800"/>
+              </a:spcAft>
+              <a:defRPr sz="1400">
+                <a:solidFill>
+                  <a:srgbClr val="0F172A"/>
+                </a:solidFill>
+                <a:latin typeface="Aptos"/>
+              </a:defRPr>
+            </a:pPr>
+            <a:r>
+              <a:t>PDF endpoint guide</a:t>
+            </a:r>
+          </a:p>
+        </p:txBody>
+      </p:sp>
+      <p:sp>
+        <p:nvSpPr>
+          <p:cNvPr id="12" name="Rounded Rectangle 11"/>
+          <p:cNvSpPr/>
+          <p:nvPr/>
+        </p:nvSpPr>
+        <p:spPr>
+          <a:xfrm>
+            <a:off x="6236208" y="1828800"/>
+            <a:ext cx="2514600" cy="1600200"/>
+          </a:xfrm>
+          <a:prstGeom prst="roundRect">
+            <a:avLst/>
+          </a:prstGeom>
+          <a:solidFill>
+            <a:srgbClr val="FFEDD5"/>
+          </a:solidFill>
+          <a:ln w="19050">
+            <a:solidFill>
+              <a:srgbClr val="F97316"/>
+            </a:solidFill>
+          </a:ln>
+        </p:spPr>
+        <p:style>
+          <a:lnRef idx="1">
+            <a:schemeClr val="accent1"/>
+          </a:lnRef>
+          <a:fillRef idx="3">
+            <a:schemeClr val="accent1"/>
+          </a:fillRef>
+          <a:effectRef idx="2">
+            <a:schemeClr val="accent1"/>
+          </a:effectRef>
+          <a:fontRef idx="minor">
+            <a:schemeClr val="lt1"/>
+          </a:fontRef>
+        </p:style>
+        <p:txBody>
+          <a:bodyPr rtlCol="0" anchor="ctr"/>
+          <a:lstStyle/>
+          <a:p>
+            <a:pPr algn="ctr"/>
+          </a:p>
+        </p:txBody>
+      </p:sp>
+      <p:sp>
+        <p:nvSpPr>
+          <p:cNvPr id="13" name="TextBox 12"/>
+          <p:cNvSpPr txBox="1"/>
+          <p:nvPr/>
+        </p:nvSpPr>
+        <p:spPr>
+          <a:xfrm>
+            <a:off x="6446520" y="2084831"/>
+            <a:ext cx="2011680" cy="292608"/>
+          </a:xfrm>
+          <a:prstGeom prst="rect">
+            <a:avLst/>
+          </a:prstGeom>
+          <a:noFill/>
+        </p:spPr>
+        <p:txBody>
+          <a:bodyPr wrap="square" anchor="t">
+            <a:spAutoFit/>
+          </a:bodyPr>
+          <a:lstStyle/>
+          <a:p>
+            <a:pPr algn="l"/>
+            <a:r>
+              <a:rPr sz="2000" b="1">
+                <a:solidFill>
+                  <a:srgbClr val="0F172A"/>
+                </a:solidFill>
+                <a:latin typeface="Aptos Display"/>
+              </a:rPr>
+              <a:t>Technical Report</a:t>
+            </a:r>
+            <a:endParaRPr sz="2000" b="1">
+              <a:solidFill>
+                <a:srgbClr val="0F172A"/>
+              </a:solidFill>
+              <a:latin typeface="Aptos Display"/>
+            </a:endParaRPr>
+          </a:p>
+        </p:txBody>
+      </p:sp>
+      <p:sp>
+        <p:nvSpPr>
+          <p:cNvPr id="14" name="TextBox 13"/>
+          <p:cNvSpPr txBox="1"/>
+          <p:nvPr/>
+        </p:nvSpPr>
+        <p:spPr>
+          <a:xfrm>
+            <a:off x="6446520" y="2487168"/>
+            <a:ext cx="2011680" cy="640080"/>
+          </a:xfrm>
+          <a:prstGeom prst="rect">
+            <a:avLst/>
+          </a:prstGeom>
+          <a:noFill/>
+        </p:spPr>
+        <p:txBody>
+          <a:bodyPr wrap="square">
+            <a:spAutoFit/>
+          </a:bodyPr>
+          <a:lstStyle/>
+          <a:p>
+            <a:pPr>
+              <a:spcAft>
+                <a:spcPts val="800"/>
+              </a:spcAft>
+              <a:defRPr sz="1400">
+                <a:solidFill>
+                  <a:srgbClr val="0F172A"/>
+                </a:solidFill>
+                <a:latin typeface="Aptos"/>
+              </a:defRPr>
+            </a:pPr>
+            <a:r>
+              <a:t>Stack justification</a:t>
+            </a:r>
+          </a:p>
+          <a:p>
+            <a:pPr>
+              <a:spcAft>
+                <a:spcPts val="800"/>
+              </a:spcAft>
+              <a:defRPr sz="1400">
+                <a:solidFill>
+                  <a:srgbClr val="0F172A"/>
+                </a:solidFill>
+                <a:latin typeface="Aptos"/>
+              </a:defRPr>
+            </a:pPr>
+            <a:r>
+              <a:t>Testing + limitations</a:t>
+            </a:r>
+          </a:p>
+          <a:p>
+            <a:pPr>
+              <a:spcAft>
+                <a:spcPts val="800"/>
+              </a:spcAft>
+              <a:defRPr sz="1400">
+                <a:solidFill>
+                  <a:srgbClr val="0F172A"/>
+                </a:solidFill>
+                <a:latin typeface="Aptos"/>
+              </a:defRPr>
+            </a:pPr>
+            <a:r>
+              <a:t>GenAI declaration</a:t>
+            </a:r>
+          </a:p>
+        </p:txBody>
+      </p:sp>
+      <p:sp>
+        <p:nvSpPr>
+          <p:cNvPr id="15" name="Rounded Rectangle 14"/>
+          <p:cNvSpPr/>
+          <p:nvPr/>
+        </p:nvSpPr>
+        <p:spPr>
+          <a:xfrm>
+            <a:off x="8961120" y="1828800"/>
+            <a:ext cx="2514600" cy="1600200"/>
+          </a:xfrm>
+          <a:prstGeom prst="roundRect">
+            <a:avLst/>
+          </a:prstGeom>
+          <a:solidFill>
+            <a:srgbClr val="EDE9FE"/>
+          </a:solidFill>
+          <a:ln w="19050">
+            <a:solidFill>
+              <a:srgbClr val="7C3AED"/>
+            </a:solidFill>
+          </a:ln>
+        </p:spPr>
+        <p:style>
+          <a:lnRef idx="1">
+            <a:schemeClr val="accent1"/>
+          </a:lnRef>
+          <a:fillRef idx="3">
+            <a:schemeClr val="accent1"/>
+          </a:fillRef>
+          <a:effectRef idx="2">
+            <a:schemeClr val="accent1"/>
+          </a:effectRef>
+          <a:fontRef idx="minor">
+            <a:schemeClr val="lt1"/>
+          </a:fontRef>
+        </p:style>
+        <p:txBody>
+          <a:bodyPr rtlCol="0" anchor="ctr"/>
+          <a:lstStyle/>
+          <a:p>
+            <a:pPr algn="ctr"/>
+          </a:p>
+        </p:txBody>
+      </p:sp>
+      <p:sp>
+        <p:nvSpPr>
+          <p:cNvPr id="16" name="TextBox 15"/>
+          <p:cNvSpPr txBox="1"/>
+          <p:nvPr/>
+        </p:nvSpPr>
+        <p:spPr>
+          <a:xfrm>
+            <a:off x="9171432" y="2084831"/>
+            <a:ext cx="2011680" cy="292608"/>
+          </a:xfrm>
+          <a:prstGeom prst="rect">
+            <a:avLst/>
+          </a:prstGeom>
+          <a:noFill/>
+        </p:spPr>
+        <p:txBody>
+          <a:bodyPr wrap="square" anchor="t">
+            <a:spAutoFit/>
+          </a:bodyPr>
+          <a:lstStyle/>
+          <a:p>
+            <a:pPr algn="l"/>
+            <a:r>
+              <a:rPr sz="2000" b="1">
+                <a:solidFill>
+                  <a:srgbClr val="0F172A"/>
+                </a:solidFill>
+                <a:latin typeface="Aptos Display"/>
+              </a:rPr>
+              <a:t>Testing</a:t>
+            </a:r>
+            <a:endParaRPr sz="2000" b="1">
+              <a:solidFill>
+                <a:srgbClr val="0F172A"/>
+              </a:solidFill>
+              <a:latin typeface="Aptos Display"/>
+            </a:endParaRPr>
+          </a:p>
+        </p:txBody>
+      </p:sp>
+      <p:sp>
+        <p:nvSpPr>
+          <p:cNvPr id="17" name="TextBox 16"/>
+          <p:cNvSpPr txBox="1"/>
+          <p:nvPr/>
+        </p:nvSpPr>
+        <p:spPr>
+          <a:xfrm>
+            <a:off x="9171432" y="2487168"/>
+            <a:ext cx="2011680" cy="640080"/>
+          </a:xfrm>
+          <a:prstGeom prst="rect">
+            <a:avLst/>
+          </a:prstGeom>
+          <a:noFill/>
+        </p:spPr>
+        <p:txBody>
+          <a:bodyPr wrap="square">
+            <a:spAutoFit/>
+          </a:bodyPr>
+          <a:lstStyle/>
+          <a:p>
+            <a:pPr>
+              <a:spcAft>
+                <a:spcPts val="800"/>
+              </a:spcAft>
+              <a:defRPr sz="1400">
+                <a:solidFill>
+                  <a:srgbClr val="0F172A"/>
+                </a:solidFill>
+                <a:latin typeface="Aptos"/>
+              </a:defRPr>
+            </a:pPr>
+            <a:r>
+              <a:t>Pytest coverage</a:t>
+            </a:r>
+          </a:p>
+          <a:p>
+            <a:pPr>
+              <a:spcAft>
+                <a:spcPts val="800"/>
+              </a:spcAft>
+              <a:defRPr sz="1400">
+                <a:solidFill>
+                  <a:srgbClr val="0F172A"/>
+                </a:solidFill>
+                <a:latin typeface="Aptos"/>
+              </a:defRPr>
+            </a:pPr>
+            <a:r>
+              <a:t>Auth, CRUD, analytics</a:t>
+            </a:r>
+          </a:p>
+          <a:p>
+            <a:pPr>
+              <a:spcAft>
+                <a:spcPts val="800"/>
+              </a:spcAft>
+              <a:defRPr sz="1400">
+                <a:solidFill>
+                  <a:srgbClr val="0F172A"/>
+                </a:solidFill>
+                <a:latin typeface="Aptos"/>
+              </a:defRPr>
+            </a:pPr>
+            <a:r>
+              <a:t>Repeatable local verification</a:t>
+            </a:r>
+          </a:p>
+        </p:txBody>
+      </p:sp>
+      <p:sp>
+        <p:nvSpPr>
+          <p:cNvPr id="18" name="Rounded Rectangle 17"/>
+          <p:cNvSpPr/>
+          <p:nvPr/>
+        </p:nvSpPr>
+        <p:spPr>
+          <a:xfrm>
+            <a:off x="777240" y="3977639"/>
+            <a:ext cx="10698480" cy="1417320"/>
+          </a:xfrm>
+          <a:prstGeom prst="roundRect">
+            <a:avLst/>
+          </a:prstGeom>
+          <a:solidFill>
+            <a:srgbClr val="F8FAFC"/>
+          </a:solidFill>
+          <a:ln w="19050">
+            <a:solidFill>
+              <a:srgbClr val="E2E8F0"/>
+            </a:solidFill>
+          </a:ln>
+        </p:spPr>
+        <p:style>
+          <a:lnRef idx="1">
+            <a:schemeClr val="accent1"/>
+          </a:lnRef>
+          <a:fillRef idx="3">
+            <a:schemeClr val="accent1"/>
+          </a:fillRef>
+          <a:effectRef idx="2">
+            <a:schemeClr val="accent1"/>
+          </a:effectRef>
+          <a:fontRef idx="minor">
+            <a:schemeClr val="lt1"/>
+          </a:fontRef>
+        </p:style>
+        <p:txBody>
+          <a:bodyPr rtlCol="0" anchor="ctr"/>
+          <a:lstStyle/>
+          <a:p>
+            <a:pPr algn="ctr"/>
+          </a:p>
+        </p:txBody>
+      </p:sp>
+      <p:sp>
+        <p:nvSpPr>
+          <p:cNvPr id="19" name="TextBox 18"/>
+          <p:cNvSpPr txBox="1"/>
+          <p:nvPr/>
+        </p:nvSpPr>
+        <p:spPr>
+          <a:xfrm>
+            <a:off x="1005840" y="4206240"/>
+            <a:ext cx="3108960" cy="274320"/>
+          </a:xfrm>
+          <a:prstGeom prst="rect">
+            <a:avLst/>
+          </a:prstGeom>
+          <a:noFill/>
+        </p:spPr>
+        <p:txBody>
+          <a:bodyPr wrap="square" anchor="t">
+            <a:spAutoFit/>
+          </a:bodyPr>
+          <a:lstStyle/>
+          <a:p>
+            <a:pPr algn="l"/>
+            <a:r>
+              <a:rPr sz="2000" b="1">
+                <a:solidFill>
+                  <a:srgbClr val="0F172A"/>
+                </a:solidFill>
+                <a:latin typeface="Aptos Display"/>
+              </a:rPr>
+              <a:t>Deliverables included</a:t>
+            </a:r>
+            <a:endParaRPr sz="2000" b="1">
+              <a:solidFill>
+                <a:srgbClr val="0F172A"/>
+              </a:solidFill>
+              <a:latin typeface="Aptos Display"/>
+            </a:endParaRPr>
+          </a:p>
+        </p:txBody>
+      </p:sp>
+      <p:sp>
+        <p:nvSpPr>
+          <p:cNvPr id="20" name="TextBox 19"/>
+          <p:cNvSpPr txBox="1"/>
+          <p:nvPr/>
+        </p:nvSpPr>
+        <p:spPr>
+          <a:xfrm>
+            <a:off x="1024128" y="4572000"/>
+            <a:ext cx="10149840" cy="594360"/>
+          </a:xfrm>
+          <a:prstGeom prst="rect">
+            <a:avLst/>
+          </a:prstGeom>
+          <a:noFill/>
+        </p:spPr>
+        <p:txBody>
+          <a:bodyPr wrap="square">
+            <a:spAutoFit/>
+          </a:bodyPr>
+          <a:lstStyle/>
+          <a:p>
+            <a:pPr>
+              <a:spcAft>
+                <a:spcPts val="800"/>
+              </a:spcAft>
+              <a:defRPr sz="1500">
+                <a:solidFill>
+                  <a:srgbClr val="0F172A"/>
+                </a:solidFill>
+                <a:latin typeface="Aptos"/>
+              </a:defRPr>
+            </a:pPr>
+            <a:r>
+              <a:t>README, API documentation PDF, technical report PDF, OpenAPI schema export, presentation deck, and reproducible seed script.</a:t>
             </a:r>
           </a:p>
         </p:txBody>
@@ -4886,7 +8942,7 @@
 </file>
 
 <file path=ppt/slides/slide8.xml><?xml version="1.0" encoding="utf-8"?>
-<p:sld xmlns:a="http://schemas.openxmlformats.org/drawingml/2006/main" xmlns:p="http://schemas.openxmlformats.org/presentationml/2006/main" xmlns:r="http://schemas.openxmlformats.org/officeDocument/2006/relationships">
+<p:sld xmlns:a="http://schemas.openxmlformats.org/drawingml/2006/main" xmlns:r="http://schemas.openxmlformats.org/officeDocument/2006/relationships" xmlns:p="http://schemas.openxmlformats.org/presentationml/2006/main">
   <p:cSld>
     <p:spTree>
       <p:nvGrpSpPr>
@@ -4897,92 +8953,23 @@
       <p:grpSpPr/>
       <p:sp>
         <p:nvSpPr>
-          <p:cNvPr id="2" name="TextBox 1"/>
-          <p:cNvSpPr txBox="1"/>
-          <p:nvPr/>
-        </p:nvSpPr>
-        <p:spPr>
-          <a:xfrm>
-            <a:off x="640080" y="548640"/>
-            <a:ext cx="7772400" cy="1005840"/>
+          <p:cNvPr id="2" name="Rectangle 1"/>
+          <p:cNvSpPr/>
+          <p:nvPr/>
+        </p:nvSpPr>
+        <p:spPr>
+          <a:xfrm>
+            <a:off x="0" y="0"/>
+            <a:ext cx="12191695" cy="6858000"/>
           </a:xfrm>
           <a:prstGeom prst="rect">
             <a:avLst/>
           </a:prstGeom>
-          <a:noFill/>
-        </p:spPr>
-        <p:txBody>
-          <a:bodyPr wrap="none">
-            <a:spAutoFit/>
-          </a:bodyPr>
-          <a:lstStyle/>
-          <a:p>
-            <a:pPr>
-              <a:defRPr sz="2800" b="1">
-                <a:solidFill>
-                  <a:srgbClr val="0F172A"/>
-                </a:solidFill>
-              </a:defRPr>
-            </a:pPr>
-            <a:r>
-              <a:t>Reflection and Future Work</a:t>
-            </a:r>
-          </a:p>
-        </p:txBody>
-      </p:sp>
-      <p:sp>
-        <p:nvSpPr>
-          <p:cNvPr id="3" name="TextBox 2"/>
-          <p:cNvSpPr txBox="1"/>
-          <p:nvPr/>
-        </p:nvSpPr>
-        <p:spPr>
-          <a:xfrm>
-            <a:off x="685800" y="1417320"/>
-            <a:ext cx="7315200" cy="731520"/>
-          </a:xfrm>
-          <a:prstGeom prst="rect">
-            <a:avLst/>
-          </a:prstGeom>
-          <a:noFill/>
-        </p:spPr>
-        <p:txBody>
-          <a:bodyPr wrap="none">
-            <a:spAutoFit/>
-          </a:bodyPr>
-          <a:lstStyle/>
-          <a:p>
-            <a:pPr>
-              <a:defRPr sz="1300">
-                <a:solidFill>
-                  <a:srgbClr val="334155"/>
-                </a:solidFill>
-              </a:defRPr>
-            </a:pPr>
-          </a:p>
-        </p:txBody>
-      </p:sp>
-      <p:sp>
-        <p:nvSpPr>
-          <p:cNvPr id="4" name="Rounded Rectangle 3"/>
-          <p:cNvSpPr/>
-          <p:nvPr/>
-        </p:nvSpPr>
-        <p:spPr>
-          <a:xfrm>
-            <a:off x="640080" y="1463040"/>
-            <a:ext cx="7863840" cy="4754880"/>
-          </a:xfrm>
-          <a:prstGeom prst="roundRect">
-            <a:avLst/>
-          </a:prstGeom>
           <a:solidFill>
-            <a:srgbClr val="F1F5F9"/>
+            <a:srgbClr val="F8FAFC"/>
           </a:solidFill>
           <a:ln>
-            <a:solidFill>
-              <a:srgbClr val="F97316"/>
-            </a:solidFill>
+            <a:noFill/>
           </a:ln>
         </p:spPr>
         <p:style>
@@ -5009,14 +8996,223 @@
       </p:sp>
       <p:sp>
         <p:nvSpPr>
+          <p:cNvPr id="3" name="TextBox 2"/>
+          <p:cNvSpPr txBox="1"/>
+          <p:nvPr/>
+        </p:nvSpPr>
+        <p:spPr>
+          <a:xfrm>
+            <a:off x="731520" y="411480"/>
+            <a:ext cx="2926080" cy="365760"/>
+          </a:xfrm>
+          <a:prstGeom prst="rect">
+            <a:avLst/>
+          </a:prstGeom>
+          <a:noFill/>
+        </p:spPr>
+        <p:txBody>
+          <a:bodyPr wrap="square" anchor="t">
+            <a:spAutoFit/>
+          </a:bodyPr>
+          <a:lstStyle/>
+          <a:p>
+            <a:pPr algn="l"/>
+            <a:r>
+              <a:rPr sz="1300" b="1">
+                <a:solidFill>
+                  <a:srgbClr val="0D9488"/>
+                </a:solidFill>
+                <a:latin typeface="Aptos"/>
+              </a:rPr>
+              <a:t>REFLECTION</a:t>
+            </a:r>
+            <a:endParaRPr sz="1300" b="1">
+              <a:solidFill>
+                <a:srgbClr val="0D9488"/>
+              </a:solidFill>
+              <a:latin typeface="Aptos"/>
+            </a:endParaRPr>
+          </a:p>
+        </p:txBody>
+      </p:sp>
+      <p:sp>
+        <p:nvSpPr>
+          <p:cNvPr id="4" name="TextBox 3"/>
+          <p:cNvSpPr txBox="1"/>
+          <p:nvPr/>
+        </p:nvSpPr>
+        <p:spPr>
+          <a:xfrm>
+            <a:off x="731520" y="713232"/>
+            <a:ext cx="8046720" cy="731520"/>
+          </a:xfrm>
+          <a:prstGeom prst="rect">
+            <a:avLst/>
+          </a:prstGeom>
+          <a:noFill/>
+        </p:spPr>
+        <p:txBody>
+          <a:bodyPr wrap="square" anchor="t">
+            <a:spAutoFit/>
+          </a:bodyPr>
+          <a:lstStyle/>
+          <a:p>
+            <a:pPr algn="l"/>
+            <a:r>
+              <a:rPr sz="2800" b="1">
+                <a:solidFill>
+                  <a:srgbClr val="0F172A"/>
+                </a:solidFill>
+                <a:latin typeface="Aptos Display"/>
+              </a:rPr>
+              <a:t>The project is complete for coursework, but it also suggests clear next steps</a:t>
+            </a:r>
+            <a:endParaRPr sz="2800" b="1">
+              <a:solidFill>
+                <a:srgbClr val="0F172A"/>
+              </a:solidFill>
+              <a:latin typeface="Aptos Display"/>
+            </a:endParaRPr>
+          </a:p>
+        </p:txBody>
+      </p:sp>
+      <p:sp>
+        <p:nvSpPr>
           <p:cNvPr id="5" name="TextBox 4"/>
           <p:cNvSpPr txBox="1"/>
           <p:nvPr/>
         </p:nvSpPr>
         <p:spPr>
           <a:xfrm>
-            <a:off x="914400" y="1783080"/>
-            <a:ext cx="7315200" cy="4206240"/>
+            <a:off x="731393" y="1536192"/>
+            <a:ext cx="7863840" cy="502920"/>
+          </a:xfrm>
+          <a:prstGeom prst="rect">
+            <a:avLst/>
+          </a:prstGeom>
+          <a:noFill/>
+        </p:spPr>
+        <p:txBody>
+          <a:bodyPr wrap="square" anchor="t">
+            <a:spAutoFit/>
+          </a:bodyPr>
+          <a:lstStyle/>
+          <a:p>
+            <a:pPr algn="l"/>
+            <a:r>
+              <a:rPr sz="1400" b="0">
+                <a:solidFill>
+                  <a:srgbClr val="64748B"/>
+                </a:solidFill>
+                <a:latin typeface="Aptos"/>
+              </a:rPr>
+              <a:t>This slide helps transition from demonstration to discussion during the Q&amp;A section.</a:t>
+            </a:r>
+            <a:endParaRPr sz="1400" b="0">
+              <a:solidFill>
+                <a:srgbClr val="64748B"/>
+              </a:solidFill>
+              <a:latin typeface="Aptos"/>
+            </a:endParaRPr>
+          </a:p>
+        </p:txBody>
+      </p:sp>
+      <p:sp>
+        <p:nvSpPr>
+          <p:cNvPr id="6" name="Rounded Rectangle 5"/>
+          <p:cNvSpPr/>
+          <p:nvPr/>
+        </p:nvSpPr>
+        <p:spPr>
+          <a:xfrm>
+            <a:off x="777240" y="1965960"/>
+            <a:ext cx="3383280" cy="2926080"/>
+          </a:xfrm>
+          <a:prstGeom prst="roundRect">
+            <a:avLst/>
+          </a:prstGeom>
+          <a:solidFill>
+            <a:srgbClr val="FFFFFF"/>
+          </a:solidFill>
+          <a:ln w="19050">
+            <a:solidFill>
+              <a:srgbClr val="0D9488"/>
+            </a:solidFill>
+          </a:ln>
+        </p:spPr>
+        <p:style>
+          <a:lnRef idx="1">
+            <a:schemeClr val="accent1"/>
+          </a:lnRef>
+          <a:fillRef idx="3">
+            <a:schemeClr val="accent1"/>
+          </a:fillRef>
+          <a:effectRef idx="2">
+            <a:schemeClr val="accent1"/>
+          </a:effectRef>
+          <a:fontRef idx="minor">
+            <a:schemeClr val="lt1"/>
+          </a:fontRef>
+        </p:style>
+        <p:txBody>
+          <a:bodyPr rtlCol="0" anchor="ctr"/>
+          <a:lstStyle/>
+          <a:p>
+            <a:pPr algn="ctr"/>
+          </a:p>
+        </p:txBody>
+      </p:sp>
+      <p:sp>
+        <p:nvSpPr>
+          <p:cNvPr id="7" name="TextBox 6"/>
+          <p:cNvSpPr txBox="1"/>
+          <p:nvPr/>
+        </p:nvSpPr>
+        <p:spPr>
+          <a:xfrm>
+            <a:off x="1005840" y="2240280"/>
+            <a:ext cx="2834640" cy="320040"/>
+          </a:xfrm>
+          <a:prstGeom prst="rect">
+            <a:avLst/>
+          </a:prstGeom>
+          <a:noFill/>
+        </p:spPr>
+        <p:txBody>
+          <a:bodyPr wrap="square" anchor="t">
+            <a:spAutoFit/>
+          </a:bodyPr>
+          <a:lstStyle/>
+          <a:p>
+            <a:pPr algn="l"/>
+            <a:r>
+              <a:rPr sz="2200" b="1">
+                <a:solidFill>
+                  <a:srgbClr val="0F172A"/>
+                </a:solidFill>
+                <a:latin typeface="Aptos Display"/>
+              </a:rPr>
+              <a:t>Strengths</a:t>
+            </a:r>
+            <a:endParaRPr sz="2200" b="1">
+              <a:solidFill>
+                <a:srgbClr val="0F172A"/>
+              </a:solidFill>
+              <a:latin typeface="Aptos Display"/>
+            </a:endParaRPr>
+          </a:p>
+        </p:txBody>
+      </p:sp>
+      <p:sp>
+        <p:nvSpPr>
+          <p:cNvPr id="8" name="TextBox 7"/>
+          <p:cNvSpPr txBox="1"/>
+          <p:nvPr/>
+        </p:nvSpPr>
+        <p:spPr>
+          <a:xfrm>
+            <a:off x="1005840" y="2697480"/>
+            <a:ext cx="2743200" cy="1737360"/>
           </a:xfrm>
           <a:prstGeom prst="rect">
             <a:avLst/>
@@ -5031,46 +9227,411 @@
           <a:p>
             <a:pPr>
               <a:spcAft>
-                <a:spcPts val="1000"/>
+                <a:spcPts val="800"/>
               </a:spcAft>
-              <a:defRPr sz="2100">
+              <a:defRPr sz="1500">
                 <a:solidFill>
                   <a:srgbClr val="0F172A"/>
                 </a:solidFill>
+                <a:latin typeface="Aptos"/>
               </a:defRPr>
             </a:pPr>
             <a:r>
-              <a:t>Strengths: modular code, external data integration, reproducible setup, and coursework-aligned deliverables.</a:t>
+              <a:t>Clear modular code structure</a:t>
             </a:r>
           </a:p>
           <a:p>
             <a:pPr>
               <a:spcAft>
-                <a:spcPts val="1000"/>
+                <a:spcPts val="800"/>
               </a:spcAft>
-              <a:defRPr sz="1900">
+              <a:defRPr sz="1500">
                 <a:solidFill>
                   <a:srgbClr val="0F172A"/>
                 </a:solidFill>
+                <a:latin typeface="Aptos"/>
               </a:defRPr>
             </a:pPr>
             <a:r>
-              <a:t>Limitations: SQLite is best for local demo; production deployment should move to PostgreSQL and background jobs.</a:t>
+              <a:t>Real external data integration</a:t>
             </a:r>
           </a:p>
           <a:p>
             <a:pPr>
               <a:spcAft>
-                <a:spcPts val="1000"/>
+                <a:spcPts val="800"/>
               </a:spcAft>
-              <a:defRPr sz="1900">
+              <a:defRPr sz="1500">
                 <a:solidFill>
                   <a:srgbClr val="0F172A"/>
                 </a:solidFill>
+                <a:latin typeface="Aptos"/>
               </a:defRPr>
             </a:pPr>
             <a:r>
-              <a:t>Future work: caching, scheduled imports, role-based access control, and visual dashboards.</a:t>
+              <a:t>Automated testing and seeded demo data</a:t>
+            </a:r>
+          </a:p>
+          <a:p>
+            <a:pPr>
+              <a:spcAft>
+                <a:spcPts val="800"/>
+              </a:spcAft>
+              <a:defRPr sz="1500">
+                <a:solidFill>
+                  <a:srgbClr val="0F172A"/>
+                </a:solidFill>
+                <a:latin typeface="Aptos"/>
+              </a:defRPr>
+            </a:pPr>
+            <a:r>
+              <a:t>Complete submission materials</a:t>
+            </a:r>
+          </a:p>
+        </p:txBody>
+      </p:sp>
+      <p:sp>
+        <p:nvSpPr>
+          <p:cNvPr id="9" name="Rounded Rectangle 8"/>
+          <p:cNvSpPr/>
+          <p:nvPr/>
+        </p:nvSpPr>
+        <p:spPr>
+          <a:xfrm>
+            <a:off x="4407408" y="1965960"/>
+            <a:ext cx="3383280" cy="2926080"/>
+          </a:xfrm>
+          <a:prstGeom prst="roundRect">
+            <a:avLst/>
+          </a:prstGeom>
+          <a:solidFill>
+            <a:srgbClr val="FFFFFF"/>
+          </a:solidFill>
+          <a:ln w="19050">
+            <a:solidFill>
+              <a:srgbClr val="F97316"/>
+            </a:solidFill>
+          </a:ln>
+        </p:spPr>
+        <p:style>
+          <a:lnRef idx="1">
+            <a:schemeClr val="accent1"/>
+          </a:lnRef>
+          <a:fillRef idx="3">
+            <a:schemeClr val="accent1"/>
+          </a:fillRef>
+          <a:effectRef idx="2">
+            <a:schemeClr val="accent1"/>
+          </a:effectRef>
+          <a:fontRef idx="minor">
+            <a:schemeClr val="lt1"/>
+          </a:fontRef>
+        </p:style>
+        <p:txBody>
+          <a:bodyPr rtlCol="0" anchor="ctr"/>
+          <a:lstStyle/>
+          <a:p>
+            <a:pPr algn="ctr"/>
+          </a:p>
+        </p:txBody>
+      </p:sp>
+      <p:sp>
+        <p:nvSpPr>
+          <p:cNvPr id="10" name="TextBox 9"/>
+          <p:cNvSpPr txBox="1"/>
+          <p:nvPr/>
+        </p:nvSpPr>
+        <p:spPr>
+          <a:xfrm>
+            <a:off x="4636008" y="2240280"/>
+            <a:ext cx="2834640" cy="320040"/>
+          </a:xfrm>
+          <a:prstGeom prst="rect">
+            <a:avLst/>
+          </a:prstGeom>
+          <a:noFill/>
+        </p:spPr>
+        <p:txBody>
+          <a:bodyPr wrap="square" anchor="t">
+            <a:spAutoFit/>
+          </a:bodyPr>
+          <a:lstStyle/>
+          <a:p>
+            <a:pPr algn="l"/>
+            <a:r>
+              <a:rPr sz="2200" b="1">
+                <a:solidFill>
+                  <a:srgbClr val="0F172A"/>
+                </a:solidFill>
+                <a:latin typeface="Aptos Display"/>
+              </a:rPr>
+              <a:t>Current limitations</a:t>
+            </a:r>
+            <a:endParaRPr sz="2200" b="1">
+              <a:solidFill>
+                <a:srgbClr val="0F172A"/>
+              </a:solidFill>
+              <a:latin typeface="Aptos Display"/>
+            </a:endParaRPr>
+          </a:p>
+        </p:txBody>
+      </p:sp>
+      <p:sp>
+        <p:nvSpPr>
+          <p:cNvPr id="11" name="TextBox 10"/>
+          <p:cNvSpPr txBox="1"/>
+          <p:nvPr/>
+        </p:nvSpPr>
+        <p:spPr>
+          <a:xfrm>
+            <a:off x="4636008" y="2697480"/>
+            <a:ext cx="2743200" cy="1737360"/>
+          </a:xfrm>
+          <a:prstGeom prst="rect">
+            <a:avLst/>
+          </a:prstGeom>
+          <a:noFill/>
+        </p:spPr>
+        <p:txBody>
+          <a:bodyPr wrap="square">
+            <a:spAutoFit/>
+          </a:bodyPr>
+          <a:lstStyle/>
+          <a:p>
+            <a:pPr>
+              <a:spcAft>
+                <a:spcPts val="800"/>
+              </a:spcAft>
+              <a:defRPr sz="1500">
+                <a:solidFill>
+                  <a:srgbClr val="0F172A"/>
+                </a:solidFill>
+                <a:latin typeface="Aptos"/>
+              </a:defRPr>
+            </a:pPr>
+            <a:r>
+              <a:t>SQLite is best for local use</a:t>
+            </a:r>
+          </a:p>
+          <a:p>
+            <a:pPr>
+              <a:spcAft>
+                <a:spcPts val="800"/>
+              </a:spcAft>
+              <a:defRPr sz="1500">
+                <a:solidFill>
+                  <a:srgbClr val="0F172A"/>
+                </a:solidFill>
+                <a:latin typeface="Aptos"/>
+              </a:defRPr>
+            </a:pPr>
+            <a:r>
+              <a:t>Imports are synchronous</a:t>
+            </a:r>
+          </a:p>
+          <a:p>
+            <a:pPr>
+              <a:spcAft>
+                <a:spcPts val="800"/>
+              </a:spcAft>
+              <a:defRPr sz="1500">
+                <a:solidFill>
+                  <a:srgbClr val="0F172A"/>
+                </a:solidFill>
+                <a:latin typeface="Aptos"/>
+              </a:defRPr>
+            </a:pPr>
+            <a:r>
+              <a:t>Authentication is still simple</a:t>
+            </a:r>
+          </a:p>
+          <a:p>
+            <a:pPr>
+              <a:spcAft>
+                <a:spcPts val="800"/>
+              </a:spcAft>
+              <a:defRPr sz="1500">
+                <a:solidFill>
+                  <a:srgbClr val="0F172A"/>
+                </a:solidFill>
+                <a:latin typeface="Aptos"/>
+              </a:defRPr>
+            </a:pPr>
+            <a:r>
+              <a:t>No frontend dashboard yet</a:t>
+            </a:r>
+          </a:p>
+        </p:txBody>
+      </p:sp>
+      <p:sp>
+        <p:nvSpPr>
+          <p:cNvPr id="12" name="Rounded Rectangle 11"/>
+          <p:cNvSpPr/>
+          <p:nvPr/>
+        </p:nvSpPr>
+        <p:spPr>
+          <a:xfrm>
+            <a:off x="8046720" y="1965960"/>
+            <a:ext cx="3383280" cy="2926080"/>
+          </a:xfrm>
+          <a:prstGeom prst="roundRect">
+            <a:avLst/>
+          </a:prstGeom>
+          <a:solidFill>
+            <a:srgbClr val="FFFFFF"/>
+          </a:solidFill>
+          <a:ln w="19050">
+            <a:solidFill>
+              <a:srgbClr val="F59E0B"/>
+            </a:solidFill>
+          </a:ln>
+        </p:spPr>
+        <p:style>
+          <a:lnRef idx="1">
+            <a:schemeClr val="accent1"/>
+          </a:lnRef>
+          <a:fillRef idx="3">
+            <a:schemeClr val="accent1"/>
+          </a:fillRef>
+          <a:effectRef idx="2">
+            <a:schemeClr val="accent1"/>
+          </a:effectRef>
+          <a:fontRef idx="minor">
+            <a:schemeClr val="lt1"/>
+          </a:fontRef>
+        </p:style>
+        <p:txBody>
+          <a:bodyPr rtlCol="0" anchor="ctr"/>
+          <a:lstStyle/>
+          <a:p>
+            <a:pPr algn="ctr"/>
+          </a:p>
+        </p:txBody>
+      </p:sp>
+      <p:sp>
+        <p:nvSpPr>
+          <p:cNvPr id="13" name="TextBox 12"/>
+          <p:cNvSpPr txBox="1"/>
+          <p:nvPr/>
+        </p:nvSpPr>
+        <p:spPr>
+          <a:xfrm>
+            <a:off x="8275320" y="2240280"/>
+            <a:ext cx="2834640" cy="320040"/>
+          </a:xfrm>
+          <a:prstGeom prst="rect">
+            <a:avLst/>
+          </a:prstGeom>
+          <a:noFill/>
+        </p:spPr>
+        <p:txBody>
+          <a:bodyPr wrap="square" anchor="t">
+            <a:spAutoFit/>
+          </a:bodyPr>
+          <a:lstStyle/>
+          <a:p>
+            <a:pPr algn="l"/>
+            <a:r>
+              <a:rPr sz="2200" b="1">
+                <a:solidFill>
+                  <a:srgbClr val="0F172A"/>
+                </a:solidFill>
+                <a:latin typeface="Aptos Display"/>
+              </a:rPr>
+              <a:t>Future improvements</a:t>
+            </a:r>
+            <a:endParaRPr sz="2200" b="1">
+              <a:solidFill>
+                <a:srgbClr val="0F172A"/>
+              </a:solidFill>
+              <a:latin typeface="Aptos Display"/>
+            </a:endParaRPr>
+          </a:p>
+        </p:txBody>
+      </p:sp>
+      <p:sp>
+        <p:nvSpPr>
+          <p:cNvPr id="14" name="TextBox 13"/>
+          <p:cNvSpPr txBox="1"/>
+          <p:nvPr/>
+        </p:nvSpPr>
+        <p:spPr>
+          <a:xfrm>
+            <a:off x="8275320" y="2697480"/>
+            <a:ext cx="2743200" cy="1737360"/>
+          </a:xfrm>
+          <a:prstGeom prst="rect">
+            <a:avLst/>
+          </a:prstGeom>
+          <a:noFill/>
+        </p:spPr>
+        <p:txBody>
+          <a:bodyPr wrap="square">
+            <a:spAutoFit/>
+          </a:bodyPr>
+          <a:lstStyle/>
+          <a:p>
+            <a:pPr>
+              <a:spcAft>
+                <a:spcPts val="800"/>
+              </a:spcAft>
+              <a:defRPr sz="1500">
+                <a:solidFill>
+                  <a:srgbClr val="0F172A"/>
+                </a:solidFill>
+                <a:latin typeface="Aptos"/>
+              </a:defRPr>
+            </a:pPr>
+            <a:r>
+              <a:t>Move to PostgreSQL and hosted deployment</a:t>
+            </a:r>
+          </a:p>
+          <a:p>
+            <a:pPr>
+              <a:spcAft>
+                <a:spcPts val="800"/>
+              </a:spcAft>
+              <a:defRPr sz="1500">
+                <a:solidFill>
+                  <a:srgbClr val="0F172A"/>
+                </a:solidFill>
+                <a:latin typeface="Aptos"/>
+              </a:defRPr>
+            </a:pPr>
+            <a:r>
+              <a:t>Schedule background imports</a:t>
+            </a:r>
+          </a:p>
+          <a:p>
+            <a:pPr>
+              <a:spcAft>
+                <a:spcPts val="800"/>
+              </a:spcAft>
+              <a:defRPr sz="1500">
+                <a:solidFill>
+                  <a:srgbClr val="0F172A"/>
+                </a:solidFill>
+                <a:latin typeface="Aptos"/>
+              </a:defRPr>
+            </a:pPr>
+            <a:r>
+              <a:t>Add role-based access control</a:t>
+            </a:r>
+          </a:p>
+          <a:p>
+            <a:pPr>
+              <a:spcAft>
+                <a:spcPts val="800"/>
+              </a:spcAft>
+              <a:defRPr sz="1500">
+                <a:solidFill>
+                  <a:srgbClr val="0F172A"/>
+                </a:solidFill>
+                <a:latin typeface="Aptos"/>
+              </a:defRPr>
+            </a:pPr>
+            <a:r>
+              <a:t>Build a small analytics dashboard</a:t>
             </a:r>
           </a:p>
         </p:txBody>
@@ -5399,6 +9960,10 @@
       </a:style>
     </a:lnDef>
   </a:objectDefaults>
-  <a:extraClrSchemeLst/>
+  <a:extLst>
+    <a:ext uri="{05A4C25C-085E-4340-85A3-A5531E510DB2}">
+      <thm15:themeFamily xmlns:thm15="http://schemas.microsoft.com/office/thememl/2012/main" name="Office Theme" id="{62F939B6-93AF-4DB8-9C6B-D6C7DFDC589F}" vid="{4A3C46E8-61CC-4603-A589-7422A47A8E4A}"/>
+    </a:ext>
+  </a:extLst>
 </a:theme>
 </file>
--- a/presentation/Urban_Climate_Insights_API_Presentation.pptx
+++ b/presentation/Urban_Climate_Insights_API_Presentation.pptx
@@ -8288,51 +8288,8 @@
           </a:bodyPr>
           <a:lstStyle/>
           <a:p>
-            <a:pPr>
-              <a:spcAft>
-                <a:spcPts val="800"/>
-              </a:spcAft>
-              <a:defRPr sz="1400">
-                <a:solidFill>
-                  <a:srgbClr val="0F172A"/>
-                </a:solidFill>
-                <a:latin typeface="Aptos"/>
-              </a:defRPr>
-            </a:pPr>
-            <a:r>
-              <a:t>Public GitHub repo</a:t>
-            </a:r>
-          </a:p>
-          <a:p>
-            <a:pPr>
-              <a:spcAft>
-                <a:spcPts val="800"/>
-              </a:spcAft>
-              <a:defRPr sz="1400">
-                <a:solidFill>
-                  <a:srgbClr val="0F172A"/>
-                </a:solidFill>
-                <a:latin typeface="Aptos"/>
-              </a:defRPr>
-            </a:pPr>
-            <a:r>
-              <a:t>Visible commit history</a:t>
-            </a:r>
-          </a:p>
-          <a:p>
-            <a:pPr>
-              <a:spcAft>
-                <a:spcPts val="800"/>
-              </a:spcAft>
-              <a:defRPr sz="1400">
-                <a:solidFill>
-                  <a:srgbClr val="0F172A"/>
-                </a:solidFill>
-                <a:latin typeface="Aptos"/>
-              </a:defRPr>
-            </a:pPr>
-            <a:r>
-              <a:t>Runnable project state</a:t>
+            <a:r>
+              <a:t>Public GitHub repo | Commit history: setup, core API, tests, docs, cleanup | Runnable final version</a:t>
             </a:r>
           </a:p>
         </p:txBody>
@@ -8404,22 +8361,9 @@
           </a:bodyPr>
           <a:lstStyle/>
           <a:p>
-            <a:pPr algn="l"/>
-            <a:r>
-              <a:rPr sz="2000" b="1">
-                <a:solidFill>
-                  <a:srgbClr val="0F172A"/>
-                </a:solidFill>
-                <a:latin typeface="Aptos Display"/>
-              </a:rPr>
-              <a:t>API Documentation</a:t>
-            </a:r>
-            <a:endParaRPr sz="2000" b="1">
-              <a:solidFill>
-                <a:srgbClr val="0F172A"/>
-              </a:solidFill>
-              <a:latin typeface="Aptos Display"/>
-            </a:endParaRPr>
+            <a:r>
+              <a:t>API Documentation Overview</a:t>
+            </a:r>
           </a:p>
         </p:txBody>
       </p:sp>
@@ -8561,22 +8505,9 @@
           </a:bodyPr>
           <a:lstStyle/>
           <a:p>
-            <a:pPr algn="l"/>
-            <a:r>
-              <a:rPr sz="2000" b="1">
-                <a:solidFill>
-                  <a:srgbClr val="0F172A"/>
-                </a:solidFill>
-                <a:latin typeface="Aptos Display"/>
-              </a:rPr>
-              <a:t>Technical Report</a:t>
-            </a:r>
-            <a:endParaRPr sz="2000" b="1">
-              <a:solidFill>
-                <a:srgbClr val="0F172A"/>
-              </a:solidFill>
-              <a:latin typeface="Aptos Display"/>
-            </a:endParaRPr>
+            <a:r>
+              <a:t>Technical Report Highlights</a:t>
+            </a:r>
           </a:p>
         </p:txBody>
       </p:sp>
@@ -8602,51 +8533,8 @@
           </a:bodyPr>
           <a:lstStyle/>
           <a:p>
-            <a:pPr>
-              <a:spcAft>
-                <a:spcPts val="800"/>
-              </a:spcAft>
-              <a:defRPr sz="1400">
-                <a:solidFill>
-                  <a:srgbClr val="0F172A"/>
-                </a:solidFill>
-                <a:latin typeface="Aptos"/>
-              </a:defRPr>
-            </a:pPr>
-            <a:r>
-              <a:t>Stack justification</a:t>
-            </a:r>
-          </a:p>
-          <a:p>
-            <a:pPr>
-              <a:spcAft>
-                <a:spcPts val="800"/>
-              </a:spcAft>
-              <a:defRPr sz="1400">
-                <a:solidFill>
-                  <a:srgbClr val="0F172A"/>
-                </a:solidFill>
-                <a:latin typeface="Aptos"/>
-              </a:defRPr>
-            </a:pPr>
-            <a:r>
-              <a:t>Testing + limitations</a:t>
-            </a:r>
-          </a:p>
-          <a:p>
-            <a:pPr>
-              <a:spcAft>
-                <a:spcPts val="800"/>
-              </a:spcAft>
-              <a:defRPr sz="1400">
-                <a:solidFill>
-                  <a:srgbClr val="0F172A"/>
-                </a:solidFill>
-                <a:latin typeface="Aptos"/>
-              </a:defRPr>
-            </a:pPr>
-            <a:r>
-              <a:t>GenAI declaration</a:t>
+            <a:r>
+              <a:t>Stack justification | Architecture and testing approach | Limitations, future work, and GenAI declaration</a:t>
             </a:r>
           </a:p>
         </p:txBody>
@@ -8875,22 +8763,9 @@
           </a:bodyPr>
           <a:lstStyle/>
           <a:p>
-            <a:pPr algn="l"/>
-            <a:r>
-              <a:rPr sz="2000" b="1">
-                <a:solidFill>
-                  <a:srgbClr val="0F172A"/>
-                </a:solidFill>
-                <a:latin typeface="Aptos Display"/>
-              </a:rPr>
-              <a:t>Deliverables included</a:t>
-            </a:r>
-            <a:endParaRPr sz="2000" b="1">
-              <a:solidFill>
-                <a:srgbClr val="0F172A"/>
-              </a:solidFill>
-              <a:latin typeface="Aptos Display"/>
-            </a:endParaRPr>
+            <a:r>
+              <a:t>All Deliverables</a:t>
+            </a:r>
           </a:p>
         </p:txBody>
       </p:sp>
@@ -8916,19 +8791,8 @@
           </a:bodyPr>
           <a:lstStyle/>
           <a:p>
-            <a:pPr>
-              <a:spcAft>
-                <a:spcPts val="800"/>
-              </a:spcAft>
-              <a:defRPr sz="1500">
-                <a:solidFill>
-                  <a:srgbClr val="0F172A"/>
-                </a:solidFill>
-                <a:latin typeface="Aptos"/>
-              </a:defRPr>
-            </a:pPr>
-            <a:r>
-              <a:t>README, API documentation PDF, technical report PDF, OpenAPI schema export, presentation deck, and reproducible seed script.</a:t>
+            <a:r>
+              <a:t>Code repository, API documentation PDF, technical report PDF, presentation slides, OpenAPI export, and reproducible seed script.</a:t>
             </a:r>
           </a:p>
         </p:txBody>
